--- a/native-stylekit/theme/burgundy.pptx
+++ b/native-stylekit/theme/burgundy.pptx
@@ -3931,7 +3931,7 @@
                 <a:latin typeface="+mn-lt"/>
                 <a:ea typeface="+mn-ea"/>
               </a:rPr>
-              <a:t>色彩外框 / Colored Outline</a:t>
+              <a:t>清爽線框 / Clean Outline</a:t>
             </a:r>
             <a:endParaRPr lang="zh-TW"/>
           </a:p>
@@ -3960,7 +3960,7 @@
           <a:fillRef idx="0">
             <a:schemeClr val="tx1"/>
           </a:fillRef>
-          <a:effectRef idx="1">
+          <a:effectRef idx="0">
             <a:schemeClr val="tx1"/>
           </a:effectRef>
           <a:fontRef idx="minor">
@@ -4013,7 +4013,7 @@
           <a:fillRef idx="0">
             <a:schemeClr val="accent1"/>
           </a:fillRef>
-          <a:effectRef idx="1">
+          <a:effectRef idx="0">
             <a:schemeClr val="accent1"/>
           </a:effectRef>
           <a:fontRef idx="minor">
@@ -4066,11 +4066,13 @@
           <a:fillRef idx="0">
             <a:schemeClr val="accent2"/>
           </a:fillRef>
-          <a:effectRef idx="1">
+          <a:effectRef idx="0">
             <a:schemeClr val="accent2"/>
           </a:effectRef>
           <a:fontRef idx="minor">
-            <a:schemeClr val="accent2"/>
+            <a:schemeClr val="accent2">
+              <a:shade val="60000"/>
+            </a:schemeClr>
           </a:fontRef>
         </p:style>
         <p:txBody>
@@ -4085,7 +4087,9 @@
             <a:r>
               <a:rPr lang="zh-TW" sz="2000" b="1">
                 <a:solidFill>
-                  <a:schemeClr val="accent2"/>
+                  <a:schemeClr val="accent2">
+                    <a:shade val="60000"/>
+                  </a:schemeClr>
                 </a:solidFill>
                 <a:latin typeface="+mn-lt"/>
                 <a:ea typeface="+mn-ea"/>
@@ -4119,7 +4123,7 @@
           <a:fillRef idx="0">
             <a:schemeClr val="accent3"/>
           </a:fillRef>
-          <a:effectRef idx="1">
+          <a:effectRef idx="0">
             <a:schemeClr val="accent3"/>
           </a:effectRef>
           <a:fontRef idx="minor">
@@ -4172,11 +4176,13 @@
           <a:fillRef idx="0">
             <a:schemeClr val="accent4"/>
           </a:fillRef>
-          <a:effectRef idx="1">
+          <a:effectRef idx="0">
             <a:schemeClr val="accent4"/>
           </a:effectRef>
           <a:fontRef idx="minor">
-            <a:schemeClr val="accent4"/>
+            <a:schemeClr val="accent4">
+              <a:shade val="75000"/>
+            </a:schemeClr>
           </a:fontRef>
         </p:style>
         <p:txBody>
@@ -4191,7 +4197,9 @@
             <a:r>
               <a:rPr lang="zh-TW" sz="2000" b="1">
                 <a:solidFill>
-                  <a:schemeClr val="accent4"/>
+                  <a:schemeClr val="accent4">
+                    <a:shade val="75000"/>
+                  </a:schemeClr>
                 </a:solidFill>
                 <a:latin typeface="+mn-lt"/>
                 <a:ea typeface="+mn-ea"/>
@@ -4225,7 +4233,7 @@
           <a:fillRef idx="0">
             <a:schemeClr val="accent5"/>
           </a:fillRef>
-          <a:effectRef idx="1">
+          <a:effectRef idx="0">
             <a:schemeClr val="accent5"/>
           </a:effectRef>
           <a:fontRef idx="minor">
@@ -4278,11 +4286,13 @@
           <a:fillRef idx="0">
             <a:schemeClr val="accent6"/>
           </a:fillRef>
-          <a:effectRef idx="1">
+          <a:effectRef idx="0">
             <a:schemeClr val="accent6"/>
           </a:effectRef>
           <a:fontRef idx="minor">
-            <a:schemeClr val="accent6"/>
+            <a:schemeClr val="accent6">
+              <a:shade val="35000"/>
+            </a:schemeClr>
           </a:fontRef>
         </p:style>
         <p:txBody>
@@ -4297,7 +4307,9 @@
             <a:r>
               <a:rPr lang="zh-TW" sz="2000" b="1">
                 <a:solidFill>
-                  <a:schemeClr val="accent6"/>
+                  <a:schemeClr val="accent6">
+                    <a:shade val="35000"/>
+                  </a:schemeClr>
                 </a:solidFill>
                 <a:latin typeface="+mn-lt"/>
                 <a:ea typeface="+mn-ea"/>
@@ -4344,7 +4356,7 @@
                 <a:latin typeface="+mn-lt"/>
                 <a:ea typeface="+mn-ea"/>
               </a:rPr>
-              <a:t>色彩填滿 / Colored Fill</a:t>
+              <a:t>主色實心 / Solid Color</a:t>
             </a:r>
             <a:endParaRPr lang="zh-TW"/>
           </a:p>
@@ -4368,13 +4380,13 @@
         <p:style>
           <a:lnRef idx="1">
             <a:schemeClr val="tx1">
-              <a:shade val="50000"/>
+              <a:shade val="80000"/>
             </a:schemeClr>
           </a:lnRef>
           <a:fillRef idx="1">
             <a:schemeClr val="tx1"/>
           </a:fillRef>
-          <a:effectRef idx="1">
+          <a:effectRef idx="0">
             <a:schemeClr val="tx1"/>
           </a:effectRef>
           <a:fontRef idx="minor">
@@ -4422,13 +4434,13 @@
         <p:style>
           <a:lnRef idx="1">
             <a:schemeClr val="accent1">
-              <a:shade val="50000"/>
+              <a:shade val="80000"/>
             </a:schemeClr>
           </a:lnRef>
           <a:fillRef idx="1">
             <a:schemeClr val="accent1"/>
           </a:fillRef>
-          <a:effectRef idx="1">
+          <a:effectRef idx="0">
             <a:schemeClr val="accent1"/>
           </a:effectRef>
           <a:fontRef idx="minor">
@@ -4476,13 +4488,13 @@
         <p:style>
           <a:lnRef idx="1">
             <a:schemeClr val="accent2">
-              <a:shade val="50000"/>
+              <a:shade val="80000"/>
             </a:schemeClr>
           </a:lnRef>
           <a:fillRef idx="1">
             <a:schemeClr val="accent2"/>
           </a:fillRef>
-          <a:effectRef idx="1">
+          <a:effectRef idx="0">
             <a:schemeClr val="accent2"/>
           </a:effectRef>
           <a:fontRef idx="minor">
@@ -4530,13 +4542,13 @@
         <p:style>
           <a:lnRef idx="1">
             <a:schemeClr val="accent3">
-              <a:shade val="50000"/>
+              <a:shade val="80000"/>
             </a:schemeClr>
           </a:lnRef>
           <a:fillRef idx="1">
             <a:schemeClr val="accent3"/>
           </a:fillRef>
-          <a:effectRef idx="1">
+          <a:effectRef idx="0">
             <a:schemeClr val="accent3"/>
           </a:effectRef>
           <a:fontRef idx="minor">
@@ -4584,17 +4596,17 @@
         <p:style>
           <a:lnRef idx="1">
             <a:schemeClr val="accent4">
-              <a:shade val="50000"/>
+              <a:shade val="80000"/>
             </a:schemeClr>
           </a:lnRef>
           <a:fillRef idx="1">
             <a:schemeClr val="accent4"/>
           </a:fillRef>
-          <a:effectRef idx="1">
+          <a:effectRef idx="0">
             <a:schemeClr val="accent4"/>
           </a:effectRef>
           <a:fontRef idx="minor">
-            <a:schemeClr val="lt1"/>
+            <a:schemeClr val="tx1"/>
           </a:fontRef>
         </p:style>
         <p:txBody>
@@ -4609,7 +4621,7 @@
             <a:r>
               <a:rPr lang="zh-TW" sz="2000" b="1">
                 <a:solidFill>
-                  <a:schemeClr val="lt1"/>
+                  <a:schemeClr val="tx1"/>
                 </a:solidFill>
                 <a:latin typeface="+mn-lt"/>
                 <a:ea typeface="+mn-ea"/>
@@ -4638,13 +4650,13 @@
         <p:style>
           <a:lnRef idx="1">
             <a:schemeClr val="accent5">
-              <a:shade val="50000"/>
+              <a:shade val="80000"/>
             </a:schemeClr>
           </a:lnRef>
           <a:fillRef idx="1">
             <a:schemeClr val="accent5"/>
           </a:fillRef>
-          <a:effectRef idx="1">
+          <a:effectRef idx="0">
             <a:schemeClr val="accent5"/>
           </a:effectRef>
           <a:fontRef idx="minor">
@@ -4692,13 +4704,13 @@
         <p:style>
           <a:lnRef idx="1">
             <a:schemeClr val="accent6">
-              <a:shade val="50000"/>
+              <a:shade val="80000"/>
             </a:schemeClr>
           </a:lnRef>
           <a:fillRef idx="1">
             <a:schemeClr val="accent6"/>
           </a:fillRef>
-          <a:effectRef idx="1">
+          <a:effectRef idx="0">
             <a:schemeClr val="accent6"/>
           </a:effectRef>
           <a:fontRef idx="minor">
@@ -4764,7 +4776,7 @@
                 <a:latin typeface="+mn-lt"/>
                 <a:ea typeface="+mn-ea"/>
               </a:rPr>
-              <a:t>淺色外框＋色彩填滿 / Light 1 Outline</a:t>
+              <a:t>白框浮起 / White Rim Lift</a:t>
             </a:r>
             <a:endParaRPr lang="zh-TW"/>
           </a:p>
@@ -4786,7 +4798,7 @@
           </a:prstGeom>
         </p:spPr>
         <p:style>
-          <a:lnRef idx="1">
+          <a:lnRef idx="2">
             <a:schemeClr val="lt1"/>
           </a:lnRef>
           <a:fillRef idx="1">
@@ -4838,7 +4850,7 @@
           </a:prstGeom>
         </p:spPr>
         <p:style>
-          <a:lnRef idx="1">
+          <a:lnRef idx="2">
             <a:schemeClr val="lt1"/>
           </a:lnRef>
           <a:fillRef idx="1">
@@ -4890,7 +4902,7 @@
           </a:prstGeom>
         </p:spPr>
         <p:style>
-          <a:lnRef idx="1">
+          <a:lnRef idx="2">
             <a:schemeClr val="lt1"/>
           </a:lnRef>
           <a:fillRef idx="1">
@@ -4942,7 +4954,7 @@
           </a:prstGeom>
         </p:spPr>
         <p:style>
-          <a:lnRef idx="1">
+          <a:lnRef idx="2">
             <a:schemeClr val="lt1"/>
           </a:lnRef>
           <a:fillRef idx="1">
@@ -4994,7 +5006,7 @@
           </a:prstGeom>
         </p:spPr>
         <p:style>
-          <a:lnRef idx="1">
+          <a:lnRef idx="2">
             <a:schemeClr val="lt1"/>
           </a:lnRef>
           <a:fillRef idx="1">
@@ -5004,7 +5016,7 @@
             <a:schemeClr val="accent4"/>
           </a:effectRef>
           <a:fontRef idx="minor">
-            <a:schemeClr val="lt1"/>
+            <a:schemeClr val="tx1"/>
           </a:fontRef>
         </p:style>
         <p:txBody>
@@ -5019,7 +5031,7 @@
             <a:r>
               <a:rPr lang="zh-TW" sz="2000" b="1">
                 <a:solidFill>
-                  <a:schemeClr val="lt1"/>
+                  <a:schemeClr val="tx1"/>
                 </a:solidFill>
                 <a:latin typeface="+mn-lt"/>
                 <a:ea typeface="+mn-ea"/>
@@ -5046,7 +5058,7 @@
           </a:prstGeom>
         </p:spPr>
         <p:style>
-          <a:lnRef idx="1">
+          <a:lnRef idx="2">
             <a:schemeClr val="lt1"/>
           </a:lnRef>
           <a:fillRef idx="1">
@@ -5098,7 +5110,7 @@
           </a:prstGeom>
         </p:spPr>
         <p:style>
-          <a:lnRef idx="1">
+          <a:lnRef idx="2">
             <a:schemeClr val="lt1"/>
           </a:lnRef>
           <a:fillRef idx="1">
@@ -5170,7 +5182,7 @@
                 <a:latin typeface="+mn-lt"/>
                 <a:ea typeface="+mn-ea"/>
               </a:rPr>
-              <a:t>輕微效果 / Subtle Effect</a:t>
+              <a:t>柔底微浮 / Soft Tint Lift</a:t>
             </a:r>
             <a:endParaRPr lang="zh-TW"/>
           </a:p>
@@ -5192,7 +5204,7 @@
           </a:prstGeom>
         </p:spPr>
         <p:style>
-          <a:lnRef idx="1">
+          <a:lnRef idx="3">
             <a:schemeClr val="tx1"/>
           </a:lnRef>
           <a:fillRef idx="3">
@@ -5244,7 +5256,7 @@
           </a:prstGeom>
         </p:spPr>
         <p:style>
-          <a:lnRef idx="1">
+          <a:lnRef idx="3">
             <a:schemeClr val="accent1"/>
           </a:lnRef>
           <a:fillRef idx="3">
@@ -5296,7 +5308,7 @@
           </a:prstGeom>
         </p:spPr>
         <p:style>
-          <a:lnRef idx="1">
+          <a:lnRef idx="3">
             <a:schemeClr val="accent2"/>
           </a:lnRef>
           <a:fillRef idx="3">
@@ -5306,7 +5318,9 @@
             <a:schemeClr val="accent2"/>
           </a:effectRef>
           <a:fontRef idx="minor">
-            <a:schemeClr val="accent2"/>
+            <a:schemeClr val="accent2">
+              <a:shade val="50000"/>
+            </a:schemeClr>
           </a:fontRef>
         </p:style>
         <p:txBody>
@@ -5321,7 +5335,9 @@
             <a:r>
               <a:rPr lang="zh-TW" sz="2000" b="1">
                 <a:solidFill>
-                  <a:schemeClr val="accent2"/>
+                  <a:schemeClr val="accent2">
+                    <a:shade val="50000"/>
+                  </a:schemeClr>
                 </a:solidFill>
                 <a:latin typeface="+mn-lt"/>
                 <a:ea typeface="+mn-ea"/>
@@ -5348,7 +5364,7 @@
           </a:prstGeom>
         </p:spPr>
         <p:style>
-          <a:lnRef idx="1">
+          <a:lnRef idx="3">
             <a:schemeClr val="accent3"/>
           </a:lnRef>
           <a:fillRef idx="3">
@@ -5400,7 +5416,7 @@
           </a:prstGeom>
         </p:spPr>
         <p:style>
-          <a:lnRef idx="1">
+          <a:lnRef idx="3">
             <a:schemeClr val="accent4"/>
           </a:lnRef>
           <a:fillRef idx="3">
@@ -5410,7 +5426,9 @@
             <a:schemeClr val="accent4"/>
           </a:effectRef>
           <a:fontRef idx="minor">
-            <a:schemeClr val="accent4"/>
+            <a:schemeClr val="accent4">
+              <a:shade val="60000"/>
+            </a:schemeClr>
           </a:fontRef>
         </p:style>
         <p:txBody>
@@ -5425,7 +5443,9 @@
             <a:r>
               <a:rPr lang="zh-TW" sz="2000" b="1">
                 <a:solidFill>
-                  <a:schemeClr val="accent4"/>
+                  <a:schemeClr val="accent4">
+                    <a:shade val="60000"/>
+                  </a:schemeClr>
                 </a:solidFill>
                 <a:latin typeface="+mn-lt"/>
                 <a:ea typeface="+mn-ea"/>
@@ -5452,7 +5472,7 @@
           </a:prstGeom>
         </p:spPr>
         <p:style>
-          <a:lnRef idx="1">
+          <a:lnRef idx="3">
             <a:schemeClr val="accent5"/>
           </a:lnRef>
           <a:fillRef idx="3">
@@ -5504,7 +5524,7 @@
           </a:prstGeom>
         </p:spPr>
         <p:style>
-          <a:lnRef idx="1">
+          <a:lnRef idx="3">
             <a:schemeClr val="accent6"/>
           </a:lnRef>
           <a:fillRef idx="3">
@@ -5514,7 +5534,9 @@
             <a:schemeClr val="accent6"/>
           </a:effectRef>
           <a:fontRef idx="minor">
-            <a:schemeClr val="accent6"/>
+            <a:schemeClr val="accent6">
+              <a:shade val="30000"/>
+            </a:schemeClr>
           </a:fontRef>
         </p:style>
         <p:txBody>
@@ -5529,7 +5551,9 @@
             <a:r>
               <a:rPr lang="zh-TW" sz="2000" b="1">
                 <a:solidFill>
-                  <a:schemeClr val="accent6"/>
+                  <a:schemeClr val="accent6">
+                    <a:shade val="30000"/>
+                  </a:schemeClr>
                 </a:solidFill>
                 <a:latin typeface="+mn-lt"/>
                 <a:ea typeface="+mn-ea"/>
@@ -5576,7 +5600,7 @@
                 <a:latin typeface="+mn-lt"/>
                 <a:ea typeface="+mn-ea"/>
               </a:rPr>
-              <a:t>中度效果 / Moderate Effect</a:t>
+              <a:t>主色微立體 / Subtle Depth</a:t>
             </a:r>
             <a:endParaRPr lang="zh-TW"/>
           </a:p>
@@ -5831,7 +5855,7 @@
             <a:schemeClr val="accent4"/>
           </a:effectRef>
           <a:fontRef idx="minor">
-            <a:schemeClr val="lt1"/>
+            <a:schemeClr val="tx1"/>
           </a:fontRef>
         </p:style>
         <p:txBody>
@@ -5846,7 +5870,7 @@
             <a:r>
               <a:rPr lang="zh-TW" sz="2000" b="1">
                 <a:solidFill>
-                  <a:schemeClr val="lt1"/>
+                  <a:schemeClr val="tx1"/>
                 </a:solidFill>
                 <a:latin typeface="+mn-lt"/>
                 <a:ea typeface="+mn-ea"/>
@@ -6003,7 +6027,7 @@
                 <a:latin typeface="+mn-lt"/>
                 <a:ea typeface="+mn-ea"/>
               </a:rPr>
-              <a:t>強烈效果 / Intense Effect</a:t>
+              <a:t>深色浮起 / Deep Color Lift</a:t>
             </a:r>
             <a:endParaRPr lang="zh-TW"/>
           </a:p>
@@ -6032,7 +6056,9 @@
             <a:schemeClr val="tx1"/>
           </a:lnRef>
           <a:fillRef idx="1">
-            <a:schemeClr val="tx1"/>
+            <a:schemeClr val="tx1">
+              <a:shade val="45000"/>
+            </a:schemeClr>
           </a:fillRef>
           <a:effectRef idx="3">
             <a:schemeClr val="tx1"/>
@@ -6087,7 +6113,9 @@
             <a:schemeClr val="accent1"/>
           </a:lnRef>
           <a:fillRef idx="1">
-            <a:schemeClr val="accent1"/>
+            <a:schemeClr val="accent1">
+              <a:shade val="45000"/>
+            </a:schemeClr>
           </a:fillRef>
           <a:effectRef idx="3">
             <a:schemeClr val="accent1"/>
@@ -6142,13 +6170,15 @@
             <a:schemeClr val="accent2"/>
           </a:lnRef>
           <a:fillRef idx="1">
-            <a:schemeClr val="accent2"/>
+            <a:schemeClr val="accent2">
+              <a:shade val="45000"/>
+            </a:schemeClr>
           </a:fillRef>
           <a:effectRef idx="3">
             <a:schemeClr val="accent2"/>
           </a:effectRef>
           <a:fontRef idx="minor">
-            <a:schemeClr val="tx1"/>
+            <a:schemeClr val="lt1"/>
           </a:fontRef>
         </p:style>
         <p:txBody>
@@ -6163,7 +6193,7 @@
             <a:r>
               <a:rPr lang="zh-TW" sz="2000" b="1">
                 <a:solidFill>
-                  <a:schemeClr val="tx1"/>
+                  <a:schemeClr val="lt1"/>
                 </a:solidFill>
                 <a:latin typeface="+mn-lt"/>
                 <a:ea typeface="+mn-ea"/>
@@ -6197,7 +6227,9 @@
             <a:schemeClr val="accent3"/>
           </a:lnRef>
           <a:fillRef idx="1">
-            <a:schemeClr val="accent3"/>
+            <a:schemeClr val="accent3">
+              <a:shade val="45000"/>
+            </a:schemeClr>
           </a:fillRef>
           <a:effectRef idx="3">
             <a:schemeClr val="accent3"/>
@@ -6252,7 +6284,9 @@
             <a:schemeClr val="accent4"/>
           </a:lnRef>
           <a:fillRef idx="1">
-            <a:schemeClr val="accent4"/>
+            <a:schemeClr val="accent4">
+              <a:shade val="45000"/>
+            </a:schemeClr>
           </a:fillRef>
           <a:effectRef idx="3">
             <a:schemeClr val="accent4"/>
@@ -6307,7 +6341,9 @@
             <a:schemeClr val="accent5"/>
           </a:lnRef>
           <a:fillRef idx="1">
-            <a:schemeClr val="accent5"/>
+            <a:schemeClr val="accent5">
+              <a:shade val="45000"/>
+            </a:schemeClr>
           </a:fillRef>
           <a:effectRef idx="3">
             <a:schemeClr val="accent5"/>
@@ -6362,13 +6398,15 @@
             <a:schemeClr val="accent6"/>
           </a:lnRef>
           <a:fillRef idx="1">
-            <a:schemeClr val="accent6"/>
+            <a:schemeClr val="accent6">
+              <a:shade val="37500"/>
+            </a:schemeClr>
           </a:fillRef>
           <a:effectRef idx="3">
             <a:schemeClr val="accent6"/>
           </a:effectRef>
           <a:fontRef idx="minor">
-            <a:schemeClr val="tx1"/>
+            <a:schemeClr val="lt1"/>
           </a:fontRef>
         </p:style>
         <p:txBody>
@@ -6383,7 +6421,7 @@
             <a:r>
               <a:rPr lang="zh-TW" sz="2000" b="1">
                 <a:solidFill>
-                  <a:schemeClr val="tx1"/>
+                  <a:schemeClr val="lt1"/>
                 </a:solidFill>
                 <a:latin typeface="+mn-lt"/>
                 <a:ea typeface="+mn-ea"/>
@@ -6557,7 +6595,7 @@
         <a:font script="Geor" typeface="Sylfaen"/>
       </a:minorFont>
     </a:fontScheme>
-    <a:fmtScheme name="PPT Template Style Kit">
+    <a:fmtScheme name="PPT Style Studio component effects">
       <a:fillStyleLst>
         <a:solidFill>
           <a:schemeClr val="phClr"/>
@@ -6566,12 +6604,13 @@
           <a:gsLst>
             <a:gs pos="0">
               <a:schemeClr val="phClr">
-                <a:lumMod val="60000"/>
-                <a:lumOff val="40000"/>
+                <a:tint val="95000"/>
               </a:schemeClr>
             </a:gs>
             <a:gs pos="100000">
-              <a:schemeClr val="phClr"/>
+              <a:schemeClr val="phClr">
+                <a:shade val="95000"/>
+              </a:schemeClr>
             </a:gs>
           </a:gsLst>
           <a:lin ang="5400000" scaled="0"/>
@@ -6580,14 +6619,12 @@
           <a:gsLst>
             <a:gs pos="0">
               <a:schemeClr val="phClr">
-                <a:lumMod val="20000"/>
-                <a:lumOff val="80000"/>
+                <a:tint val="12000"/>
               </a:schemeClr>
             </a:gs>
             <a:gs pos="100000">
               <a:schemeClr val="phClr">
-                <a:lumMod val="40000"/>
-                <a:lumOff val="60000"/>
+                <a:tint val="20000"/>
               </a:schemeClr>
             </a:gs>
           </a:gsLst>
@@ -6609,9 +6646,11 @@
           <a:prstDash val="solid"/>
           <a:miter lim="800000"/>
         </a:ln>
-        <a:ln w="19050" cap="flat" cmpd="sng" algn="ctr">
+        <a:ln w="9525" cap="flat" cmpd="sng" algn="ctr">
           <a:solidFill>
-            <a:schemeClr val="phClr"/>
+            <a:schemeClr val="phClr">
+              <a:tint val="30000"/>
+            </a:schemeClr>
           </a:solidFill>
           <a:prstDash val="solid"/>
           <a:miter lim="800000"/>
@@ -6619,16 +6658,28 @@
       </a:lnStyleLst>
       <a:effectStyleLst>
         <a:effectStyle>
-          <a:effectLst/>
-        </a:effectStyle>
-        <a:effectStyle>
-          <a:effectLst/>
+          <a:effectLst>
+            <a:outerShdw blurRad="53340" dist="19050" dir="5400000" algn="ctr" rotWithShape="0">
+              <a:srgbClr val="000000">
+                <a:alpha val="20000"/>
+              </a:srgbClr>
+            </a:outerShdw>
+          </a:effectLst>
         </a:effectStyle>
         <a:effectStyle>
           <a:effectLst>
-            <a:outerShdw blurRad="76200" dist="19050" dir="5400000" algn="t" rotWithShape="0">
+            <a:outerShdw blurRad="88900" dist="25400" dir="5400000" algn="ctr" rotWithShape="0">
               <a:srgbClr val="000000">
                 <a:alpha val="18000"/>
+              </a:srgbClr>
+            </a:outerShdw>
+          </a:effectLst>
+        </a:effectStyle>
+        <a:effectStyle>
+          <a:effectLst>
+            <a:outerShdw blurRad="88900" dist="25400" dir="5400000" algn="ctr" rotWithShape="0">
+              <a:srgbClr val="000000">
+                <a:alpha val="24000"/>
               </a:srgbClr>
             </a:outerShdw>
           </a:effectLst>

--- a/native-stylekit/theme/burgundy.pptx
+++ b/native-stylekit/theme/burgundy.pptx
@@ -9,6 +9,7 @@
     <p:sldId id="257" r:id="rId8"/>
     <p:sldId id="258" r:id="rId9"/>
     <p:sldId id="259" r:id="rId10"/>
+    <p:sldId id="260" r:id="rIdStyleKitGallery2"/>
   </p:sldIdLst>
   <p:sldSz cx="12192119" cy="6858000" type="screen4x3"/>
   <p:notesSz cx="6858000" cy="9144000"/>
@@ -2460,7 +2461,7 @@
                 <a:latin typeface="+mn-lt"/>
                 <a:ea typeface="+mn-ea"/>
               </a:rPr>
-              <a:t>柔和文字螢光筆與半高底帶</a:t>
+              <a:t>八色原生文字螢光筆</a:t>
             </a:r>
             <a:endParaRPr lang="zh-TW"/>
           </a:p>
@@ -2502,22 +2503,22 @@
                 <a:latin typeface="+mn-lt"/>
                 <a:ea typeface="+mn-ea"/>
               </a:rPr>
-              <a:t>左側是文字本身的原生醒目提示；右側是可編輯底帶與文字，改字後可調整底帶寬度。</a:t>
-            </a:r>
-            <a:endParaRPr lang="zh-TW"/>
-          </a:p>
-        </p:txBody>
-      </p:sp>
-      <p:sp>
-        <p:nvSpPr>
-          <p:cNvPr id="4" name="Native highlight column"/>
-          <p:cNvSpPr/>
-          <p:nvPr/>
-        </p:nvSpPr>
-        <p:spPr>
-          <a:xfrm>
-            <a:off x="411480" y="1234440"/>
-            <a:ext cx="5394960" cy="320040"/>
+              <a:t>色彩作用於文字本身，改字時會隨文字延伸；不使用獨立底帶，也不自動修改文字顏色。</a:t>
+            </a:r>
+            <a:endParaRPr lang="zh-TW"/>
+          </a:p>
+        </p:txBody>
+      </p:sp>
+      <p:sp>
+        <p:nvSpPr>
+          <p:cNvPr id="4" name="Native highlight label 1"/>
+          <p:cNvSpPr/>
+          <p:nvPr/>
+        </p:nvSpPr>
+        <p:spPr>
+          <a:xfrm>
+            <a:off x="548640" y="1417320"/>
+            <a:ext cx="2834640" cy="347472"/>
           </a:xfrm>
           <a:prstGeom prst="rect">
             <a:avLst/>
@@ -2537,29 +2538,29 @@
               <a:buNone/>
             </a:pPr>
             <a:r>
-              <a:rPr lang="zh-TW" sz="1400" b="1">
-                <a:solidFill>
-                  <a:schemeClr val="tx1"/>
-                </a:solidFill>
-                <a:latin typeface="+mn-lt"/>
-                <a:ea typeface="+mn-ea"/>
-              </a:rPr>
-              <a:t>原生文字醒目提示 a:highlight</a:t>
-            </a:r>
-            <a:endParaRPr lang="zh-TW"/>
-          </a:p>
-        </p:txBody>
-      </p:sp>
-      <p:sp>
-        <p:nvSpPr>
-          <p:cNvPr id="5" name="Half marker column"/>
-          <p:cNvSpPr/>
-          <p:nvPr/>
-        </p:nvSpPr>
-        <p:spPr>
-          <a:xfrm>
-            <a:off x="6217920" y="1234440"/>
-            <a:ext cx="5486400" cy="320040"/>
+              <a:rPr lang="zh-TW" sz="1600" b="0">
+                <a:solidFill>
+                  <a:srgbClr val="333333"/>
+                </a:solidFill>
+                <a:latin typeface="+mn-lt"/>
+                <a:ea typeface="+mn-ea"/>
+              </a:rPr>
+              <a:t>淡紅 #F6D8DB</a:t>
+            </a:r>
+            <a:endParaRPr lang="zh-TW"/>
+          </a:p>
+        </p:txBody>
+      </p:sp>
+      <p:sp>
+        <p:nvSpPr>
+          <p:cNvPr id="5" name="Native highlight 1"/>
+          <p:cNvSpPr/>
+          <p:nvPr/>
+        </p:nvSpPr>
+        <p:spPr>
+          <a:xfrm>
+            <a:off x="3657600" y="1417320"/>
+            <a:ext cx="7772400" cy="365760"/>
           </a:xfrm>
           <a:prstGeom prst="rect">
             <a:avLst/>
@@ -2579,29 +2580,32 @@
               <a:buNone/>
             </a:pPr>
             <a:r>
-              <a:rPr lang="zh-TW" sz="1400" b="1">
-                <a:solidFill>
-                  <a:schemeClr val="tx1"/>
-                </a:solidFill>
-                <a:latin typeface="+mn-lt"/>
-                <a:ea typeface="+mn-ea"/>
-              </a:rPr>
-              <a:t>半高螢光條 · 可編輯形狀</a:t>
-            </a:r>
-            <a:endParaRPr lang="zh-TW"/>
-          </a:p>
-        </p:txBody>
-      </p:sp>
-      <p:sp>
-        <p:nvSpPr>
-          <p:cNvPr id="6" name="Native highlight 1"/>
-          <p:cNvSpPr/>
-          <p:nvPr/>
-        </p:nvSpPr>
-        <p:spPr>
-          <a:xfrm>
-            <a:off x="530352" y="1755648"/>
-            <a:ext cx="5212080" cy="365760"/>
+              <a:rPr lang="zh-TW" sz="2000" b="0">
+                <a:solidFill>
+                  <a:srgbClr val="333333"/>
+                </a:solidFill>
+                <a:highlight>
+                  <a:srgbClr val="F6D8DB"/>
+                </a:highlight>
+                <a:latin typeface="+mn-lt"/>
+                <a:ea typeface="+mn-ea"/>
+              </a:rPr>
+              <a:t>Yield improved 良率提升</a:t>
+            </a:r>
+            <a:endParaRPr lang="zh-TW"/>
+          </a:p>
+        </p:txBody>
+      </p:sp>
+      <p:sp>
+        <p:nvSpPr>
+          <p:cNvPr id="6" name="Native highlight label 2"/>
+          <p:cNvSpPr/>
+          <p:nvPr/>
+        </p:nvSpPr>
+        <p:spPr>
+          <a:xfrm>
+            <a:off x="548640" y="1920240"/>
+            <a:ext cx="2834640" cy="347472"/>
           </a:xfrm>
           <a:prstGeom prst="rect">
             <a:avLst/>
@@ -2621,56 +2625,29 @@
               <a:buNone/>
             </a:pPr>
             <a:r>
-              <a:rPr lang="zh-TW" sz="1800" b="0">
+              <a:rPr lang="zh-TW" sz="1600" b="0">
                 <a:solidFill>
                   <a:srgbClr val="333333"/>
                 </a:solidFill>
-                <a:highlight>
-                  <a:srgbClr val="DBC9CD"/>
-                </a:highlight>
-                <a:latin typeface="+mn-lt"/>
-                <a:ea typeface="+mn-ea"/>
-              </a:rPr>
-              <a:t>Accent 1・柔和文字 #DBC9CD</a:t>
-            </a:r>
-            <a:endParaRPr lang="zh-TW"/>
-          </a:p>
-        </p:txBody>
-      </p:sp>
-      <p:sp>
-        <p:nvSpPr>
-          <p:cNvPr id="7" name="Half-height marker 1"/>
-          <p:cNvSpPr/>
-          <p:nvPr/>
-        </p:nvSpPr>
-        <p:spPr>
-          <a:xfrm>
-            <a:off x="6355080" y="1975104"/>
-            <a:ext cx="4434840" cy="118872"/>
-          </a:xfrm>
-          <a:prstGeom prst="rect">
-            <a:avLst/>
-          </a:prstGeom>
-          <a:solidFill>
-            <a:srgbClr val="6B1E2E">
-              <a:alpha val="35000"/>
-            </a:srgbClr>
-          </a:solidFill>
-          <a:ln>
-            <a:noFill/>
-          </a:ln>
-        </p:spPr>
-      </p:sp>
-      <p:sp>
-        <p:nvSpPr>
-          <p:cNvPr id="8" name="Half-height text 1"/>
-          <p:cNvSpPr/>
-          <p:nvPr/>
-        </p:nvSpPr>
-        <p:spPr>
-          <a:xfrm>
-            <a:off x="6382512" y="1755648"/>
-            <a:ext cx="4846320" cy="365760"/>
+                <a:latin typeface="+mn-lt"/>
+                <a:ea typeface="+mn-ea"/>
+              </a:rPr>
+              <a:t>淡黃 #F9F0D4</a:t>
+            </a:r>
+            <a:endParaRPr lang="zh-TW"/>
+          </a:p>
+        </p:txBody>
+      </p:sp>
+      <p:sp>
+        <p:nvSpPr>
+          <p:cNvPr id="7" name="Native highlight 2"/>
+          <p:cNvSpPr/>
+          <p:nvPr/>
+        </p:nvSpPr>
+        <p:spPr>
+          <a:xfrm>
+            <a:off x="3657600" y="1920240"/>
+            <a:ext cx="7772400" cy="365760"/>
           </a:xfrm>
           <a:prstGeom prst="rect">
             <a:avLst/>
@@ -2690,29 +2667,32 @@
               <a:buNone/>
             </a:pPr>
             <a:r>
-              <a:rPr lang="zh-TW" sz="1800" b="0">
-                <a:solidFill>
-                  <a:schemeClr val="tx1"/>
-                </a:solidFill>
-                <a:latin typeface="+mn-lt"/>
-                <a:ea typeface="+mn-ea"/>
-              </a:rPr>
-              <a:t>▶ 雙管齊下 Dual track</a:t>
-            </a:r>
-            <a:endParaRPr lang="zh-TW"/>
-          </a:p>
-        </p:txBody>
-      </p:sp>
-      <p:sp>
-        <p:nvSpPr>
-          <p:cNvPr id="9" name="Native highlight 2"/>
-          <p:cNvSpPr/>
-          <p:nvPr/>
-        </p:nvSpPr>
-        <p:spPr>
-          <a:xfrm>
-            <a:off x="530352" y="2286000"/>
-            <a:ext cx="5212080" cy="365760"/>
+              <a:rPr lang="zh-TW" sz="2000" b="0">
+                <a:solidFill>
+                  <a:srgbClr val="333333"/>
+                </a:solidFill>
+                <a:highlight>
+                  <a:srgbClr val="F9F0D4"/>
+                </a:highlight>
+                <a:latin typeface="+mn-lt"/>
+                <a:ea typeface="+mn-ea"/>
+              </a:rPr>
+              <a:t>Yield improved 良率提升</a:t>
+            </a:r>
+            <a:endParaRPr lang="zh-TW"/>
+          </a:p>
+        </p:txBody>
+      </p:sp>
+      <p:sp>
+        <p:nvSpPr>
+          <p:cNvPr id="8" name="Native highlight label 3"/>
+          <p:cNvSpPr/>
+          <p:nvPr/>
+        </p:nvSpPr>
+        <p:spPr>
+          <a:xfrm>
+            <a:off x="548640" y="2423160"/>
+            <a:ext cx="2834640" cy="347472"/>
           </a:xfrm>
           <a:prstGeom prst="rect">
             <a:avLst/>
@@ -2732,56 +2712,29 @@
               <a:buNone/>
             </a:pPr>
             <a:r>
-              <a:rPr lang="zh-TW" sz="1800" b="0">
+              <a:rPr lang="zh-TW" sz="1600" b="0">
                 <a:solidFill>
                   <a:srgbClr val="333333"/>
                 </a:solidFill>
-                <a:highlight>
-                  <a:srgbClr val="EDE3D4"/>
-                </a:highlight>
-                <a:latin typeface="+mn-lt"/>
-                <a:ea typeface="+mn-ea"/>
-              </a:rPr>
-              <a:t>Accent 2・柔和文字 #EDE3D4</a:t>
-            </a:r>
-            <a:endParaRPr lang="zh-TW"/>
-          </a:p>
-        </p:txBody>
-      </p:sp>
-      <p:sp>
-        <p:nvSpPr>
-          <p:cNvPr id="10" name="Half-height marker 2"/>
-          <p:cNvSpPr/>
-          <p:nvPr/>
-        </p:nvSpPr>
-        <p:spPr>
-          <a:xfrm>
-            <a:off x="6355080" y="2505456"/>
-            <a:ext cx="4434840" cy="118872"/>
-          </a:xfrm>
-          <a:prstGeom prst="rect">
-            <a:avLst/>
-          </a:prstGeom>
-          <a:solidFill>
-            <a:srgbClr val="B5894A">
-              <a:alpha val="35000"/>
-            </a:srgbClr>
-          </a:solidFill>
-          <a:ln>
-            <a:noFill/>
-          </a:ln>
-        </p:spPr>
-      </p:sp>
-      <p:sp>
-        <p:nvSpPr>
-          <p:cNvPr id="11" name="Half-height text 2"/>
-          <p:cNvSpPr/>
-          <p:nvPr/>
-        </p:nvSpPr>
-        <p:spPr>
-          <a:xfrm>
-            <a:off x="6382512" y="2286000"/>
-            <a:ext cx="4846320" cy="365760"/>
+                <a:latin typeface="+mn-lt"/>
+                <a:ea typeface="+mn-ea"/>
+              </a:rPr>
+              <a:t>參考藍 #7C9CC3</a:t>
+            </a:r>
+            <a:endParaRPr lang="zh-TW"/>
+          </a:p>
+        </p:txBody>
+      </p:sp>
+      <p:sp>
+        <p:nvSpPr>
+          <p:cNvPr id="9" name="Native highlight 3"/>
+          <p:cNvSpPr/>
+          <p:nvPr/>
+        </p:nvSpPr>
+        <p:spPr>
+          <a:xfrm>
+            <a:off x="3657600" y="2423160"/>
+            <a:ext cx="7772400" cy="365760"/>
           </a:xfrm>
           <a:prstGeom prst="rect">
             <a:avLst/>
@@ -2801,29 +2754,32 @@
               <a:buNone/>
             </a:pPr>
             <a:r>
-              <a:rPr lang="zh-TW" sz="1800" b="0">
-                <a:solidFill>
-                  <a:schemeClr val="tx1"/>
-                </a:solidFill>
-                <a:latin typeface="+mn-lt"/>
-                <a:ea typeface="+mn-ea"/>
-              </a:rPr>
-              <a:t>▶ 雙管齊下 Dual track</a:t>
-            </a:r>
-            <a:endParaRPr lang="zh-TW"/>
-          </a:p>
-        </p:txBody>
-      </p:sp>
-      <p:sp>
-        <p:nvSpPr>
-          <p:cNvPr id="12" name="Native highlight 3"/>
-          <p:cNvSpPr/>
-          <p:nvPr/>
-        </p:nvSpPr>
-        <p:spPr>
-          <a:xfrm>
-            <a:off x="530352" y="2816352"/>
-            <a:ext cx="5212080" cy="365760"/>
+              <a:rPr lang="zh-TW" sz="2000" b="0">
+                <a:solidFill>
+                  <a:srgbClr val="333333"/>
+                </a:solidFill>
+                <a:highlight>
+                  <a:srgbClr val="7C9CC3"/>
+                </a:highlight>
+                <a:latin typeface="+mn-lt"/>
+                <a:ea typeface="+mn-ea"/>
+              </a:rPr>
+              <a:t>Yield improved 良率提升</a:t>
+            </a:r>
+            <a:endParaRPr lang="zh-TW"/>
+          </a:p>
+        </p:txBody>
+      </p:sp>
+      <p:sp>
+        <p:nvSpPr>
+          <p:cNvPr id="10" name="Native highlight label 4"/>
+          <p:cNvSpPr/>
+          <p:nvPr/>
+        </p:nvSpPr>
+        <p:spPr>
+          <a:xfrm>
+            <a:off x="548640" y="2926080"/>
+            <a:ext cx="2834640" cy="347472"/>
           </a:xfrm>
           <a:prstGeom prst="rect">
             <a:avLst/>
@@ -2843,56 +2799,29 @@
               <a:buNone/>
             </a:pPr>
             <a:r>
-              <a:rPr lang="zh-TW" sz="1800" b="0">
+              <a:rPr lang="zh-TW" sz="1600" b="0">
                 <a:solidFill>
                   <a:srgbClr val="333333"/>
                 </a:solidFill>
-                <a:highlight>
-                  <a:srgbClr val="D7D7D7"/>
-                </a:highlight>
-                <a:latin typeface="+mn-lt"/>
-                <a:ea typeface="+mn-ea"/>
-              </a:rPr>
-              <a:t>Accent 3・柔和文字 #D7D7D7</a:t>
-            </a:r>
-            <a:endParaRPr lang="zh-TW"/>
-          </a:p>
-        </p:txBody>
-      </p:sp>
-      <p:sp>
-        <p:nvSpPr>
-          <p:cNvPr id="13" name="Half-height marker 3"/>
-          <p:cNvSpPr/>
-          <p:nvPr/>
-        </p:nvSpPr>
-        <p:spPr>
-          <a:xfrm>
-            <a:off x="6355080" y="3035808"/>
-            <a:ext cx="4434840" cy="118872"/>
-          </a:xfrm>
-          <a:prstGeom prst="rect">
-            <a:avLst/>
-          </a:prstGeom>
-          <a:solidFill>
-            <a:srgbClr val="595959">
-              <a:alpha val="35000"/>
-            </a:srgbClr>
-          </a:solidFill>
-          <a:ln>
-            <a:noFill/>
-          </a:ln>
-        </p:spPr>
-      </p:sp>
-      <p:sp>
-        <p:nvSpPr>
-          <p:cNvPr id="14" name="Half-height text 3"/>
-          <p:cNvSpPr/>
-          <p:nvPr/>
-        </p:nvSpPr>
-        <p:spPr>
-          <a:xfrm>
-            <a:off x="6382512" y="2816352"/>
-            <a:ext cx="4846320" cy="365760"/>
+                <a:latin typeface="+mn-lt"/>
+                <a:ea typeface="+mn-ea"/>
+              </a:rPr>
+              <a:t>淡綠 #D4E6DF</a:t>
+            </a:r>
+            <a:endParaRPr lang="zh-TW"/>
+          </a:p>
+        </p:txBody>
+      </p:sp>
+      <p:sp>
+        <p:nvSpPr>
+          <p:cNvPr id="11" name="Native highlight 4"/>
+          <p:cNvSpPr/>
+          <p:nvPr/>
+        </p:nvSpPr>
+        <p:spPr>
+          <a:xfrm>
+            <a:off x="3657600" y="2926080"/>
+            <a:ext cx="7772400" cy="365760"/>
           </a:xfrm>
           <a:prstGeom prst="rect">
             <a:avLst/>
@@ -2912,29 +2841,32 @@
               <a:buNone/>
             </a:pPr>
             <a:r>
-              <a:rPr lang="zh-TW" sz="1800" b="0">
-                <a:solidFill>
-                  <a:schemeClr val="tx1"/>
-                </a:solidFill>
-                <a:latin typeface="+mn-lt"/>
-                <a:ea typeface="+mn-ea"/>
-              </a:rPr>
-              <a:t>▶ 雙管齊下 Dual track</a:t>
-            </a:r>
-            <a:endParaRPr lang="zh-TW"/>
-          </a:p>
-        </p:txBody>
-      </p:sp>
-      <p:sp>
-        <p:nvSpPr>
-          <p:cNvPr id="15" name="Native highlight 4"/>
-          <p:cNvSpPr/>
-          <p:nvPr/>
-        </p:nvSpPr>
-        <p:spPr>
-          <a:xfrm>
-            <a:off x="530352" y="3346704"/>
-            <a:ext cx="5212080" cy="365760"/>
+              <a:rPr lang="zh-TW" sz="2000" b="0">
+                <a:solidFill>
+                  <a:srgbClr val="333333"/>
+                </a:solidFill>
+                <a:highlight>
+                  <a:srgbClr val="D4E6DF"/>
+                </a:highlight>
+                <a:latin typeface="+mn-lt"/>
+                <a:ea typeface="+mn-ea"/>
+              </a:rPr>
+              <a:t>Yield improved 良率提升</a:t>
+            </a:r>
+            <a:endParaRPr lang="zh-TW"/>
+          </a:p>
+        </p:txBody>
+      </p:sp>
+      <p:sp>
+        <p:nvSpPr>
+          <p:cNvPr id="12" name="Native highlight label 5"/>
+          <p:cNvSpPr/>
+          <p:nvPr/>
+        </p:nvSpPr>
+        <p:spPr>
+          <a:xfrm>
+            <a:off x="548640" y="3429000"/>
+            <a:ext cx="2834640" cy="347472"/>
           </a:xfrm>
           <a:prstGeom prst="rect">
             <a:avLst/>
@@ -2954,56 +2886,29 @@
               <a:buNone/>
             </a:pPr>
             <a:r>
-              <a:rPr lang="zh-TW" sz="1800" b="0">
+              <a:rPr lang="zh-TW" sz="1600" b="0">
                 <a:solidFill>
                   <a:srgbClr val="333333"/>
                 </a:solidFill>
-                <a:highlight>
-                  <a:srgbClr val="EADFE1"/>
-                </a:highlight>
-                <a:latin typeface="+mn-lt"/>
-                <a:ea typeface="+mn-ea"/>
-              </a:rPr>
-              <a:t>Accent 4・柔和文字 #EADFE1</a:t>
-            </a:r>
-            <a:endParaRPr lang="zh-TW"/>
-          </a:p>
-        </p:txBody>
-      </p:sp>
-      <p:sp>
-        <p:nvSpPr>
-          <p:cNvPr id="16" name="Half-height marker 4"/>
-          <p:cNvSpPr/>
-          <p:nvPr/>
-        </p:nvSpPr>
-        <p:spPr>
-          <a:xfrm>
-            <a:off x="6355080" y="3566160"/>
-            <a:ext cx="4434840" cy="118872"/>
-          </a:xfrm>
-          <a:prstGeom prst="rect">
-            <a:avLst/>
-          </a:prstGeom>
-          <a:solidFill>
-            <a:srgbClr val="A67882">
-              <a:alpha val="35000"/>
-            </a:srgbClr>
-          </a:solidFill>
-          <a:ln>
-            <a:noFill/>
-          </a:ln>
-        </p:spPr>
-      </p:sp>
-      <p:sp>
-        <p:nvSpPr>
-          <p:cNvPr id="17" name="Half-height text 4"/>
-          <p:cNvSpPr/>
-          <p:nvPr/>
-        </p:nvSpPr>
-        <p:spPr>
-          <a:xfrm>
-            <a:off x="6382512" y="3346704"/>
-            <a:ext cx="4846320" cy="365760"/>
+                <a:latin typeface="+mn-lt"/>
+                <a:ea typeface="+mn-ea"/>
+              </a:rPr>
+              <a:t>淺灰 #E0E2E6</a:t>
+            </a:r>
+            <a:endParaRPr lang="zh-TW"/>
+          </a:p>
+        </p:txBody>
+      </p:sp>
+      <p:sp>
+        <p:nvSpPr>
+          <p:cNvPr id="13" name="Native highlight 5"/>
+          <p:cNvSpPr/>
+          <p:nvPr/>
+        </p:nvSpPr>
+        <p:spPr>
+          <a:xfrm>
+            <a:off x="3657600" y="3429000"/>
+            <a:ext cx="7772400" cy="365760"/>
           </a:xfrm>
           <a:prstGeom prst="rect">
             <a:avLst/>
@@ -3023,29 +2928,32 @@
               <a:buNone/>
             </a:pPr>
             <a:r>
-              <a:rPr lang="zh-TW" sz="1800" b="0">
-                <a:solidFill>
-                  <a:schemeClr val="tx1"/>
-                </a:solidFill>
-                <a:latin typeface="+mn-lt"/>
-                <a:ea typeface="+mn-ea"/>
-              </a:rPr>
-              <a:t>▶ 雙管齊下 Dual track</a:t>
-            </a:r>
-            <a:endParaRPr lang="zh-TW"/>
-          </a:p>
-        </p:txBody>
-      </p:sp>
-      <p:sp>
-        <p:nvSpPr>
-          <p:cNvPr id="18" name="Native highlight 5"/>
-          <p:cNvSpPr/>
-          <p:nvPr/>
-        </p:nvSpPr>
-        <p:spPr>
-          <a:xfrm>
-            <a:off x="530352" y="3877056"/>
-            <a:ext cx="5212080" cy="365760"/>
+              <a:rPr lang="zh-TW" sz="2000" b="0">
+                <a:solidFill>
+                  <a:srgbClr val="333333"/>
+                </a:solidFill>
+                <a:highlight>
+                  <a:srgbClr val="E0E2E6"/>
+                </a:highlight>
+                <a:latin typeface="+mn-lt"/>
+                <a:ea typeface="+mn-ea"/>
+              </a:rPr>
+              <a:t>Yield improved 良率提升</a:t>
+            </a:r>
+            <a:endParaRPr lang="zh-TW"/>
+          </a:p>
+        </p:txBody>
+      </p:sp>
+      <p:sp>
+        <p:nvSpPr>
+          <p:cNvPr id="14" name="Native highlight label 6"/>
+          <p:cNvSpPr/>
+          <p:nvPr/>
+        </p:nvSpPr>
+        <p:spPr>
+          <a:xfrm>
+            <a:off x="548640" y="3931920"/>
+            <a:ext cx="2834640" cy="347472"/>
           </a:xfrm>
           <a:prstGeom prst="rect">
             <a:avLst/>
@@ -3065,56 +2973,29 @@
               <a:buNone/>
             </a:pPr>
             <a:r>
-              <a:rPr lang="zh-TW" sz="1800" b="0">
+              <a:rPr lang="zh-TW" sz="1600" b="0">
                 <a:solidFill>
                   <a:srgbClr val="333333"/>
                 </a:solidFill>
-                <a:highlight>
-                  <a:srgbClr val="D6C7CA"/>
-                </a:highlight>
-                <a:latin typeface="+mn-lt"/>
-                <a:ea typeface="+mn-ea"/>
-              </a:rPr>
-              <a:t>Accent 5・柔和文字 #D6C7CA</a:t>
-            </a:r>
-            <a:endParaRPr lang="zh-TW"/>
-          </a:p>
-        </p:txBody>
-      </p:sp>
-      <p:sp>
-        <p:nvSpPr>
-          <p:cNvPr id="19" name="Half-height marker 5"/>
-          <p:cNvSpPr/>
-          <p:nvPr/>
-        </p:nvSpPr>
-        <p:spPr>
-          <a:xfrm>
-            <a:off x="6355080" y="4096512"/>
-            <a:ext cx="4434840" cy="118872"/>
-          </a:xfrm>
-          <a:prstGeom prst="rect">
-            <a:avLst/>
-          </a:prstGeom>
-          <a:solidFill>
-            <a:srgbClr val="531724">
-              <a:alpha val="35000"/>
-            </a:srgbClr>
-          </a:solidFill>
-          <a:ln>
-            <a:noFill/>
-          </a:ln>
-        </p:spPr>
-      </p:sp>
-      <p:sp>
-        <p:nvSpPr>
-          <p:cNvPr id="20" name="Half-height text 5"/>
-          <p:cNvSpPr/>
-          <p:nvPr/>
-        </p:nvSpPr>
-        <p:spPr>
-          <a:xfrm>
-            <a:off x="6382512" y="3877056"/>
-            <a:ext cx="4846320" cy="365760"/>
+                <a:latin typeface="+mn-lt"/>
+                <a:ea typeface="+mn-ea"/>
+              </a:rPr>
+              <a:t>淡紫 #E5DDF1</a:t>
+            </a:r>
+            <a:endParaRPr lang="zh-TW"/>
+          </a:p>
+        </p:txBody>
+      </p:sp>
+      <p:sp>
+        <p:nvSpPr>
+          <p:cNvPr id="15" name="Native highlight 6"/>
+          <p:cNvSpPr/>
+          <p:nvPr/>
+        </p:nvSpPr>
+        <p:spPr>
+          <a:xfrm>
+            <a:off x="3657600" y="3931920"/>
+            <a:ext cx="7772400" cy="365760"/>
           </a:xfrm>
           <a:prstGeom prst="rect">
             <a:avLst/>
@@ -3134,29 +3015,32 @@
               <a:buNone/>
             </a:pPr>
             <a:r>
-              <a:rPr lang="zh-TW" sz="1800" b="0">
-                <a:solidFill>
-                  <a:schemeClr val="tx1"/>
-                </a:solidFill>
-                <a:latin typeface="+mn-lt"/>
-                <a:ea typeface="+mn-ea"/>
-              </a:rPr>
-              <a:t>▶ 雙管齊下 Dual track</a:t>
-            </a:r>
-            <a:endParaRPr lang="zh-TW"/>
-          </a:p>
-        </p:txBody>
-      </p:sp>
-      <p:sp>
-        <p:nvSpPr>
-          <p:cNvPr id="21" name="Native highlight 6"/>
-          <p:cNvSpPr/>
-          <p:nvPr/>
-        </p:nvSpPr>
-        <p:spPr>
-          <a:xfrm>
-            <a:off x="530352" y="4407408"/>
-            <a:ext cx="5212080" cy="365760"/>
+              <a:rPr lang="zh-TW" sz="2000" b="0">
+                <a:solidFill>
+                  <a:srgbClr val="333333"/>
+                </a:solidFill>
+                <a:highlight>
+                  <a:srgbClr val="E5DDF1"/>
+                </a:highlight>
+                <a:latin typeface="+mn-lt"/>
+                <a:ea typeface="+mn-ea"/>
+              </a:rPr>
+              <a:t>Yield improved 良率提升</a:t>
+            </a:r>
+            <a:endParaRPr lang="zh-TW"/>
+          </a:p>
+        </p:txBody>
+      </p:sp>
+      <p:sp>
+        <p:nvSpPr>
+          <p:cNvPr id="16" name="Native highlight label 7"/>
+          <p:cNvSpPr/>
+          <p:nvPr/>
+        </p:nvSpPr>
+        <p:spPr>
+          <a:xfrm>
+            <a:off x="548640" y="4434840"/>
+            <a:ext cx="2834640" cy="347472"/>
           </a:xfrm>
           <a:prstGeom prst="rect">
             <a:avLst/>
@@ -3176,56 +3060,29 @@
               <a:buNone/>
             </a:pPr>
             <a:r>
-              <a:rPr lang="zh-TW" sz="1800" b="0">
+              <a:rPr lang="zh-TW" sz="1600" b="0">
                 <a:solidFill>
                   <a:srgbClr val="333333"/>
                 </a:solidFill>
-                <a:highlight>
-                  <a:srgbClr val="F3EDE3"/>
-                </a:highlight>
-                <a:latin typeface="+mn-lt"/>
-                <a:ea typeface="+mn-ea"/>
-              </a:rPr>
-              <a:t>Accent 6・柔和文字 #F3EDE3</a:t>
-            </a:r>
-            <a:endParaRPr lang="zh-TW"/>
-          </a:p>
-        </p:txBody>
-      </p:sp>
-      <p:sp>
-        <p:nvSpPr>
-          <p:cNvPr id="22" name="Half-height marker 6"/>
-          <p:cNvSpPr/>
-          <p:nvPr/>
-        </p:nvSpPr>
-        <p:spPr>
-          <a:xfrm>
-            <a:off x="6355080" y="4626864"/>
-            <a:ext cx="4434840" cy="118872"/>
-          </a:xfrm>
-          <a:prstGeom prst="rect">
-            <a:avLst/>
-          </a:prstGeom>
-          <a:solidFill>
-            <a:srgbClr val="CFB289">
-              <a:alpha val="35000"/>
-            </a:srgbClr>
-          </a:solidFill>
-          <a:ln>
-            <a:noFill/>
-          </a:ln>
-        </p:spPr>
-      </p:sp>
-      <p:sp>
-        <p:nvSpPr>
-          <p:cNvPr id="23" name="Half-height text 6"/>
-          <p:cNvSpPr/>
-          <p:nvPr/>
-        </p:nvSpPr>
-        <p:spPr>
-          <a:xfrm>
-            <a:off x="6382512" y="4407408"/>
-            <a:ext cx="4846320" cy="365760"/>
+                <a:latin typeface="+mn-lt"/>
+                <a:ea typeface="+mn-ea"/>
+              </a:rPr>
+              <a:t>深灰 #595959</a:t>
+            </a:r>
+            <a:endParaRPr lang="zh-TW"/>
+          </a:p>
+        </p:txBody>
+      </p:sp>
+      <p:sp>
+        <p:nvSpPr>
+          <p:cNvPr id="17" name="Native highlight 7"/>
+          <p:cNvSpPr/>
+          <p:nvPr/>
+        </p:nvSpPr>
+        <p:spPr>
+          <a:xfrm>
+            <a:off x="3657600" y="4434840"/>
+            <a:ext cx="7772400" cy="365760"/>
           </a:xfrm>
           <a:prstGeom prst="rect">
             <a:avLst/>
@@ -3245,51 +3102,32 @@
               <a:buNone/>
             </a:pPr>
             <a:r>
-              <a:rPr lang="zh-TW" sz="1800" b="0">
-                <a:solidFill>
-                  <a:schemeClr val="tx1"/>
-                </a:solidFill>
-                <a:latin typeface="+mn-lt"/>
-                <a:ea typeface="+mn-ea"/>
-              </a:rPr>
-              <a:t>▶ 雙管齊下 Dual track</a:t>
-            </a:r>
-            <a:endParaRPr lang="zh-TW"/>
-          </a:p>
-        </p:txBody>
-      </p:sp>
-      <p:sp>
-        <p:nvSpPr>
-          <p:cNvPr id="24" name="White visibility backing (sample only)"/>
-          <p:cNvSpPr/>
-          <p:nvPr/>
-        </p:nvSpPr>
-        <p:spPr>
-          <a:xfrm>
-            <a:off x="411480" y="4910328"/>
-            <a:ext cx="11247120" cy="438912"/>
-          </a:xfrm>
-          <a:prstGeom prst="rect">
-            <a:avLst/>
-          </a:prstGeom>
-          <a:solidFill>
-            <a:srgbClr val="303640"/>
-          </a:solidFill>
-          <a:ln>
-            <a:noFill/>
-          </a:ln>
-        </p:spPr>
-      </p:sp>
-      <p:sp>
-        <p:nvSpPr>
-          <p:cNvPr id="25" name="Native highlight 7"/>
-          <p:cNvSpPr/>
-          <p:nvPr/>
-        </p:nvSpPr>
-        <p:spPr>
-          <a:xfrm>
-            <a:off x="530352" y="4937760"/>
-            <a:ext cx="5212080" cy="365760"/>
+              <a:rPr lang="zh-TW" sz="2000" b="0">
+                <a:solidFill>
+                  <a:srgbClr val="333333"/>
+                </a:solidFill>
+                <a:highlight>
+                  <a:srgbClr val="595959"/>
+                </a:highlight>
+                <a:latin typeface="+mn-lt"/>
+                <a:ea typeface="+mn-ea"/>
+              </a:rPr>
+              <a:t>Yield improved 良率提升</a:t>
+            </a:r>
+            <a:endParaRPr lang="zh-TW"/>
+          </a:p>
+        </p:txBody>
+      </p:sp>
+      <p:sp>
+        <p:nvSpPr>
+          <p:cNvPr id="18" name="Native highlight label 8"/>
+          <p:cNvSpPr/>
+          <p:nvPr/>
+        </p:nvSpPr>
+        <p:spPr>
+          <a:xfrm>
+            <a:off x="548640" y="4937760"/>
+            <a:ext cx="2834640" cy="347472"/>
           </a:xfrm>
           <a:prstGeom prst="rect">
             <a:avLst/>
@@ -3309,56 +3147,29 @@
               <a:buNone/>
             </a:pPr>
             <a:r>
-              <a:rPr lang="zh-TW" sz="1800" b="0">
+              <a:rPr lang="zh-TW" sz="1600" b="0">
                 <a:solidFill>
                   <a:srgbClr val="333333"/>
                 </a:solidFill>
-                <a:highlight>
-                  <a:srgbClr val="FFFFFF"/>
-                </a:highlight>
-                <a:latin typeface="+mn-lt"/>
-                <a:ea typeface="+mn-ea"/>
-              </a:rPr>
-              <a:t>白色・柔和文字 #FFFFFF</a:t>
-            </a:r>
-            <a:endParaRPr lang="zh-TW"/>
-          </a:p>
-        </p:txBody>
-      </p:sp>
-      <p:sp>
-        <p:nvSpPr>
-          <p:cNvPr id="26" name="Half-height marker 7"/>
-          <p:cNvSpPr/>
-          <p:nvPr/>
-        </p:nvSpPr>
-        <p:spPr>
-          <a:xfrm>
-            <a:off x="6355080" y="5157216"/>
-            <a:ext cx="4434840" cy="118872"/>
-          </a:xfrm>
-          <a:prstGeom prst="rect">
-            <a:avLst/>
-          </a:prstGeom>
-          <a:solidFill>
-            <a:srgbClr val="FFFFFF">
-              <a:alpha val="35000"/>
-            </a:srgbClr>
-          </a:solidFill>
-          <a:ln>
-            <a:noFill/>
-          </a:ln>
-        </p:spPr>
-      </p:sp>
-      <p:sp>
-        <p:nvSpPr>
-          <p:cNvPr id="27" name="Half-height text 7"/>
-          <p:cNvSpPr/>
-          <p:nvPr/>
-        </p:nvSpPr>
-        <p:spPr>
-          <a:xfrm>
-            <a:off x="6382512" y="4937760"/>
-            <a:ext cx="4846320" cy="365760"/>
+                <a:latin typeface="+mn-lt"/>
+                <a:ea typeface="+mn-ea"/>
+              </a:rPr>
+              <a:t>深藍 #1F3864</a:t>
+            </a:r>
+            <a:endParaRPr lang="zh-TW"/>
+          </a:p>
+        </p:txBody>
+      </p:sp>
+      <p:sp>
+        <p:nvSpPr>
+          <p:cNvPr id="19" name="Native highlight 8"/>
+          <p:cNvSpPr/>
+          <p:nvPr/>
+        </p:nvSpPr>
+        <p:spPr>
+          <a:xfrm>
+            <a:off x="3657600" y="4937760"/>
+            <a:ext cx="7772400" cy="365760"/>
           </a:xfrm>
           <a:prstGeom prst="rect">
             <a:avLst/>
@@ -3378,29 +3189,32 @@
               <a:buNone/>
             </a:pPr>
             <a:r>
-              <a:rPr lang="zh-TW" sz="1800" b="0">
-                <a:solidFill>
-                  <a:srgbClr val="FFFFFF"/>
-                </a:solidFill>
-                <a:latin typeface="+mn-lt"/>
-                <a:ea typeface="+mn-ea"/>
-              </a:rPr>
-              <a:t>▶ 雙管齊下 Dual track</a:t>
-            </a:r>
-            <a:endParaRPr lang="zh-TW"/>
-          </a:p>
-        </p:txBody>
-      </p:sp>
-      <p:sp>
-        <p:nvSpPr>
-          <p:cNvPr id="28" name="Highlighter limit"/>
-          <p:cNvSpPr/>
-          <p:nvPr/>
-        </p:nvSpPr>
-        <p:spPr>
-          <a:xfrm>
-            <a:off x="411480" y="5806440"/>
-            <a:ext cx="11155680" cy="411480"/>
+              <a:rPr lang="zh-TW" sz="2000" b="0">
+                <a:solidFill>
+                  <a:srgbClr val="333333"/>
+                </a:solidFill>
+                <a:highlight>
+                  <a:srgbClr val="1F3864"/>
+                </a:highlight>
+                <a:latin typeface="+mn-lt"/>
+                <a:ea typeface="+mn-ea"/>
+              </a:rPr>
+              <a:t>Yield improved 良率提升</a:t>
+            </a:r>
+            <a:endParaRPr lang="zh-TW"/>
+          </a:p>
+        </p:txBody>
+      </p:sp>
+      <p:sp>
+        <p:nvSpPr>
+          <p:cNvPr id="20" name="Highlighter color note"/>
+          <p:cNvSpPr/>
+          <p:nvPr/>
+        </p:nvSpPr>
+        <p:spPr>
+          <a:xfrm>
+            <a:off x="411480" y="5559552"/>
+            <a:ext cx="11155680" cy="320040"/>
           </a:xfrm>
           <a:prstGeom prst="rect">
             <a:avLst/>
@@ -3420,6 +3234,48 @@
               <a:buNone/>
             </a:pPr>
             <a:r>
+              <a:rPr lang="zh-TW" sz="1100" b="0">
+                <a:solidFill>
+                  <a:srgbClr val="333333"/>
+                </a:solidFill>
+                <a:latin typeface="+mn-lt"/>
+                <a:ea typeface="+mn-ea"/>
+              </a:rPr>
+              <a:t>參考藍保留 #7C9CC3；深灰與深藍可自行搭配白字。範例維持原字色，套用色彩不會替你改白字。</a:t>
+            </a:r>
+            <a:endParaRPr lang="zh-TW"/>
+          </a:p>
+        </p:txBody>
+      </p:sp>
+      <p:sp>
+        <p:nvSpPr>
+          <p:cNvPr id="21" name="Highlighter limit"/>
+          <p:cNvSpPr/>
+          <p:nvPr/>
+        </p:nvSpPr>
+        <p:spPr>
+          <a:xfrm>
+            <a:off x="411480" y="5925312"/>
+            <a:ext cx="11155680" cy="320040"/>
+          </a:xfrm>
+          <a:prstGeom prst="rect">
+            <a:avLst/>
+          </a:prstGeom>
+          <a:noFill/>
+          <a:ln>
+            <a:noFill/>
+          </a:ln>
+        </p:spPr>
+        <p:txBody>
+          <a:bodyPr wrap="square" lIns="45720" rIns="45720" tIns="0" bIns="0" anchor="ctr">
+            <a:noAutofit/>
+          </a:bodyPr>
+          <a:lstStyle/>
+          <a:p>
+            <a:pPr algn="l">
+              <a:buNone/>
+            </a:pPr>
+            <a:r>
               <a:rPr lang="zh-TW" sz="1000" b="0">
                 <a:solidFill>
                   <a:srgbClr val="333333"/>
@@ -3427,15 +3283,15 @@
                 <a:latin typeface="+mn-lt"/>
                 <a:ea typeface="+mn-ea"/>
               </a:rPr>
-              <a:t>已儲存七個柔色到近期色；不保證內建15色選單顯示或永久保留。可複製已套色文字再改字；格式刷操作尚未驗證。</a:t>
-            </a:r>
-            <a:endParaRPr lang="zh-TW"/>
-          </a:p>
-        </p:txBody>
-      </p:sp>
-      <p:sp>
-        <p:nvSpPr>
-          <p:cNvPr id="29" name="White editable shape"/>
+              <a:t>已儲存八色到近期色；不保證內建15色選單顯示或永久保留。可複製已套色文字再改字；格式刷操作尚未驗證。</a:t>
+            </a:r>
+            <a:endParaRPr lang="zh-TW"/>
+          </a:p>
+        </p:txBody>
+      </p:sp>
+      <p:sp>
+        <p:nvSpPr>
+          <p:cNvPr id="22" name="White editable shape"/>
           <p:cNvSpPr/>
           <p:nvPr/>
         </p:nvSpPr>
@@ -3459,7 +3315,7 @@
       </p:sp>
       <p:sp>
         <p:nvSpPr>
-          <p:cNvPr id="30" name="White extra note"/>
+          <p:cNvPr id="23" name="White extra note"/>
           <p:cNvSpPr/>
           <p:nvPr/>
         </p:nvSpPr>
@@ -3553,7 +3409,7 @@
                 <a:latin typeface="+mn-lt"/>
                 <a:ea typeface="+mn-ea"/>
               </a:rPr>
-              <a:t>主題色原生快速樣式</a:t>
+              <a:t>主題色可編輯矩形樣式 1/2</a:t>
             </a:r>
             <a:endParaRPr lang="zh-TW"/>
           </a:p>
@@ -3595,7 +3451,7 @@
                 <a:latin typeface="+mn-lt"/>
                 <a:ea typeface="+mn-ea"/>
               </a:rPr>
-              <a:t>Text1 保持原值；Accent 1–6 依下列色盤。白色另見螢光筆與白色範例頁。</a:t>
+              <a:t>外層卡片優先：深灰框、細灰框、主色框；下方接續常用矩形。Text1 保持原值。</a:t>
             </a:r>
             <a:endParaRPr lang="zh-TW"/>
           </a:p>
@@ -3931,7 +3787,7 @@
                 <a:latin typeface="+mn-lt"/>
                 <a:ea typeface="+mn-ea"/>
               </a:rPr>
-              <a:t>清爽線框 / Clean Outline</a:t>
+              <a:t>深灰框柔影外卡 / Gray Frame Card</a:t>
             </a:r>
             <a:endParaRPr lang="zh-TW"/>
           </a:p>
@@ -3948,16 +3804,1749 @@
             <a:off x="1691640" y="1691640"/>
             <a:ext cx="1298448" cy="530352"/>
           </a:xfrm>
-          <a:prstGeom prst="rect">
-            <a:avLst/>
-          </a:prstGeom>
-          <a:noFill/>
+          <a:prstGeom prst="roundRect">
+            <a:avLst>
+              <a:gd name="adj" fmla="val 17241"/>
+            </a:avLst>
+          </a:prstGeom>
+          <a:ln w="15875" cap="flat" cmpd="sng" algn="ctr">
+            <a:solidFill>
+              <a:srgbClr val="666666"/>
+            </a:solidFill>
+            <a:prstDash val="solid"/>
+            <a:round/>
+          </a:ln>
         </p:spPr>
         <p:style>
           <a:lnRef idx="1">
             <a:schemeClr val="tx1"/>
           </a:lnRef>
-          <a:fillRef idx="0">
+          <a:fillRef idx="1">
+            <a:schemeClr val="lt1"/>
+          </a:fillRef>
+          <a:effectRef idx="1">
+            <a:schemeClr val="tx1"/>
+          </a:effectRef>
+          <a:fontRef idx="minor">
+            <a:schemeClr val="dk2"/>
+          </a:fontRef>
+        </p:style>
+        <p:txBody>
+          <a:bodyPr wrap="square" lIns="45720" rIns="45720" tIns="0" bIns="0" anchor="ctr">
+            <a:noAutofit/>
+          </a:bodyPr>
+          <a:lstStyle/>
+          <a:p>
+            <a:pPr algn="ctr">
+              <a:buNone/>
+            </a:pPr>
+            <a:r>
+              <a:rPr lang="zh-TW" sz="2000" b="0">
+                <a:solidFill>
+                  <a:schemeClr val="dk2"/>
+                </a:solidFill>
+                <a:latin typeface="+mn-lt"/>
+                <a:ea typeface="+mn-ea"/>
+              </a:rPr>
+              <a:t>外層卡片</a:t>
+            </a:r>
+            <a:endParaRPr lang="zh-TW"/>
+          </a:p>
+        </p:txBody>
+      </p:sp>
+      <p:sp>
+        <p:nvSpPr>
+          <p:cNvPr id="13" name="Native style row 1 accent1"/>
+          <p:cNvSpPr/>
+          <p:nvPr/>
+        </p:nvSpPr>
+        <p:spPr>
+          <a:xfrm>
+            <a:off x="3118104" y="1691640"/>
+            <a:ext cx="1298448" cy="530352"/>
+          </a:xfrm>
+          <a:prstGeom prst="roundRect">
+            <a:avLst>
+              <a:gd name="adj" fmla="val 17241"/>
+            </a:avLst>
+          </a:prstGeom>
+          <a:ln w="15875" cap="flat" cmpd="sng" algn="ctr">
+            <a:solidFill>
+              <a:srgbClr val="666666"/>
+            </a:solidFill>
+            <a:prstDash val="solid"/>
+            <a:round/>
+          </a:ln>
+        </p:spPr>
+        <p:style>
+          <a:lnRef idx="1">
+            <a:schemeClr val="accent1"/>
+          </a:lnRef>
+          <a:fillRef idx="1">
+            <a:schemeClr val="lt1"/>
+          </a:fillRef>
+          <a:effectRef idx="1">
+            <a:schemeClr val="accent1"/>
+          </a:effectRef>
+          <a:fontRef idx="minor">
+            <a:schemeClr val="dk2"/>
+          </a:fontRef>
+        </p:style>
+        <p:txBody>
+          <a:bodyPr wrap="square" lIns="45720" rIns="45720" tIns="0" bIns="0" anchor="ctr">
+            <a:noAutofit/>
+          </a:bodyPr>
+          <a:lstStyle/>
+          <a:p>
+            <a:pPr algn="ctr">
+              <a:buNone/>
+            </a:pPr>
+            <a:r>
+              <a:rPr lang="zh-TW" sz="2000" b="0">
+                <a:solidFill>
+                  <a:schemeClr val="dk2"/>
+                </a:solidFill>
+                <a:latin typeface="+mn-lt"/>
+                <a:ea typeface="+mn-ea"/>
+              </a:rPr>
+              <a:t>外層卡片</a:t>
+            </a:r>
+            <a:endParaRPr lang="zh-TW"/>
+          </a:p>
+        </p:txBody>
+      </p:sp>
+      <p:sp>
+        <p:nvSpPr>
+          <p:cNvPr id="14" name="Native style row 1 accent2"/>
+          <p:cNvSpPr/>
+          <p:nvPr/>
+        </p:nvSpPr>
+        <p:spPr>
+          <a:xfrm>
+            <a:off x="4544568" y="1691640"/>
+            <a:ext cx="1298448" cy="530352"/>
+          </a:xfrm>
+          <a:prstGeom prst="roundRect">
+            <a:avLst>
+              <a:gd name="adj" fmla="val 17241"/>
+            </a:avLst>
+          </a:prstGeom>
+          <a:ln w="15875" cap="flat" cmpd="sng" algn="ctr">
+            <a:solidFill>
+              <a:srgbClr val="666666"/>
+            </a:solidFill>
+            <a:prstDash val="solid"/>
+            <a:round/>
+          </a:ln>
+        </p:spPr>
+        <p:style>
+          <a:lnRef idx="1">
+            <a:schemeClr val="accent2"/>
+          </a:lnRef>
+          <a:fillRef idx="1">
+            <a:schemeClr val="lt1"/>
+          </a:fillRef>
+          <a:effectRef idx="1">
+            <a:schemeClr val="accent2"/>
+          </a:effectRef>
+          <a:fontRef idx="minor">
+            <a:schemeClr val="dk2"/>
+          </a:fontRef>
+        </p:style>
+        <p:txBody>
+          <a:bodyPr wrap="square" lIns="45720" rIns="45720" tIns="0" bIns="0" anchor="ctr">
+            <a:noAutofit/>
+          </a:bodyPr>
+          <a:lstStyle/>
+          <a:p>
+            <a:pPr algn="ctr">
+              <a:buNone/>
+            </a:pPr>
+            <a:r>
+              <a:rPr lang="zh-TW" sz="2000" b="0">
+                <a:solidFill>
+                  <a:schemeClr val="dk2"/>
+                </a:solidFill>
+                <a:latin typeface="+mn-lt"/>
+                <a:ea typeface="+mn-ea"/>
+              </a:rPr>
+              <a:t>外層卡片</a:t>
+            </a:r>
+            <a:endParaRPr lang="zh-TW"/>
+          </a:p>
+        </p:txBody>
+      </p:sp>
+      <p:sp>
+        <p:nvSpPr>
+          <p:cNvPr id="15" name="Native style row 1 accent3"/>
+          <p:cNvSpPr/>
+          <p:nvPr/>
+        </p:nvSpPr>
+        <p:spPr>
+          <a:xfrm>
+            <a:off x="5971032" y="1691640"/>
+            <a:ext cx="1298448" cy="530352"/>
+          </a:xfrm>
+          <a:prstGeom prst="roundRect">
+            <a:avLst>
+              <a:gd name="adj" fmla="val 17241"/>
+            </a:avLst>
+          </a:prstGeom>
+          <a:ln w="15875" cap="flat" cmpd="sng" algn="ctr">
+            <a:solidFill>
+              <a:srgbClr val="666666"/>
+            </a:solidFill>
+            <a:prstDash val="solid"/>
+            <a:round/>
+          </a:ln>
+        </p:spPr>
+        <p:style>
+          <a:lnRef idx="1">
+            <a:schemeClr val="accent3"/>
+          </a:lnRef>
+          <a:fillRef idx="1">
+            <a:schemeClr val="lt1"/>
+          </a:fillRef>
+          <a:effectRef idx="1">
+            <a:schemeClr val="accent3"/>
+          </a:effectRef>
+          <a:fontRef idx="minor">
+            <a:schemeClr val="dk2"/>
+          </a:fontRef>
+        </p:style>
+        <p:txBody>
+          <a:bodyPr wrap="square" lIns="45720" rIns="45720" tIns="0" bIns="0" anchor="ctr">
+            <a:noAutofit/>
+          </a:bodyPr>
+          <a:lstStyle/>
+          <a:p>
+            <a:pPr algn="ctr">
+              <a:buNone/>
+            </a:pPr>
+            <a:r>
+              <a:rPr lang="zh-TW" sz="2000" b="0">
+                <a:solidFill>
+                  <a:schemeClr val="dk2"/>
+                </a:solidFill>
+                <a:latin typeface="+mn-lt"/>
+                <a:ea typeface="+mn-ea"/>
+              </a:rPr>
+              <a:t>外層卡片</a:t>
+            </a:r>
+            <a:endParaRPr lang="zh-TW"/>
+          </a:p>
+        </p:txBody>
+      </p:sp>
+      <p:sp>
+        <p:nvSpPr>
+          <p:cNvPr id="16" name="Native style row 1 accent4"/>
+          <p:cNvSpPr/>
+          <p:nvPr/>
+        </p:nvSpPr>
+        <p:spPr>
+          <a:xfrm>
+            <a:off x="7397496" y="1691640"/>
+            <a:ext cx="1298448" cy="530352"/>
+          </a:xfrm>
+          <a:prstGeom prst="roundRect">
+            <a:avLst>
+              <a:gd name="adj" fmla="val 17241"/>
+            </a:avLst>
+          </a:prstGeom>
+          <a:ln w="15875" cap="flat" cmpd="sng" algn="ctr">
+            <a:solidFill>
+              <a:srgbClr val="666666"/>
+            </a:solidFill>
+            <a:prstDash val="solid"/>
+            <a:round/>
+          </a:ln>
+        </p:spPr>
+        <p:style>
+          <a:lnRef idx="1">
+            <a:schemeClr val="accent4"/>
+          </a:lnRef>
+          <a:fillRef idx="1">
+            <a:schemeClr val="lt1"/>
+          </a:fillRef>
+          <a:effectRef idx="1">
+            <a:schemeClr val="accent4"/>
+          </a:effectRef>
+          <a:fontRef idx="minor">
+            <a:schemeClr val="dk2"/>
+          </a:fontRef>
+        </p:style>
+        <p:txBody>
+          <a:bodyPr wrap="square" lIns="45720" rIns="45720" tIns="0" bIns="0" anchor="ctr">
+            <a:noAutofit/>
+          </a:bodyPr>
+          <a:lstStyle/>
+          <a:p>
+            <a:pPr algn="ctr">
+              <a:buNone/>
+            </a:pPr>
+            <a:r>
+              <a:rPr lang="zh-TW" sz="2000" b="0">
+                <a:solidFill>
+                  <a:schemeClr val="dk2"/>
+                </a:solidFill>
+                <a:latin typeface="+mn-lt"/>
+                <a:ea typeface="+mn-ea"/>
+              </a:rPr>
+              <a:t>外層卡片</a:t>
+            </a:r>
+            <a:endParaRPr lang="zh-TW"/>
+          </a:p>
+        </p:txBody>
+      </p:sp>
+      <p:sp>
+        <p:nvSpPr>
+          <p:cNvPr id="17" name="Native style row 1 accent5"/>
+          <p:cNvSpPr/>
+          <p:nvPr/>
+        </p:nvSpPr>
+        <p:spPr>
+          <a:xfrm>
+            <a:off x="8823960" y="1691640"/>
+            <a:ext cx="1298448" cy="530352"/>
+          </a:xfrm>
+          <a:prstGeom prst="roundRect">
+            <a:avLst>
+              <a:gd name="adj" fmla="val 17241"/>
+            </a:avLst>
+          </a:prstGeom>
+          <a:ln w="15875" cap="flat" cmpd="sng" algn="ctr">
+            <a:solidFill>
+              <a:srgbClr val="666666"/>
+            </a:solidFill>
+            <a:prstDash val="solid"/>
+            <a:round/>
+          </a:ln>
+        </p:spPr>
+        <p:style>
+          <a:lnRef idx="1">
+            <a:schemeClr val="accent5"/>
+          </a:lnRef>
+          <a:fillRef idx="1">
+            <a:schemeClr val="lt1"/>
+          </a:fillRef>
+          <a:effectRef idx="1">
+            <a:schemeClr val="accent5"/>
+          </a:effectRef>
+          <a:fontRef idx="minor">
+            <a:schemeClr val="dk2"/>
+          </a:fontRef>
+        </p:style>
+        <p:txBody>
+          <a:bodyPr wrap="square" lIns="45720" rIns="45720" tIns="0" bIns="0" anchor="ctr">
+            <a:noAutofit/>
+          </a:bodyPr>
+          <a:lstStyle/>
+          <a:p>
+            <a:pPr algn="ctr">
+              <a:buNone/>
+            </a:pPr>
+            <a:r>
+              <a:rPr lang="zh-TW" sz="2000" b="0">
+                <a:solidFill>
+                  <a:schemeClr val="dk2"/>
+                </a:solidFill>
+                <a:latin typeface="+mn-lt"/>
+                <a:ea typeface="+mn-ea"/>
+              </a:rPr>
+              <a:t>外層卡片</a:t>
+            </a:r>
+            <a:endParaRPr lang="zh-TW"/>
+          </a:p>
+        </p:txBody>
+      </p:sp>
+      <p:sp>
+        <p:nvSpPr>
+          <p:cNvPr id="18" name="Native style row 1 accent6"/>
+          <p:cNvSpPr/>
+          <p:nvPr/>
+        </p:nvSpPr>
+        <p:spPr>
+          <a:xfrm>
+            <a:off x="10250424" y="1691640"/>
+            <a:ext cx="1298448" cy="530352"/>
+          </a:xfrm>
+          <a:prstGeom prst="roundRect">
+            <a:avLst>
+              <a:gd name="adj" fmla="val 17241"/>
+            </a:avLst>
+          </a:prstGeom>
+          <a:ln w="15875" cap="flat" cmpd="sng" algn="ctr">
+            <a:solidFill>
+              <a:srgbClr val="666666"/>
+            </a:solidFill>
+            <a:prstDash val="solid"/>
+            <a:round/>
+          </a:ln>
+        </p:spPr>
+        <p:style>
+          <a:lnRef idx="1">
+            <a:schemeClr val="accent6"/>
+          </a:lnRef>
+          <a:fillRef idx="1">
+            <a:schemeClr val="lt1"/>
+          </a:fillRef>
+          <a:effectRef idx="1">
+            <a:schemeClr val="accent6"/>
+          </a:effectRef>
+          <a:fontRef idx="minor">
+            <a:schemeClr val="dk2"/>
+          </a:fontRef>
+        </p:style>
+        <p:txBody>
+          <a:bodyPr wrap="square" lIns="45720" rIns="45720" tIns="0" bIns="0" anchor="ctr">
+            <a:noAutofit/>
+          </a:bodyPr>
+          <a:lstStyle/>
+          <a:p>
+            <a:pPr algn="ctr">
+              <a:buNone/>
+            </a:pPr>
+            <a:r>
+              <a:rPr lang="zh-TW" sz="2000" b="0">
+                <a:solidFill>
+                  <a:schemeClr val="dk2"/>
+                </a:solidFill>
+                <a:latin typeface="+mn-lt"/>
+                <a:ea typeface="+mn-ea"/>
+              </a:rPr>
+              <a:t>外層卡片</a:t>
+            </a:r>
+            <a:endParaRPr lang="zh-TW"/>
+          </a:p>
+        </p:txBody>
+      </p:sp>
+      <p:sp>
+        <p:nvSpPr>
+          <p:cNvPr id="19" name="Effect label 1"/>
+          <p:cNvSpPr/>
+          <p:nvPr/>
+        </p:nvSpPr>
+        <p:spPr>
+          <a:xfrm>
+            <a:off x="365760" y="2569464"/>
+            <a:ext cx="1280160" cy="530352"/>
+          </a:xfrm>
+          <a:prstGeom prst="rect">
+            <a:avLst/>
+          </a:prstGeom>
+          <a:noFill/>
+          <a:ln>
+            <a:noFill/>
+          </a:ln>
+        </p:spPr>
+        <p:txBody>
+          <a:bodyPr wrap="square" lIns="45720" rIns="45720" tIns="0" bIns="0" anchor="ctr">
+            <a:noAutofit/>
+          </a:bodyPr>
+          <a:lstStyle/>
+          <a:p>
+            <a:pPr algn="l">
+              <a:buNone/>
+            </a:pPr>
+            <a:r>
+              <a:rPr lang="zh-TW" sz="1000" b="0">
+                <a:solidFill>
+                  <a:srgbClr val="333333"/>
+                </a:solidFill>
+                <a:latin typeface="+mn-lt"/>
+                <a:ea typeface="+mn-ea"/>
+              </a:rPr>
+              <a:t>細灰框柔影外卡 / Soft Frame Card</a:t>
+            </a:r>
+            <a:endParaRPr lang="zh-TW"/>
+          </a:p>
+        </p:txBody>
+      </p:sp>
+      <p:sp>
+        <p:nvSpPr>
+          <p:cNvPr id="20" name="Native style row 2 tx1"/>
+          <p:cNvSpPr/>
+          <p:nvPr/>
+        </p:nvSpPr>
+        <p:spPr>
+          <a:xfrm>
+            <a:off x="1691640" y="2551176"/>
+            <a:ext cx="1298448" cy="530352"/>
+          </a:xfrm>
+          <a:prstGeom prst="roundRect">
+            <a:avLst>
+              <a:gd name="adj" fmla="val 17241"/>
+            </a:avLst>
+          </a:prstGeom>
+        </p:spPr>
+        <p:style>
+          <a:lnRef idx="2">
+            <a:schemeClr val="tx1"/>
+          </a:lnRef>
+          <a:fillRef idx="1">
+            <a:schemeClr val="lt1"/>
+          </a:fillRef>
+          <a:effectRef idx="1">
+            <a:schemeClr val="tx1"/>
+          </a:effectRef>
+          <a:fontRef idx="minor">
+            <a:schemeClr val="dk2"/>
+          </a:fontRef>
+        </p:style>
+        <p:txBody>
+          <a:bodyPr wrap="square" lIns="45720" rIns="45720" tIns="0" bIns="0" anchor="ctr">
+            <a:noAutofit/>
+          </a:bodyPr>
+          <a:lstStyle/>
+          <a:p>
+            <a:pPr algn="ctr">
+              <a:buNone/>
+            </a:pPr>
+            <a:r>
+              <a:rPr lang="zh-TW" sz="2000" b="0">
+                <a:solidFill>
+                  <a:schemeClr val="dk2"/>
+                </a:solidFill>
+                <a:latin typeface="+mn-lt"/>
+                <a:ea typeface="+mn-ea"/>
+              </a:rPr>
+              <a:t>外層卡片</a:t>
+            </a:r>
+            <a:endParaRPr lang="zh-TW"/>
+          </a:p>
+        </p:txBody>
+      </p:sp>
+      <p:sp>
+        <p:nvSpPr>
+          <p:cNvPr id="21" name="Native style row 2 accent1"/>
+          <p:cNvSpPr/>
+          <p:nvPr/>
+        </p:nvSpPr>
+        <p:spPr>
+          <a:xfrm>
+            <a:off x="3118104" y="2551176"/>
+            <a:ext cx="1298448" cy="530352"/>
+          </a:xfrm>
+          <a:prstGeom prst="roundRect">
+            <a:avLst>
+              <a:gd name="adj" fmla="val 17241"/>
+            </a:avLst>
+          </a:prstGeom>
+        </p:spPr>
+        <p:style>
+          <a:lnRef idx="2">
+            <a:schemeClr val="accent1"/>
+          </a:lnRef>
+          <a:fillRef idx="1">
+            <a:schemeClr val="lt1"/>
+          </a:fillRef>
+          <a:effectRef idx="1">
+            <a:schemeClr val="accent1"/>
+          </a:effectRef>
+          <a:fontRef idx="minor">
+            <a:schemeClr val="dk2"/>
+          </a:fontRef>
+        </p:style>
+        <p:txBody>
+          <a:bodyPr wrap="square" lIns="45720" rIns="45720" tIns="0" bIns="0" anchor="ctr">
+            <a:noAutofit/>
+          </a:bodyPr>
+          <a:lstStyle/>
+          <a:p>
+            <a:pPr algn="ctr">
+              <a:buNone/>
+            </a:pPr>
+            <a:r>
+              <a:rPr lang="zh-TW" sz="2000" b="0">
+                <a:solidFill>
+                  <a:schemeClr val="dk2"/>
+                </a:solidFill>
+                <a:latin typeface="+mn-lt"/>
+                <a:ea typeface="+mn-ea"/>
+              </a:rPr>
+              <a:t>外層卡片</a:t>
+            </a:r>
+            <a:endParaRPr lang="zh-TW"/>
+          </a:p>
+        </p:txBody>
+      </p:sp>
+      <p:sp>
+        <p:nvSpPr>
+          <p:cNvPr id="22" name="Native style row 2 accent2"/>
+          <p:cNvSpPr/>
+          <p:nvPr/>
+        </p:nvSpPr>
+        <p:spPr>
+          <a:xfrm>
+            <a:off x="4544568" y="2551176"/>
+            <a:ext cx="1298448" cy="530352"/>
+          </a:xfrm>
+          <a:prstGeom prst="roundRect">
+            <a:avLst>
+              <a:gd name="adj" fmla="val 17241"/>
+            </a:avLst>
+          </a:prstGeom>
+        </p:spPr>
+        <p:style>
+          <a:lnRef idx="2">
+            <a:schemeClr val="accent2"/>
+          </a:lnRef>
+          <a:fillRef idx="1">
+            <a:schemeClr val="lt1"/>
+          </a:fillRef>
+          <a:effectRef idx="1">
+            <a:schemeClr val="accent2"/>
+          </a:effectRef>
+          <a:fontRef idx="minor">
+            <a:schemeClr val="dk2"/>
+          </a:fontRef>
+        </p:style>
+        <p:txBody>
+          <a:bodyPr wrap="square" lIns="45720" rIns="45720" tIns="0" bIns="0" anchor="ctr">
+            <a:noAutofit/>
+          </a:bodyPr>
+          <a:lstStyle/>
+          <a:p>
+            <a:pPr algn="ctr">
+              <a:buNone/>
+            </a:pPr>
+            <a:r>
+              <a:rPr lang="zh-TW" sz="2000" b="0">
+                <a:solidFill>
+                  <a:schemeClr val="dk2"/>
+                </a:solidFill>
+                <a:latin typeface="+mn-lt"/>
+                <a:ea typeface="+mn-ea"/>
+              </a:rPr>
+              <a:t>外層卡片</a:t>
+            </a:r>
+            <a:endParaRPr lang="zh-TW"/>
+          </a:p>
+        </p:txBody>
+      </p:sp>
+      <p:sp>
+        <p:nvSpPr>
+          <p:cNvPr id="23" name="Native style row 2 accent3"/>
+          <p:cNvSpPr/>
+          <p:nvPr/>
+        </p:nvSpPr>
+        <p:spPr>
+          <a:xfrm>
+            <a:off x="5971032" y="2551176"/>
+            <a:ext cx="1298448" cy="530352"/>
+          </a:xfrm>
+          <a:prstGeom prst="roundRect">
+            <a:avLst>
+              <a:gd name="adj" fmla="val 17241"/>
+            </a:avLst>
+          </a:prstGeom>
+        </p:spPr>
+        <p:style>
+          <a:lnRef idx="2">
+            <a:schemeClr val="accent3"/>
+          </a:lnRef>
+          <a:fillRef idx="1">
+            <a:schemeClr val="lt1"/>
+          </a:fillRef>
+          <a:effectRef idx="1">
+            <a:schemeClr val="accent3"/>
+          </a:effectRef>
+          <a:fontRef idx="minor">
+            <a:schemeClr val="dk2"/>
+          </a:fontRef>
+        </p:style>
+        <p:txBody>
+          <a:bodyPr wrap="square" lIns="45720" rIns="45720" tIns="0" bIns="0" anchor="ctr">
+            <a:noAutofit/>
+          </a:bodyPr>
+          <a:lstStyle/>
+          <a:p>
+            <a:pPr algn="ctr">
+              <a:buNone/>
+            </a:pPr>
+            <a:r>
+              <a:rPr lang="zh-TW" sz="2000" b="0">
+                <a:solidFill>
+                  <a:schemeClr val="dk2"/>
+                </a:solidFill>
+                <a:latin typeface="+mn-lt"/>
+                <a:ea typeface="+mn-ea"/>
+              </a:rPr>
+              <a:t>外層卡片</a:t>
+            </a:r>
+            <a:endParaRPr lang="zh-TW"/>
+          </a:p>
+        </p:txBody>
+      </p:sp>
+      <p:sp>
+        <p:nvSpPr>
+          <p:cNvPr id="24" name="Native style row 2 accent4"/>
+          <p:cNvSpPr/>
+          <p:nvPr/>
+        </p:nvSpPr>
+        <p:spPr>
+          <a:xfrm>
+            <a:off x="7397496" y="2551176"/>
+            <a:ext cx="1298448" cy="530352"/>
+          </a:xfrm>
+          <a:prstGeom prst="roundRect">
+            <a:avLst>
+              <a:gd name="adj" fmla="val 17241"/>
+            </a:avLst>
+          </a:prstGeom>
+        </p:spPr>
+        <p:style>
+          <a:lnRef idx="2">
+            <a:schemeClr val="accent4"/>
+          </a:lnRef>
+          <a:fillRef idx="1">
+            <a:schemeClr val="lt1"/>
+          </a:fillRef>
+          <a:effectRef idx="1">
+            <a:schemeClr val="accent4"/>
+          </a:effectRef>
+          <a:fontRef idx="minor">
+            <a:schemeClr val="dk2"/>
+          </a:fontRef>
+        </p:style>
+        <p:txBody>
+          <a:bodyPr wrap="square" lIns="45720" rIns="45720" tIns="0" bIns="0" anchor="ctr">
+            <a:noAutofit/>
+          </a:bodyPr>
+          <a:lstStyle/>
+          <a:p>
+            <a:pPr algn="ctr">
+              <a:buNone/>
+            </a:pPr>
+            <a:r>
+              <a:rPr lang="zh-TW" sz="2000" b="0">
+                <a:solidFill>
+                  <a:schemeClr val="dk2"/>
+                </a:solidFill>
+                <a:latin typeface="+mn-lt"/>
+                <a:ea typeface="+mn-ea"/>
+              </a:rPr>
+              <a:t>外層卡片</a:t>
+            </a:r>
+            <a:endParaRPr lang="zh-TW"/>
+          </a:p>
+        </p:txBody>
+      </p:sp>
+      <p:sp>
+        <p:nvSpPr>
+          <p:cNvPr id="25" name="Native style row 2 accent5"/>
+          <p:cNvSpPr/>
+          <p:nvPr/>
+        </p:nvSpPr>
+        <p:spPr>
+          <a:xfrm>
+            <a:off x="8823960" y="2551176"/>
+            <a:ext cx="1298448" cy="530352"/>
+          </a:xfrm>
+          <a:prstGeom prst="roundRect">
+            <a:avLst>
+              <a:gd name="adj" fmla="val 17241"/>
+            </a:avLst>
+          </a:prstGeom>
+        </p:spPr>
+        <p:style>
+          <a:lnRef idx="2">
+            <a:schemeClr val="accent5"/>
+          </a:lnRef>
+          <a:fillRef idx="1">
+            <a:schemeClr val="lt1"/>
+          </a:fillRef>
+          <a:effectRef idx="1">
+            <a:schemeClr val="accent5"/>
+          </a:effectRef>
+          <a:fontRef idx="minor">
+            <a:schemeClr val="dk2"/>
+          </a:fontRef>
+        </p:style>
+        <p:txBody>
+          <a:bodyPr wrap="square" lIns="45720" rIns="45720" tIns="0" bIns="0" anchor="ctr">
+            <a:noAutofit/>
+          </a:bodyPr>
+          <a:lstStyle/>
+          <a:p>
+            <a:pPr algn="ctr">
+              <a:buNone/>
+            </a:pPr>
+            <a:r>
+              <a:rPr lang="zh-TW" sz="2000" b="0">
+                <a:solidFill>
+                  <a:schemeClr val="dk2"/>
+                </a:solidFill>
+                <a:latin typeface="+mn-lt"/>
+                <a:ea typeface="+mn-ea"/>
+              </a:rPr>
+              <a:t>外層卡片</a:t>
+            </a:r>
+            <a:endParaRPr lang="zh-TW"/>
+          </a:p>
+        </p:txBody>
+      </p:sp>
+      <p:sp>
+        <p:nvSpPr>
+          <p:cNvPr id="26" name="Native style row 2 accent6"/>
+          <p:cNvSpPr/>
+          <p:nvPr/>
+        </p:nvSpPr>
+        <p:spPr>
+          <a:xfrm>
+            <a:off x="10250424" y="2551176"/>
+            <a:ext cx="1298448" cy="530352"/>
+          </a:xfrm>
+          <a:prstGeom prst="roundRect">
+            <a:avLst>
+              <a:gd name="adj" fmla="val 17241"/>
+            </a:avLst>
+          </a:prstGeom>
+        </p:spPr>
+        <p:style>
+          <a:lnRef idx="2">
+            <a:schemeClr val="accent6"/>
+          </a:lnRef>
+          <a:fillRef idx="1">
+            <a:schemeClr val="lt1"/>
+          </a:fillRef>
+          <a:effectRef idx="1">
+            <a:schemeClr val="accent6"/>
+          </a:effectRef>
+          <a:fontRef idx="minor">
+            <a:schemeClr val="dk2"/>
+          </a:fontRef>
+        </p:style>
+        <p:txBody>
+          <a:bodyPr wrap="square" lIns="45720" rIns="45720" tIns="0" bIns="0" anchor="ctr">
+            <a:noAutofit/>
+          </a:bodyPr>
+          <a:lstStyle/>
+          <a:p>
+            <a:pPr algn="ctr">
+              <a:buNone/>
+            </a:pPr>
+            <a:r>
+              <a:rPr lang="zh-TW" sz="2000" b="0">
+                <a:solidFill>
+                  <a:schemeClr val="dk2"/>
+                </a:solidFill>
+                <a:latin typeface="+mn-lt"/>
+                <a:ea typeface="+mn-ea"/>
+              </a:rPr>
+              <a:t>外層卡片</a:t>
+            </a:r>
+            <a:endParaRPr lang="zh-TW"/>
+          </a:p>
+        </p:txBody>
+      </p:sp>
+      <p:sp>
+        <p:nvSpPr>
+          <p:cNvPr id="27" name="Effect label 2"/>
+          <p:cNvSpPr/>
+          <p:nvPr/>
+        </p:nvSpPr>
+        <p:spPr>
+          <a:xfrm>
+            <a:off x="365760" y="3429000"/>
+            <a:ext cx="1280160" cy="530352"/>
+          </a:xfrm>
+          <a:prstGeom prst="rect">
+            <a:avLst/>
+          </a:prstGeom>
+          <a:noFill/>
+          <a:ln>
+            <a:noFill/>
+          </a:ln>
+        </p:spPr>
+        <p:txBody>
+          <a:bodyPr wrap="square" lIns="45720" rIns="45720" tIns="0" bIns="0" anchor="ctr">
+            <a:noAutofit/>
+          </a:bodyPr>
+          <a:lstStyle/>
+          <a:p>
+            <a:pPr algn="l">
+              <a:buNone/>
+            </a:pPr>
+            <a:r>
+              <a:rPr lang="zh-TW" sz="1000" b="0">
+                <a:solidFill>
+                  <a:srgbClr val="333333"/>
+                </a:solidFill>
+                <a:latin typeface="+mn-lt"/>
+                <a:ea typeface="+mn-ea"/>
+              </a:rPr>
+              <a:t>主色框柔影外卡 / Theme Frame Card</a:t>
+            </a:r>
+            <a:endParaRPr lang="zh-TW"/>
+          </a:p>
+        </p:txBody>
+      </p:sp>
+      <p:sp>
+        <p:nvSpPr>
+          <p:cNvPr id="28" name="Native style row 3 tx1"/>
+          <p:cNvSpPr/>
+          <p:nvPr/>
+        </p:nvSpPr>
+        <p:spPr>
+          <a:xfrm>
+            <a:off x="1691640" y="3410712"/>
+            <a:ext cx="1298448" cy="530352"/>
+          </a:xfrm>
+          <a:prstGeom prst="roundRect">
+            <a:avLst>
+              <a:gd name="adj" fmla="val 17241"/>
+            </a:avLst>
+          </a:prstGeom>
+        </p:spPr>
+        <p:style>
+          <a:lnRef idx="3">
+            <a:schemeClr val="tx1"/>
+          </a:lnRef>
+          <a:fillRef idx="1">
+            <a:schemeClr val="lt1"/>
+          </a:fillRef>
+          <a:effectRef idx="1">
+            <a:schemeClr val="tx1"/>
+          </a:effectRef>
+          <a:fontRef idx="minor">
+            <a:schemeClr val="dk2"/>
+          </a:fontRef>
+        </p:style>
+        <p:txBody>
+          <a:bodyPr wrap="square" lIns="45720" rIns="45720" tIns="0" bIns="0" anchor="ctr">
+            <a:noAutofit/>
+          </a:bodyPr>
+          <a:lstStyle/>
+          <a:p>
+            <a:pPr algn="ctr">
+              <a:buNone/>
+            </a:pPr>
+            <a:r>
+              <a:rPr lang="zh-TW" sz="2000" b="0">
+                <a:solidFill>
+                  <a:schemeClr val="dk2"/>
+                </a:solidFill>
+                <a:latin typeface="+mn-lt"/>
+                <a:ea typeface="+mn-ea"/>
+              </a:rPr>
+              <a:t>外層卡片</a:t>
+            </a:r>
+            <a:endParaRPr lang="zh-TW"/>
+          </a:p>
+        </p:txBody>
+      </p:sp>
+      <p:sp>
+        <p:nvSpPr>
+          <p:cNvPr id="29" name="Native style row 3 accent1"/>
+          <p:cNvSpPr/>
+          <p:nvPr/>
+        </p:nvSpPr>
+        <p:spPr>
+          <a:xfrm>
+            <a:off x="3118104" y="3410712"/>
+            <a:ext cx="1298448" cy="530352"/>
+          </a:xfrm>
+          <a:prstGeom prst="roundRect">
+            <a:avLst>
+              <a:gd name="adj" fmla="val 17241"/>
+            </a:avLst>
+          </a:prstGeom>
+        </p:spPr>
+        <p:style>
+          <a:lnRef idx="3">
+            <a:schemeClr val="accent1"/>
+          </a:lnRef>
+          <a:fillRef idx="1">
+            <a:schemeClr val="lt1"/>
+          </a:fillRef>
+          <a:effectRef idx="1">
+            <a:schemeClr val="accent1"/>
+          </a:effectRef>
+          <a:fontRef idx="minor">
+            <a:schemeClr val="dk2"/>
+          </a:fontRef>
+        </p:style>
+        <p:txBody>
+          <a:bodyPr wrap="square" lIns="45720" rIns="45720" tIns="0" bIns="0" anchor="ctr">
+            <a:noAutofit/>
+          </a:bodyPr>
+          <a:lstStyle/>
+          <a:p>
+            <a:pPr algn="ctr">
+              <a:buNone/>
+            </a:pPr>
+            <a:r>
+              <a:rPr lang="zh-TW" sz="2000" b="0">
+                <a:solidFill>
+                  <a:schemeClr val="dk2"/>
+                </a:solidFill>
+                <a:latin typeface="+mn-lt"/>
+                <a:ea typeface="+mn-ea"/>
+              </a:rPr>
+              <a:t>外層卡片</a:t>
+            </a:r>
+            <a:endParaRPr lang="zh-TW"/>
+          </a:p>
+        </p:txBody>
+      </p:sp>
+      <p:sp>
+        <p:nvSpPr>
+          <p:cNvPr id="30" name="Native style row 3 accent2"/>
+          <p:cNvSpPr/>
+          <p:nvPr/>
+        </p:nvSpPr>
+        <p:spPr>
+          <a:xfrm>
+            <a:off x="4544568" y="3410712"/>
+            <a:ext cx="1298448" cy="530352"/>
+          </a:xfrm>
+          <a:prstGeom prst="roundRect">
+            <a:avLst>
+              <a:gd name="adj" fmla="val 17241"/>
+            </a:avLst>
+          </a:prstGeom>
+        </p:spPr>
+        <p:style>
+          <a:lnRef idx="3">
+            <a:schemeClr val="accent2"/>
+          </a:lnRef>
+          <a:fillRef idx="1">
+            <a:schemeClr val="lt1"/>
+          </a:fillRef>
+          <a:effectRef idx="1">
+            <a:schemeClr val="accent2"/>
+          </a:effectRef>
+          <a:fontRef idx="minor">
+            <a:schemeClr val="dk2"/>
+          </a:fontRef>
+        </p:style>
+        <p:txBody>
+          <a:bodyPr wrap="square" lIns="45720" rIns="45720" tIns="0" bIns="0" anchor="ctr">
+            <a:noAutofit/>
+          </a:bodyPr>
+          <a:lstStyle/>
+          <a:p>
+            <a:pPr algn="ctr">
+              <a:buNone/>
+            </a:pPr>
+            <a:r>
+              <a:rPr lang="zh-TW" sz="2000" b="0">
+                <a:solidFill>
+                  <a:schemeClr val="dk2"/>
+                </a:solidFill>
+                <a:latin typeface="+mn-lt"/>
+                <a:ea typeface="+mn-ea"/>
+              </a:rPr>
+              <a:t>外層卡片</a:t>
+            </a:r>
+            <a:endParaRPr lang="zh-TW"/>
+          </a:p>
+        </p:txBody>
+      </p:sp>
+      <p:sp>
+        <p:nvSpPr>
+          <p:cNvPr id="31" name="Native style row 3 accent3"/>
+          <p:cNvSpPr/>
+          <p:nvPr/>
+        </p:nvSpPr>
+        <p:spPr>
+          <a:xfrm>
+            <a:off x="5971032" y="3410712"/>
+            <a:ext cx="1298448" cy="530352"/>
+          </a:xfrm>
+          <a:prstGeom prst="roundRect">
+            <a:avLst>
+              <a:gd name="adj" fmla="val 17241"/>
+            </a:avLst>
+          </a:prstGeom>
+        </p:spPr>
+        <p:style>
+          <a:lnRef idx="3">
+            <a:schemeClr val="accent3"/>
+          </a:lnRef>
+          <a:fillRef idx="1">
+            <a:schemeClr val="lt1"/>
+          </a:fillRef>
+          <a:effectRef idx="1">
+            <a:schemeClr val="accent3"/>
+          </a:effectRef>
+          <a:fontRef idx="minor">
+            <a:schemeClr val="dk2"/>
+          </a:fontRef>
+        </p:style>
+        <p:txBody>
+          <a:bodyPr wrap="square" lIns="45720" rIns="45720" tIns="0" bIns="0" anchor="ctr">
+            <a:noAutofit/>
+          </a:bodyPr>
+          <a:lstStyle/>
+          <a:p>
+            <a:pPr algn="ctr">
+              <a:buNone/>
+            </a:pPr>
+            <a:r>
+              <a:rPr lang="zh-TW" sz="2000" b="0">
+                <a:solidFill>
+                  <a:schemeClr val="dk2"/>
+                </a:solidFill>
+                <a:latin typeface="+mn-lt"/>
+                <a:ea typeface="+mn-ea"/>
+              </a:rPr>
+              <a:t>外層卡片</a:t>
+            </a:r>
+            <a:endParaRPr lang="zh-TW"/>
+          </a:p>
+        </p:txBody>
+      </p:sp>
+      <p:sp>
+        <p:nvSpPr>
+          <p:cNvPr id="32" name="Native style row 3 accent4"/>
+          <p:cNvSpPr/>
+          <p:nvPr/>
+        </p:nvSpPr>
+        <p:spPr>
+          <a:xfrm>
+            <a:off x="7397496" y="3410712"/>
+            <a:ext cx="1298448" cy="530352"/>
+          </a:xfrm>
+          <a:prstGeom prst="roundRect">
+            <a:avLst>
+              <a:gd name="adj" fmla="val 17241"/>
+            </a:avLst>
+          </a:prstGeom>
+        </p:spPr>
+        <p:style>
+          <a:lnRef idx="3">
+            <a:schemeClr val="accent4"/>
+          </a:lnRef>
+          <a:fillRef idx="1">
+            <a:schemeClr val="lt1"/>
+          </a:fillRef>
+          <a:effectRef idx="1">
+            <a:schemeClr val="accent4"/>
+          </a:effectRef>
+          <a:fontRef idx="minor">
+            <a:schemeClr val="dk2"/>
+          </a:fontRef>
+        </p:style>
+        <p:txBody>
+          <a:bodyPr wrap="square" lIns="45720" rIns="45720" tIns="0" bIns="0" anchor="ctr">
+            <a:noAutofit/>
+          </a:bodyPr>
+          <a:lstStyle/>
+          <a:p>
+            <a:pPr algn="ctr">
+              <a:buNone/>
+            </a:pPr>
+            <a:r>
+              <a:rPr lang="zh-TW" sz="2000" b="0">
+                <a:solidFill>
+                  <a:schemeClr val="dk2"/>
+                </a:solidFill>
+                <a:latin typeface="+mn-lt"/>
+                <a:ea typeface="+mn-ea"/>
+              </a:rPr>
+              <a:t>外層卡片</a:t>
+            </a:r>
+            <a:endParaRPr lang="zh-TW"/>
+          </a:p>
+        </p:txBody>
+      </p:sp>
+      <p:sp>
+        <p:nvSpPr>
+          <p:cNvPr id="33" name="Native style row 3 accent5"/>
+          <p:cNvSpPr/>
+          <p:nvPr/>
+        </p:nvSpPr>
+        <p:spPr>
+          <a:xfrm>
+            <a:off x="8823960" y="3410712"/>
+            <a:ext cx="1298448" cy="530352"/>
+          </a:xfrm>
+          <a:prstGeom prst="roundRect">
+            <a:avLst>
+              <a:gd name="adj" fmla="val 17241"/>
+            </a:avLst>
+          </a:prstGeom>
+        </p:spPr>
+        <p:style>
+          <a:lnRef idx="3">
+            <a:schemeClr val="accent5"/>
+          </a:lnRef>
+          <a:fillRef idx="1">
+            <a:schemeClr val="lt1"/>
+          </a:fillRef>
+          <a:effectRef idx="1">
+            <a:schemeClr val="accent5"/>
+          </a:effectRef>
+          <a:fontRef idx="minor">
+            <a:schemeClr val="dk2"/>
+          </a:fontRef>
+        </p:style>
+        <p:txBody>
+          <a:bodyPr wrap="square" lIns="45720" rIns="45720" tIns="0" bIns="0" anchor="ctr">
+            <a:noAutofit/>
+          </a:bodyPr>
+          <a:lstStyle/>
+          <a:p>
+            <a:pPr algn="ctr">
+              <a:buNone/>
+            </a:pPr>
+            <a:r>
+              <a:rPr lang="zh-TW" sz="2000" b="0">
+                <a:solidFill>
+                  <a:schemeClr val="dk2"/>
+                </a:solidFill>
+                <a:latin typeface="+mn-lt"/>
+                <a:ea typeface="+mn-ea"/>
+              </a:rPr>
+              <a:t>外層卡片</a:t>
+            </a:r>
+            <a:endParaRPr lang="zh-TW"/>
+          </a:p>
+        </p:txBody>
+      </p:sp>
+      <p:sp>
+        <p:nvSpPr>
+          <p:cNvPr id="34" name="Native style row 3 accent6"/>
+          <p:cNvSpPr/>
+          <p:nvPr/>
+        </p:nvSpPr>
+        <p:spPr>
+          <a:xfrm>
+            <a:off x="10250424" y="3410712"/>
+            <a:ext cx="1298448" cy="530352"/>
+          </a:xfrm>
+          <a:prstGeom prst="roundRect">
+            <a:avLst>
+              <a:gd name="adj" fmla="val 17241"/>
+            </a:avLst>
+          </a:prstGeom>
+        </p:spPr>
+        <p:style>
+          <a:lnRef idx="3">
+            <a:schemeClr val="accent6"/>
+          </a:lnRef>
+          <a:fillRef idx="1">
+            <a:schemeClr val="lt1"/>
+          </a:fillRef>
+          <a:effectRef idx="1">
+            <a:schemeClr val="accent6"/>
+          </a:effectRef>
+          <a:fontRef idx="minor">
+            <a:schemeClr val="dk2"/>
+          </a:fontRef>
+        </p:style>
+        <p:txBody>
+          <a:bodyPr wrap="square" lIns="45720" rIns="45720" tIns="0" bIns="0" anchor="ctr">
+            <a:noAutofit/>
+          </a:bodyPr>
+          <a:lstStyle/>
+          <a:p>
+            <a:pPr algn="ctr">
+              <a:buNone/>
+            </a:pPr>
+            <a:r>
+              <a:rPr lang="zh-TW" sz="2000" b="0">
+                <a:solidFill>
+                  <a:schemeClr val="dk2"/>
+                </a:solidFill>
+                <a:latin typeface="+mn-lt"/>
+                <a:ea typeface="+mn-ea"/>
+              </a:rPr>
+              <a:t>外層卡片</a:t>
+            </a:r>
+            <a:endParaRPr lang="zh-TW"/>
+          </a:p>
+        </p:txBody>
+      </p:sp>
+      <p:sp>
+        <p:nvSpPr>
+          <p:cNvPr id="35" name="Effect label 3"/>
+          <p:cNvSpPr/>
+          <p:nvPr/>
+        </p:nvSpPr>
+        <p:spPr>
+          <a:xfrm>
+            <a:off x="365760" y="4288536"/>
+            <a:ext cx="1280160" cy="530352"/>
+          </a:xfrm>
+          <a:prstGeom prst="rect">
+            <a:avLst/>
+          </a:prstGeom>
+          <a:noFill/>
+          <a:ln>
+            <a:noFill/>
+          </a:ln>
+        </p:spPr>
+        <p:txBody>
+          <a:bodyPr wrap="square" lIns="45720" rIns="45720" tIns="0" bIns="0" anchor="ctr">
+            <a:noAutofit/>
+          </a:bodyPr>
+          <a:lstStyle/>
+          <a:p>
+            <a:pPr algn="l">
+              <a:buNone/>
+            </a:pPr>
+            <a:r>
+              <a:rPr lang="zh-TW" sz="1000" b="0">
+                <a:solidFill>
+                  <a:srgbClr val="333333"/>
+                </a:solidFill>
+                <a:latin typeface="+mn-lt"/>
+                <a:ea typeface="+mn-ea"/>
+              </a:rPr>
+              <a:t>無陰影・外框 / Plain Outline</a:t>
+            </a:r>
+            <a:endParaRPr lang="zh-TW"/>
+          </a:p>
+        </p:txBody>
+      </p:sp>
+      <p:sp>
+        <p:nvSpPr>
+          <p:cNvPr id="36" name="Native style row 4 tx1"/>
+          <p:cNvSpPr/>
+          <p:nvPr/>
+        </p:nvSpPr>
+        <p:spPr>
+          <a:xfrm>
+            <a:off x="1691640" y="4270248"/>
+            <a:ext cx="1298448" cy="530352"/>
+          </a:xfrm>
+          <a:prstGeom prst="roundRect">
+            <a:avLst>
+              <a:gd name="adj" fmla="val 17241"/>
+            </a:avLst>
+          </a:prstGeom>
+        </p:spPr>
+        <p:style>
+          <a:lnRef idx="1">
+            <a:schemeClr val="tx1"/>
+          </a:lnRef>
+          <a:fillRef idx="1">
+            <a:schemeClr val="lt1"/>
+          </a:fillRef>
+          <a:effectRef idx="0">
+            <a:schemeClr val="tx1"/>
+          </a:effectRef>
+          <a:fontRef idx="minor">
+            <a:schemeClr val="dk2"/>
+          </a:fontRef>
+        </p:style>
+        <p:txBody>
+          <a:bodyPr wrap="square" lIns="45720" rIns="45720" tIns="0" bIns="0" anchor="ctr">
+            <a:noAutofit/>
+          </a:bodyPr>
+          <a:lstStyle/>
+          <a:p>
+            <a:pPr algn="ctr">
+              <a:buNone/>
+            </a:pPr>
+            <a:r>
+              <a:rPr lang="zh-TW" sz="2000" b="0">
+                <a:solidFill>
+                  <a:schemeClr val="dk2"/>
+                </a:solidFill>
+                <a:latin typeface="+mn-lt"/>
+                <a:ea typeface="+mn-ea"/>
+              </a:rPr>
+              <a:t>處理步驟</a:t>
+            </a:r>
+            <a:endParaRPr lang="zh-TW"/>
+          </a:p>
+        </p:txBody>
+      </p:sp>
+      <p:sp>
+        <p:nvSpPr>
+          <p:cNvPr id="37" name="Native style row 4 accent1"/>
+          <p:cNvSpPr/>
+          <p:nvPr/>
+        </p:nvSpPr>
+        <p:spPr>
+          <a:xfrm>
+            <a:off x="3118104" y="4270248"/>
+            <a:ext cx="1298448" cy="530352"/>
+          </a:xfrm>
+          <a:prstGeom prst="roundRect">
+            <a:avLst>
+              <a:gd name="adj" fmla="val 17241"/>
+            </a:avLst>
+          </a:prstGeom>
+        </p:spPr>
+        <p:style>
+          <a:lnRef idx="1">
+            <a:schemeClr val="accent1"/>
+          </a:lnRef>
+          <a:fillRef idx="1">
+            <a:schemeClr val="lt1"/>
+          </a:fillRef>
+          <a:effectRef idx="0">
+            <a:schemeClr val="accent1"/>
+          </a:effectRef>
+          <a:fontRef idx="minor">
+            <a:schemeClr val="dk2"/>
+          </a:fontRef>
+        </p:style>
+        <p:txBody>
+          <a:bodyPr wrap="square" lIns="45720" rIns="45720" tIns="0" bIns="0" anchor="ctr">
+            <a:noAutofit/>
+          </a:bodyPr>
+          <a:lstStyle/>
+          <a:p>
+            <a:pPr algn="ctr">
+              <a:buNone/>
+            </a:pPr>
+            <a:r>
+              <a:rPr lang="zh-TW" sz="2000" b="0">
+                <a:solidFill>
+                  <a:schemeClr val="dk2"/>
+                </a:solidFill>
+                <a:latin typeface="+mn-lt"/>
+                <a:ea typeface="+mn-ea"/>
+              </a:rPr>
+              <a:t>處理步驟</a:t>
+            </a:r>
+            <a:endParaRPr lang="zh-TW"/>
+          </a:p>
+        </p:txBody>
+      </p:sp>
+      <p:sp>
+        <p:nvSpPr>
+          <p:cNvPr id="38" name="Native style row 4 accent2"/>
+          <p:cNvSpPr/>
+          <p:nvPr/>
+        </p:nvSpPr>
+        <p:spPr>
+          <a:xfrm>
+            <a:off x="4544568" y="4270248"/>
+            <a:ext cx="1298448" cy="530352"/>
+          </a:xfrm>
+          <a:prstGeom prst="roundRect">
+            <a:avLst>
+              <a:gd name="adj" fmla="val 17241"/>
+            </a:avLst>
+          </a:prstGeom>
+        </p:spPr>
+        <p:style>
+          <a:lnRef idx="1">
+            <a:schemeClr val="accent2"/>
+          </a:lnRef>
+          <a:fillRef idx="1">
+            <a:schemeClr val="lt1"/>
+          </a:fillRef>
+          <a:effectRef idx="0">
+            <a:schemeClr val="accent2"/>
+          </a:effectRef>
+          <a:fontRef idx="minor">
+            <a:schemeClr val="dk2"/>
+          </a:fontRef>
+        </p:style>
+        <p:txBody>
+          <a:bodyPr wrap="square" lIns="45720" rIns="45720" tIns="0" bIns="0" anchor="ctr">
+            <a:noAutofit/>
+          </a:bodyPr>
+          <a:lstStyle/>
+          <a:p>
+            <a:pPr algn="ctr">
+              <a:buNone/>
+            </a:pPr>
+            <a:r>
+              <a:rPr lang="zh-TW" sz="2000" b="0">
+                <a:solidFill>
+                  <a:schemeClr val="dk2"/>
+                </a:solidFill>
+                <a:latin typeface="+mn-lt"/>
+                <a:ea typeface="+mn-ea"/>
+              </a:rPr>
+              <a:t>處理步驟</a:t>
+            </a:r>
+            <a:endParaRPr lang="zh-TW"/>
+          </a:p>
+        </p:txBody>
+      </p:sp>
+      <p:sp>
+        <p:nvSpPr>
+          <p:cNvPr id="39" name="Native style row 4 accent3"/>
+          <p:cNvSpPr/>
+          <p:nvPr/>
+        </p:nvSpPr>
+        <p:spPr>
+          <a:xfrm>
+            <a:off x="5971032" y="4270248"/>
+            <a:ext cx="1298448" cy="530352"/>
+          </a:xfrm>
+          <a:prstGeom prst="roundRect">
+            <a:avLst>
+              <a:gd name="adj" fmla="val 17241"/>
+            </a:avLst>
+          </a:prstGeom>
+        </p:spPr>
+        <p:style>
+          <a:lnRef idx="1">
+            <a:schemeClr val="accent3"/>
+          </a:lnRef>
+          <a:fillRef idx="1">
+            <a:schemeClr val="lt1"/>
+          </a:fillRef>
+          <a:effectRef idx="0">
+            <a:schemeClr val="accent3"/>
+          </a:effectRef>
+          <a:fontRef idx="minor">
+            <a:schemeClr val="dk2"/>
+          </a:fontRef>
+        </p:style>
+        <p:txBody>
+          <a:bodyPr wrap="square" lIns="45720" rIns="45720" tIns="0" bIns="0" anchor="ctr">
+            <a:noAutofit/>
+          </a:bodyPr>
+          <a:lstStyle/>
+          <a:p>
+            <a:pPr algn="ctr">
+              <a:buNone/>
+            </a:pPr>
+            <a:r>
+              <a:rPr lang="zh-TW" sz="2000" b="0">
+                <a:solidFill>
+                  <a:schemeClr val="dk2"/>
+                </a:solidFill>
+                <a:latin typeface="+mn-lt"/>
+                <a:ea typeface="+mn-ea"/>
+              </a:rPr>
+              <a:t>處理步驟</a:t>
+            </a:r>
+            <a:endParaRPr lang="zh-TW"/>
+          </a:p>
+        </p:txBody>
+      </p:sp>
+      <p:sp>
+        <p:nvSpPr>
+          <p:cNvPr id="40" name="Native style row 4 accent4"/>
+          <p:cNvSpPr/>
+          <p:nvPr/>
+        </p:nvSpPr>
+        <p:spPr>
+          <a:xfrm>
+            <a:off x="7397496" y="4270248"/>
+            <a:ext cx="1298448" cy="530352"/>
+          </a:xfrm>
+          <a:prstGeom prst="roundRect">
+            <a:avLst>
+              <a:gd name="adj" fmla="val 17241"/>
+            </a:avLst>
+          </a:prstGeom>
+        </p:spPr>
+        <p:style>
+          <a:lnRef idx="1">
+            <a:schemeClr val="accent4"/>
+          </a:lnRef>
+          <a:fillRef idx="1">
+            <a:schemeClr val="lt1"/>
+          </a:fillRef>
+          <a:effectRef idx="0">
+            <a:schemeClr val="accent4"/>
+          </a:effectRef>
+          <a:fontRef idx="minor">
+            <a:schemeClr val="dk2"/>
+          </a:fontRef>
+        </p:style>
+        <p:txBody>
+          <a:bodyPr wrap="square" lIns="45720" rIns="45720" tIns="0" bIns="0" anchor="ctr">
+            <a:noAutofit/>
+          </a:bodyPr>
+          <a:lstStyle/>
+          <a:p>
+            <a:pPr algn="ctr">
+              <a:buNone/>
+            </a:pPr>
+            <a:r>
+              <a:rPr lang="zh-TW" sz="2000" b="0">
+                <a:solidFill>
+                  <a:schemeClr val="dk2"/>
+                </a:solidFill>
+                <a:latin typeface="+mn-lt"/>
+                <a:ea typeface="+mn-ea"/>
+              </a:rPr>
+              <a:t>處理步驟</a:t>
+            </a:r>
+            <a:endParaRPr lang="zh-TW"/>
+          </a:p>
+        </p:txBody>
+      </p:sp>
+      <p:sp>
+        <p:nvSpPr>
+          <p:cNvPr id="41" name="Native style row 4 accent5"/>
+          <p:cNvSpPr/>
+          <p:nvPr/>
+        </p:nvSpPr>
+        <p:spPr>
+          <a:xfrm>
+            <a:off x="8823960" y="4270248"/>
+            <a:ext cx="1298448" cy="530352"/>
+          </a:xfrm>
+          <a:prstGeom prst="roundRect">
+            <a:avLst>
+              <a:gd name="adj" fmla="val 17241"/>
+            </a:avLst>
+          </a:prstGeom>
+        </p:spPr>
+        <p:style>
+          <a:lnRef idx="1">
+            <a:schemeClr val="accent5"/>
+          </a:lnRef>
+          <a:fillRef idx="1">
+            <a:schemeClr val="lt1"/>
+          </a:fillRef>
+          <a:effectRef idx="0">
+            <a:schemeClr val="accent5"/>
+          </a:effectRef>
+          <a:fontRef idx="minor">
+            <a:schemeClr val="dk2"/>
+          </a:fontRef>
+        </p:style>
+        <p:txBody>
+          <a:bodyPr wrap="square" lIns="45720" rIns="45720" tIns="0" bIns="0" anchor="ctr">
+            <a:noAutofit/>
+          </a:bodyPr>
+          <a:lstStyle/>
+          <a:p>
+            <a:pPr algn="ctr">
+              <a:buNone/>
+            </a:pPr>
+            <a:r>
+              <a:rPr lang="zh-TW" sz="2000" b="0">
+                <a:solidFill>
+                  <a:schemeClr val="dk2"/>
+                </a:solidFill>
+                <a:latin typeface="+mn-lt"/>
+                <a:ea typeface="+mn-ea"/>
+              </a:rPr>
+              <a:t>處理步驟</a:t>
+            </a:r>
+            <a:endParaRPr lang="zh-TW"/>
+          </a:p>
+        </p:txBody>
+      </p:sp>
+      <p:sp>
+        <p:nvSpPr>
+          <p:cNvPr id="42" name="Native style row 4 accent6"/>
+          <p:cNvSpPr/>
+          <p:nvPr/>
+        </p:nvSpPr>
+        <p:spPr>
+          <a:xfrm>
+            <a:off x="10250424" y="4270248"/>
+            <a:ext cx="1298448" cy="530352"/>
+          </a:xfrm>
+          <a:prstGeom prst="roundRect">
+            <a:avLst>
+              <a:gd name="adj" fmla="val 17241"/>
+            </a:avLst>
+          </a:prstGeom>
+        </p:spPr>
+        <p:style>
+          <a:lnRef idx="1">
+            <a:schemeClr val="accent6"/>
+          </a:lnRef>
+          <a:fillRef idx="1">
+            <a:schemeClr val="lt1"/>
+          </a:fillRef>
+          <a:effectRef idx="0">
+            <a:schemeClr val="accent6"/>
+          </a:effectRef>
+          <a:fontRef idx="minor">
+            <a:schemeClr val="dk2"/>
+          </a:fontRef>
+        </p:style>
+        <p:txBody>
+          <a:bodyPr wrap="square" lIns="45720" rIns="45720" tIns="0" bIns="0" anchor="ctr">
+            <a:noAutofit/>
+          </a:bodyPr>
+          <a:lstStyle/>
+          <a:p>
+            <a:pPr algn="ctr">
+              <a:buNone/>
+            </a:pPr>
+            <a:r>
+              <a:rPr lang="zh-TW" sz="2000" b="0">
+                <a:solidFill>
+                  <a:schemeClr val="dk2"/>
+                </a:solidFill>
+                <a:latin typeface="+mn-lt"/>
+                <a:ea typeface="+mn-ea"/>
+              </a:rPr>
+              <a:t>處理步驟</a:t>
+            </a:r>
+            <a:endParaRPr lang="zh-TW"/>
+          </a:p>
+        </p:txBody>
+      </p:sp>
+      <p:sp>
+        <p:nvSpPr>
+          <p:cNvPr id="43" name="Effect label 4"/>
+          <p:cNvSpPr/>
+          <p:nvPr/>
+        </p:nvSpPr>
+        <p:spPr>
+          <a:xfrm>
+            <a:off x="365760" y="5148072"/>
+            <a:ext cx="1280160" cy="530352"/>
+          </a:xfrm>
+          <a:prstGeom prst="rect">
+            <a:avLst/>
+          </a:prstGeom>
+          <a:noFill/>
+          <a:ln>
+            <a:noFill/>
+          </a:ln>
+        </p:spPr>
+        <p:txBody>
+          <a:bodyPr wrap="square" lIns="45720" rIns="45720" tIns="0" bIns="0" anchor="ctr">
+            <a:noAutofit/>
+          </a:bodyPr>
+          <a:lstStyle/>
+          <a:p>
+            <a:pPr algn="l">
+              <a:buNone/>
+            </a:pPr>
+            <a:r>
+              <a:rPr lang="zh-TW" sz="1000" b="0">
+                <a:solidFill>
+                  <a:srgbClr val="333333"/>
+                </a:solidFill>
+                <a:latin typeface="+mn-lt"/>
+                <a:ea typeface="+mn-ea"/>
+              </a:rPr>
+              <a:t>淺主色底 / Light Color</a:t>
+            </a:r>
+            <a:endParaRPr lang="zh-TW"/>
+          </a:p>
+        </p:txBody>
+      </p:sp>
+      <p:sp>
+        <p:nvSpPr>
+          <p:cNvPr id="44" name="Native style row 5 tx1"/>
+          <p:cNvSpPr/>
+          <p:nvPr/>
+        </p:nvSpPr>
+        <p:spPr>
+          <a:xfrm>
+            <a:off x="1691640" y="5129784"/>
+            <a:ext cx="1298448" cy="530352"/>
+          </a:xfrm>
+          <a:prstGeom prst="roundRect">
+            <a:avLst>
+              <a:gd name="adj" fmla="val 17241"/>
+            </a:avLst>
+          </a:prstGeom>
+          <a:ln>
+            <a:noFill/>
+          </a:ln>
+        </p:spPr>
+        <p:style>
+          <a:lnRef idx="0">
+            <a:schemeClr val="tx1"/>
+          </a:lnRef>
+          <a:fillRef idx="2">
             <a:schemeClr val="tx1"/>
           </a:fillRef>
           <a:effectRef idx="0">
@@ -3977,40 +5566,44 @@
               <a:buNone/>
             </a:pPr>
             <a:r>
-              <a:rPr lang="zh-TW" sz="2000" b="1">
+              <a:rPr lang="zh-TW" sz="2000" b="0">
                 <a:solidFill>
                   <a:schemeClr val="tx1"/>
                 </a:solidFill>
                 <a:latin typeface="+mn-lt"/>
                 <a:ea typeface="+mn-ea"/>
               </a:rPr>
-              <a:t>Abc</a:t>
-            </a:r>
-            <a:endParaRPr lang="zh-TW"/>
-          </a:p>
-        </p:txBody>
-      </p:sp>
-      <p:sp>
-        <p:nvSpPr>
-          <p:cNvPr id="13" name="Native style row 1 accent1"/>
-          <p:cNvSpPr/>
-          <p:nvPr/>
-        </p:nvSpPr>
-        <p:spPr>
-          <a:xfrm>
-            <a:off x="3118104" y="1691640"/>
+              <a:t>處理步驟</a:t>
+            </a:r>
+            <a:endParaRPr lang="zh-TW"/>
+          </a:p>
+        </p:txBody>
+      </p:sp>
+      <p:sp>
+        <p:nvSpPr>
+          <p:cNvPr id="45" name="Native style row 5 accent1"/>
+          <p:cNvSpPr/>
+          <p:nvPr/>
+        </p:nvSpPr>
+        <p:spPr>
+          <a:xfrm>
+            <a:off x="3118104" y="5129784"/>
             <a:ext cx="1298448" cy="530352"/>
           </a:xfrm>
-          <a:prstGeom prst="rect">
-            <a:avLst/>
-          </a:prstGeom>
-          <a:noFill/>
+          <a:prstGeom prst="roundRect">
+            <a:avLst>
+              <a:gd name="adj" fmla="val 17241"/>
+            </a:avLst>
+          </a:prstGeom>
+          <a:ln>
+            <a:noFill/>
+          </a:ln>
         </p:spPr>
         <p:style>
-          <a:lnRef idx="1">
+          <a:lnRef idx="0">
             <a:schemeClr val="accent1"/>
           </a:lnRef>
-          <a:fillRef idx="0">
+          <a:fillRef idx="2">
             <a:schemeClr val="accent1"/>
           </a:fillRef>
           <a:effectRef idx="0">
@@ -4030,22 +5623,937 @@
               <a:buNone/>
             </a:pPr>
             <a:r>
-              <a:rPr lang="zh-TW" sz="2000" b="1">
+              <a:rPr lang="zh-TW" sz="2000" b="0">
                 <a:solidFill>
                   <a:schemeClr val="accent1"/>
                 </a:solidFill>
                 <a:latin typeface="+mn-lt"/>
                 <a:ea typeface="+mn-ea"/>
               </a:rPr>
-              <a:t>Abc</a:t>
-            </a:r>
-            <a:endParaRPr lang="zh-TW"/>
-          </a:p>
-        </p:txBody>
-      </p:sp>
-      <p:sp>
-        <p:nvSpPr>
-          <p:cNvPr id="14" name="Native style row 1 accent2"/>
+              <a:t>處理步驟</a:t>
+            </a:r>
+            <a:endParaRPr lang="zh-TW"/>
+          </a:p>
+        </p:txBody>
+      </p:sp>
+      <p:sp>
+        <p:nvSpPr>
+          <p:cNvPr id="46" name="Native style row 5 accent2"/>
+          <p:cNvSpPr/>
+          <p:nvPr/>
+        </p:nvSpPr>
+        <p:spPr>
+          <a:xfrm>
+            <a:off x="4544568" y="5129784"/>
+            <a:ext cx="1298448" cy="530352"/>
+          </a:xfrm>
+          <a:prstGeom prst="roundRect">
+            <a:avLst>
+              <a:gd name="adj" fmla="val 17241"/>
+            </a:avLst>
+          </a:prstGeom>
+          <a:ln>
+            <a:noFill/>
+          </a:ln>
+        </p:spPr>
+        <p:style>
+          <a:lnRef idx="0">
+            <a:schemeClr val="accent2"/>
+          </a:lnRef>
+          <a:fillRef idx="2">
+            <a:schemeClr val="accent2"/>
+          </a:fillRef>
+          <a:effectRef idx="0">
+            <a:schemeClr val="accent2"/>
+          </a:effectRef>
+          <a:fontRef idx="minor">
+            <a:schemeClr val="accent2">
+              <a:shade val="50000"/>
+            </a:schemeClr>
+          </a:fontRef>
+        </p:style>
+        <p:txBody>
+          <a:bodyPr wrap="square" lIns="45720" rIns="45720" tIns="0" bIns="0" anchor="ctr">
+            <a:noAutofit/>
+          </a:bodyPr>
+          <a:lstStyle/>
+          <a:p>
+            <a:pPr algn="ctr">
+              <a:buNone/>
+            </a:pPr>
+            <a:r>
+              <a:rPr lang="zh-TW" sz="2000" b="0">
+                <a:solidFill>
+                  <a:schemeClr val="accent2">
+                    <a:shade val="50000"/>
+                  </a:schemeClr>
+                </a:solidFill>
+                <a:latin typeface="+mn-lt"/>
+                <a:ea typeface="+mn-ea"/>
+              </a:rPr>
+              <a:t>處理步驟</a:t>
+            </a:r>
+            <a:endParaRPr lang="zh-TW"/>
+          </a:p>
+        </p:txBody>
+      </p:sp>
+      <p:sp>
+        <p:nvSpPr>
+          <p:cNvPr id="47" name="Native style row 5 accent3"/>
+          <p:cNvSpPr/>
+          <p:nvPr/>
+        </p:nvSpPr>
+        <p:spPr>
+          <a:xfrm>
+            <a:off x="5971032" y="5129784"/>
+            <a:ext cx="1298448" cy="530352"/>
+          </a:xfrm>
+          <a:prstGeom prst="roundRect">
+            <a:avLst>
+              <a:gd name="adj" fmla="val 17241"/>
+            </a:avLst>
+          </a:prstGeom>
+          <a:ln>
+            <a:noFill/>
+          </a:ln>
+        </p:spPr>
+        <p:style>
+          <a:lnRef idx="0">
+            <a:schemeClr val="accent3"/>
+          </a:lnRef>
+          <a:fillRef idx="2">
+            <a:schemeClr val="accent3"/>
+          </a:fillRef>
+          <a:effectRef idx="0">
+            <a:schemeClr val="accent3"/>
+          </a:effectRef>
+          <a:fontRef idx="minor">
+            <a:schemeClr val="accent3"/>
+          </a:fontRef>
+        </p:style>
+        <p:txBody>
+          <a:bodyPr wrap="square" lIns="45720" rIns="45720" tIns="0" bIns="0" anchor="ctr">
+            <a:noAutofit/>
+          </a:bodyPr>
+          <a:lstStyle/>
+          <a:p>
+            <a:pPr algn="ctr">
+              <a:buNone/>
+            </a:pPr>
+            <a:r>
+              <a:rPr lang="zh-TW" sz="2000" b="0">
+                <a:solidFill>
+                  <a:schemeClr val="accent3"/>
+                </a:solidFill>
+                <a:latin typeface="+mn-lt"/>
+                <a:ea typeface="+mn-ea"/>
+              </a:rPr>
+              <a:t>處理步驟</a:t>
+            </a:r>
+            <a:endParaRPr lang="zh-TW"/>
+          </a:p>
+        </p:txBody>
+      </p:sp>
+      <p:sp>
+        <p:nvSpPr>
+          <p:cNvPr id="48" name="Native style row 5 accent4"/>
+          <p:cNvSpPr/>
+          <p:nvPr/>
+        </p:nvSpPr>
+        <p:spPr>
+          <a:xfrm>
+            <a:off x="7397496" y="5129784"/>
+            <a:ext cx="1298448" cy="530352"/>
+          </a:xfrm>
+          <a:prstGeom prst="roundRect">
+            <a:avLst>
+              <a:gd name="adj" fmla="val 17241"/>
+            </a:avLst>
+          </a:prstGeom>
+          <a:ln>
+            <a:noFill/>
+          </a:ln>
+        </p:spPr>
+        <p:style>
+          <a:lnRef idx="0">
+            <a:schemeClr val="accent4"/>
+          </a:lnRef>
+          <a:fillRef idx="2">
+            <a:schemeClr val="accent4"/>
+          </a:fillRef>
+          <a:effectRef idx="0">
+            <a:schemeClr val="accent4"/>
+          </a:effectRef>
+          <a:fontRef idx="minor">
+            <a:schemeClr val="accent4">
+              <a:shade val="60000"/>
+            </a:schemeClr>
+          </a:fontRef>
+        </p:style>
+        <p:txBody>
+          <a:bodyPr wrap="square" lIns="45720" rIns="45720" tIns="0" bIns="0" anchor="ctr">
+            <a:noAutofit/>
+          </a:bodyPr>
+          <a:lstStyle/>
+          <a:p>
+            <a:pPr algn="ctr">
+              <a:buNone/>
+            </a:pPr>
+            <a:r>
+              <a:rPr lang="zh-TW" sz="2000" b="0">
+                <a:solidFill>
+                  <a:schemeClr val="accent4">
+                    <a:shade val="60000"/>
+                  </a:schemeClr>
+                </a:solidFill>
+                <a:latin typeface="+mn-lt"/>
+                <a:ea typeface="+mn-ea"/>
+              </a:rPr>
+              <a:t>處理步驟</a:t>
+            </a:r>
+            <a:endParaRPr lang="zh-TW"/>
+          </a:p>
+        </p:txBody>
+      </p:sp>
+      <p:sp>
+        <p:nvSpPr>
+          <p:cNvPr id="49" name="Native style row 5 accent5"/>
+          <p:cNvSpPr/>
+          <p:nvPr/>
+        </p:nvSpPr>
+        <p:spPr>
+          <a:xfrm>
+            <a:off x="8823960" y="5129784"/>
+            <a:ext cx="1298448" cy="530352"/>
+          </a:xfrm>
+          <a:prstGeom prst="roundRect">
+            <a:avLst>
+              <a:gd name="adj" fmla="val 17241"/>
+            </a:avLst>
+          </a:prstGeom>
+          <a:ln>
+            <a:noFill/>
+          </a:ln>
+        </p:spPr>
+        <p:style>
+          <a:lnRef idx="0">
+            <a:schemeClr val="accent5"/>
+          </a:lnRef>
+          <a:fillRef idx="2">
+            <a:schemeClr val="accent5"/>
+          </a:fillRef>
+          <a:effectRef idx="0">
+            <a:schemeClr val="accent5"/>
+          </a:effectRef>
+          <a:fontRef idx="minor">
+            <a:schemeClr val="accent5"/>
+          </a:fontRef>
+        </p:style>
+        <p:txBody>
+          <a:bodyPr wrap="square" lIns="45720" rIns="45720" tIns="0" bIns="0" anchor="ctr">
+            <a:noAutofit/>
+          </a:bodyPr>
+          <a:lstStyle/>
+          <a:p>
+            <a:pPr algn="ctr">
+              <a:buNone/>
+            </a:pPr>
+            <a:r>
+              <a:rPr lang="zh-TW" sz="2000" b="0">
+                <a:solidFill>
+                  <a:schemeClr val="accent5"/>
+                </a:solidFill>
+                <a:latin typeface="+mn-lt"/>
+                <a:ea typeface="+mn-ea"/>
+              </a:rPr>
+              <a:t>處理步驟</a:t>
+            </a:r>
+            <a:endParaRPr lang="zh-TW"/>
+          </a:p>
+        </p:txBody>
+      </p:sp>
+      <p:sp>
+        <p:nvSpPr>
+          <p:cNvPr id="50" name="Native style row 5 accent6"/>
+          <p:cNvSpPr/>
+          <p:nvPr/>
+        </p:nvSpPr>
+        <p:spPr>
+          <a:xfrm>
+            <a:off x="10250424" y="5129784"/>
+            <a:ext cx="1298448" cy="530352"/>
+          </a:xfrm>
+          <a:prstGeom prst="roundRect">
+            <a:avLst>
+              <a:gd name="adj" fmla="val 17241"/>
+            </a:avLst>
+          </a:prstGeom>
+          <a:ln>
+            <a:noFill/>
+          </a:ln>
+        </p:spPr>
+        <p:style>
+          <a:lnRef idx="0">
+            <a:schemeClr val="accent6"/>
+          </a:lnRef>
+          <a:fillRef idx="2">
+            <a:schemeClr val="accent6"/>
+          </a:fillRef>
+          <a:effectRef idx="0">
+            <a:schemeClr val="accent6"/>
+          </a:effectRef>
+          <a:fontRef idx="minor">
+            <a:schemeClr val="accent6">
+              <a:shade val="30000"/>
+            </a:schemeClr>
+          </a:fontRef>
+        </p:style>
+        <p:txBody>
+          <a:bodyPr wrap="square" lIns="45720" rIns="45720" tIns="0" bIns="0" anchor="ctr">
+            <a:noAutofit/>
+          </a:bodyPr>
+          <a:lstStyle/>
+          <a:p>
+            <a:pPr algn="ctr">
+              <a:buNone/>
+            </a:pPr>
+            <a:r>
+              <a:rPr lang="zh-TW" sz="2000" b="0">
+                <a:solidFill>
+                  <a:schemeClr val="accent6">
+                    <a:shade val="30000"/>
+                  </a:schemeClr>
+                </a:solidFill>
+                <a:latin typeface="+mn-lt"/>
+                <a:ea typeface="+mn-ea"/>
+              </a:rPr>
+              <a:t>處理步驟</a:t>
+            </a:r>
+            <a:endParaRPr lang="zh-TW"/>
+          </a:p>
+        </p:txBody>
+      </p:sp>
+      <p:sp>
+        <p:nvSpPr>
+          <p:cNvPr id="51" name="White editable shape"/>
+          <p:cNvSpPr/>
+          <p:nvPr/>
+        </p:nvSpPr>
+        <p:spPr>
+          <a:xfrm>
+            <a:off x="411480" y="6126480"/>
+            <a:ext cx="731520" cy="292608"/>
+          </a:xfrm>
+          <a:prstGeom prst="rect">
+            <a:avLst/>
+          </a:prstGeom>
+          <a:solidFill>
+            <a:srgbClr val="FFFFFF"/>
+          </a:solidFill>
+          <a:ln w="6350">
+            <a:solidFill>
+              <a:srgbClr val="7D8795"/>
+            </a:solidFill>
+          </a:ln>
+        </p:spPr>
+      </p:sp>
+      <p:sp>
+        <p:nvSpPr>
+          <p:cNvPr id="52" name="Gallery scope"/>
+          <p:cNvSpPr/>
+          <p:nvPr/>
+        </p:nvSpPr>
+        <p:spPr>
+          <a:xfrm>
+            <a:off x="1325880" y="6016752"/>
+            <a:ext cx="10424160" cy="548640"/>
+          </a:xfrm>
+          <a:prstGeom prst="rect">
+            <a:avLst/>
+          </a:prstGeom>
+          <a:noFill/>
+          <a:ln>
+            <a:noFill/>
+          </a:ln>
+        </p:spPr>
+        <p:txBody>
+          <a:bodyPr wrap="square" lIns="45720" rIns="45720" tIns="0" bIns="0" anchor="ctr">
+            <a:noAutofit/>
+          </a:bodyPr>
+          <a:lstStyle/>
+          <a:p>
+            <a:pPr algn="l">
+              <a:buNone/>
+            </a:pPr>
+            <a:r>
+              <a:rPr lang="zh-TW" sz="1000" b="0">
+                <a:solidFill>
+                  <a:srgbClr val="333333"/>
+                </a:solidFill>
+                <a:latin typeface="+mn-lt"/>
+                <a:ea typeface="+mn-ea"/>
+              </a:rPr>
+              <a:t>白色另選 #FFFFFF，不改 Text1。兩頁共70個可編輯矩形；這10款外觀不代表 Office Ribbon 可新增10個按鈕。</a:t>
+            </a:r>
+            <a:endParaRPr lang="zh-TW"/>
+          </a:p>
+        </p:txBody>
+      </p:sp>
+    </p:spTree>
+  </p:cSld>
+  <p:clrMapOvr>
+    <a:masterClrMapping/>
+  </p:clrMapOvr>
+</p:sld>
+</file>
+
+<file path=ppt/slides/slide5.xml><?xml version="1.0" encoding="utf-8"?>
+<p:sld xmlns:a="http://schemas.openxmlformats.org/drawingml/2006/main" xmlns:p="http://schemas.openxmlformats.org/presentationml/2006/main" xmlns:r="http://schemas.openxmlformats.org/officeDocument/2006/relationships" showMasterSp="0">
+  <p:cSld>
+    <p:spTree>
+      <p:nvGrpSpPr>
+        <p:cNvPr id="1" name=""/>
+        <p:cNvGrpSpPr/>
+        <p:nvPr/>
+      </p:nvGrpSpPr>
+      <p:grpSpPr/>
+      <p:sp>
+        <p:nvSpPr>
+          <p:cNvPr id="2" name="Native Style Kit heading"/>
+          <p:cNvSpPr/>
+          <p:nvPr/>
+        </p:nvSpPr>
+        <p:spPr>
+          <a:xfrm>
+            <a:off x="365760" y="228600"/>
+            <a:ext cx="11430000" cy="457200"/>
+          </a:xfrm>
+          <a:prstGeom prst="rect">
+            <a:avLst/>
+          </a:prstGeom>
+          <a:noFill/>
+          <a:ln>
+            <a:noFill/>
+          </a:ln>
+        </p:spPr>
+        <p:txBody>
+          <a:bodyPr wrap="square" lIns="45720" rIns="45720" tIns="0" bIns="0" anchor="ctr">
+            <a:noAutofit/>
+          </a:bodyPr>
+          <a:lstStyle/>
+          <a:p>
+            <a:pPr algn="l">
+              <a:buNone/>
+            </a:pPr>
+            <a:r>
+              <a:rPr lang="zh-TW" sz="2400" b="1">
+                <a:solidFill>
+                  <a:schemeClr val="tx1"/>
+                </a:solidFill>
+                <a:latin typeface="+mn-lt"/>
+                <a:ea typeface="+mn-ea"/>
+              </a:rPr>
+              <a:t>主題色可編輯矩形樣式 2/2</a:t>
+            </a:r>
+            <a:endParaRPr lang="zh-TW"/>
+          </a:p>
+        </p:txBody>
+      </p:sp>
+      <p:sp>
+        <p:nvSpPr>
+          <p:cNvPr id="3" name="Native Style Kit explanation"/>
+          <p:cNvSpPr/>
+          <p:nvPr/>
+        </p:nvSpPr>
+        <p:spPr>
+          <a:xfrm>
+            <a:off x="365760" y="749808"/>
+            <a:ext cx="11430000" cy="457200"/>
+          </a:xfrm>
+          <a:prstGeom prst="rect">
+            <a:avLst/>
+          </a:prstGeom>
+          <a:noFill/>
+          <a:ln>
+            <a:noFill/>
+          </a:ln>
+        </p:spPr>
+        <p:txBody>
+          <a:bodyPr wrap="square" lIns="45720" rIns="45720" tIns="0" bIns="0" anchor="ctr">
+            <a:noAutofit/>
+          </a:bodyPr>
+          <a:lstStyle/>
+          <a:p>
+            <a:pPr algn="l">
+              <a:buNone/>
+            </a:pPr>
+            <a:r>
+              <a:rPr lang="zh-TW" sz="1100" b="0">
+                <a:solidFill>
+                  <a:srgbClr val="333333"/>
+                </a:solidFill>
+                <a:latin typeface="+mn-lt"/>
+                <a:ea typeface="+mn-ea"/>
+              </a:rPr>
+              <a:t>常用矩形：淺灰底、粗外框、深底柔影、白框柔影、主色白字無影。淺色底會加深以維持白字可讀。</a:t>
+            </a:r>
+            <a:endParaRPr lang="zh-TW"/>
+          </a:p>
+        </p:txBody>
+      </p:sp>
+      <p:sp>
+        <p:nvSpPr>
+          <p:cNvPr id="4" name="Palette slot 0"/>
+          <p:cNvSpPr/>
+          <p:nvPr/>
+        </p:nvSpPr>
+        <p:spPr>
+          <a:xfrm>
+            <a:off x="1691640" y="1261872"/>
+            <a:ext cx="1353312" cy="292608"/>
+          </a:xfrm>
+          <a:prstGeom prst="rect">
+            <a:avLst/>
+          </a:prstGeom>
+          <a:noFill/>
+          <a:ln>
+            <a:noFill/>
+          </a:ln>
+        </p:spPr>
+        <p:txBody>
+          <a:bodyPr wrap="square" lIns="45720" rIns="45720" tIns="0" bIns="0" anchor="ctr">
+            <a:noAutofit/>
+          </a:bodyPr>
+          <a:lstStyle/>
+          <a:p>
+            <a:pPr algn="l">
+              <a:buNone/>
+            </a:pPr>
+            <a:r>
+              <a:rPr lang="zh-TW" sz="900" b="0">
+                <a:solidFill>
+                  <a:srgbClr val="333333"/>
+                </a:solidFill>
+                <a:latin typeface="+mn-lt"/>
+                <a:ea typeface="+mn-ea"/>
+              </a:rPr>
+              <a:t>Text1 #000000</a:t>
+            </a:r>
+            <a:endParaRPr lang="zh-TW"/>
+          </a:p>
+        </p:txBody>
+      </p:sp>
+      <p:sp>
+        <p:nvSpPr>
+          <p:cNvPr id="5" name="Palette slot 1"/>
+          <p:cNvSpPr/>
+          <p:nvPr/>
+        </p:nvSpPr>
+        <p:spPr>
+          <a:xfrm>
+            <a:off x="3118104" y="1261872"/>
+            <a:ext cx="1353312" cy="292608"/>
+          </a:xfrm>
+          <a:prstGeom prst="rect">
+            <a:avLst/>
+          </a:prstGeom>
+          <a:noFill/>
+          <a:ln>
+            <a:noFill/>
+          </a:ln>
+        </p:spPr>
+        <p:txBody>
+          <a:bodyPr wrap="square" lIns="45720" rIns="45720" tIns="0" bIns="0" anchor="ctr">
+            <a:noAutofit/>
+          </a:bodyPr>
+          <a:lstStyle/>
+          <a:p>
+            <a:pPr algn="l">
+              <a:buNone/>
+            </a:pPr>
+            <a:r>
+              <a:rPr lang="zh-TW" sz="900" b="0">
+                <a:solidFill>
+                  <a:srgbClr val="333333"/>
+                </a:solidFill>
+                <a:latin typeface="+mn-lt"/>
+                <a:ea typeface="+mn-ea"/>
+              </a:rPr>
+              <a:t>Accent 1 #6B1E2E</a:t>
+            </a:r>
+            <a:endParaRPr lang="zh-TW"/>
+          </a:p>
+        </p:txBody>
+      </p:sp>
+      <p:sp>
+        <p:nvSpPr>
+          <p:cNvPr id="6" name="Palette slot 2"/>
+          <p:cNvSpPr/>
+          <p:nvPr/>
+        </p:nvSpPr>
+        <p:spPr>
+          <a:xfrm>
+            <a:off x="4544568" y="1261872"/>
+            <a:ext cx="1353312" cy="292608"/>
+          </a:xfrm>
+          <a:prstGeom prst="rect">
+            <a:avLst/>
+          </a:prstGeom>
+          <a:noFill/>
+          <a:ln>
+            <a:noFill/>
+          </a:ln>
+        </p:spPr>
+        <p:txBody>
+          <a:bodyPr wrap="square" lIns="45720" rIns="45720" tIns="0" bIns="0" anchor="ctr">
+            <a:noAutofit/>
+          </a:bodyPr>
+          <a:lstStyle/>
+          <a:p>
+            <a:pPr algn="l">
+              <a:buNone/>
+            </a:pPr>
+            <a:r>
+              <a:rPr lang="zh-TW" sz="900" b="0">
+                <a:solidFill>
+                  <a:srgbClr val="333333"/>
+                </a:solidFill>
+                <a:latin typeface="+mn-lt"/>
+                <a:ea typeface="+mn-ea"/>
+              </a:rPr>
+              <a:t>Accent 2 #B5894A</a:t>
+            </a:r>
+            <a:endParaRPr lang="zh-TW"/>
+          </a:p>
+        </p:txBody>
+      </p:sp>
+      <p:sp>
+        <p:nvSpPr>
+          <p:cNvPr id="7" name="Palette slot 3"/>
+          <p:cNvSpPr/>
+          <p:nvPr/>
+        </p:nvSpPr>
+        <p:spPr>
+          <a:xfrm>
+            <a:off x="5971032" y="1261872"/>
+            <a:ext cx="1353312" cy="292608"/>
+          </a:xfrm>
+          <a:prstGeom prst="rect">
+            <a:avLst/>
+          </a:prstGeom>
+          <a:noFill/>
+          <a:ln>
+            <a:noFill/>
+          </a:ln>
+        </p:spPr>
+        <p:txBody>
+          <a:bodyPr wrap="square" lIns="45720" rIns="45720" tIns="0" bIns="0" anchor="ctr">
+            <a:noAutofit/>
+          </a:bodyPr>
+          <a:lstStyle/>
+          <a:p>
+            <a:pPr algn="l">
+              <a:buNone/>
+            </a:pPr>
+            <a:r>
+              <a:rPr lang="zh-TW" sz="900" b="0">
+                <a:solidFill>
+                  <a:srgbClr val="333333"/>
+                </a:solidFill>
+                <a:latin typeface="+mn-lt"/>
+                <a:ea typeface="+mn-ea"/>
+              </a:rPr>
+              <a:t>Accent 3 #595959</a:t>
+            </a:r>
+            <a:endParaRPr lang="zh-TW"/>
+          </a:p>
+        </p:txBody>
+      </p:sp>
+      <p:sp>
+        <p:nvSpPr>
+          <p:cNvPr id="8" name="Palette slot 4"/>
+          <p:cNvSpPr/>
+          <p:nvPr/>
+        </p:nvSpPr>
+        <p:spPr>
+          <a:xfrm>
+            <a:off x="7397496" y="1261872"/>
+            <a:ext cx="1353312" cy="292608"/>
+          </a:xfrm>
+          <a:prstGeom prst="rect">
+            <a:avLst/>
+          </a:prstGeom>
+          <a:noFill/>
+          <a:ln>
+            <a:noFill/>
+          </a:ln>
+        </p:spPr>
+        <p:txBody>
+          <a:bodyPr wrap="square" lIns="45720" rIns="45720" tIns="0" bIns="0" anchor="ctr">
+            <a:noAutofit/>
+          </a:bodyPr>
+          <a:lstStyle/>
+          <a:p>
+            <a:pPr algn="l">
+              <a:buNone/>
+            </a:pPr>
+            <a:r>
+              <a:rPr lang="zh-TW" sz="900" b="0">
+                <a:solidFill>
+                  <a:srgbClr val="333333"/>
+                </a:solidFill>
+                <a:latin typeface="+mn-lt"/>
+                <a:ea typeface="+mn-ea"/>
+              </a:rPr>
+              <a:t>Accent 4 #A67882</a:t>
+            </a:r>
+            <a:endParaRPr lang="zh-TW"/>
+          </a:p>
+        </p:txBody>
+      </p:sp>
+      <p:sp>
+        <p:nvSpPr>
+          <p:cNvPr id="9" name="Palette slot 5"/>
+          <p:cNvSpPr/>
+          <p:nvPr/>
+        </p:nvSpPr>
+        <p:spPr>
+          <a:xfrm>
+            <a:off x="8823960" y="1261872"/>
+            <a:ext cx="1353312" cy="292608"/>
+          </a:xfrm>
+          <a:prstGeom prst="rect">
+            <a:avLst/>
+          </a:prstGeom>
+          <a:noFill/>
+          <a:ln>
+            <a:noFill/>
+          </a:ln>
+        </p:spPr>
+        <p:txBody>
+          <a:bodyPr wrap="square" lIns="45720" rIns="45720" tIns="0" bIns="0" anchor="ctr">
+            <a:noAutofit/>
+          </a:bodyPr>
+          <a:lstStyle/>
+          <a:p>
+            <a:pPr algn="l">
+              <a:buNone/>
+            </a:pPr>
+            <a:r>
+              <a:rPr lang="zh-TW" sz="900" b="0">
+                <a:solidFill>
+                  <a:srgbClr val="333333"/>
+                </a:solidFill>
+                <a:latin typeface="+mn-lt"/>
+                <a:ea typeface="+mn-ea"/>
+              </a:rPr>
+              <a:t>Accent 5 #531724</a:t>
+            </a:r>
+            <a:endParaRPr lang="zh-TW"/>
+          </a:p>
+        </p:txBody>
+      </p:sp>
+      <p:sp>
+        <p:nvSpPr>
+          <p:cNvPr id="10" name="Palette slot 6"/>
+          <p:cNvSpPr/>
+          <p:nvPr/>
+        </p:nvSpPr>
+        <p:spPr>
+          <a:xfrm>
+            <a:off x="10250424" y="1261872"/>
+            <a:ext cx="1353312" cy="292608"/>
+          </a:xfrm>
+          <a:prstGeom prst="rect">
+            <a:avLst/>
+          </a:prstGeom>
+          <a:noFill/>
+          <a:ln>
+            <a:noFill/>
+          </a:ln>
+        </p:spPr>
+        <p:txBody>
+          <a:bodyPr wrap="square" lIns="45720" rIns="45720" tIns="0" bIns="0" anchor="ctr">
+            <a:noAutofit/>
+          </a:bodyPr>
+          <a:lstStyle/>
+          <a:p>
+            <a:pPr algn="l">
+              <a:buNone/>
+            </a:pPr>
+            <a:r>
+              <a:rPr lang="zh-TW" sz="900" b="0">
+                <a:solidFill>
+                  <a:srgbClr val="333333"/>
+                </a:solidFill>
+                <a:latin typeface="+mn-lt"/>
+                <a:ea typeface="+mn-ea"/>
+              </a:rPr>
+              <a:t>Accent 6 #CFB289</a:t>
+            </a:r>
+            <a:endParaRPr lang="zh-TW"/>
+          </a:p>
+        </p:txBody>
+      </p:sp>
+      <p:sp>
+        <p:nvSpPr>
+          <p:cNvPr id="11" name="Effect label 5"/>
+          <p:cNvSpPr/>
+          <p:nvPr/>
+        </p:nvSpPr>
+        <p:spPr>
+          <a:xfrm>
+            <a:off x="365760" y="1709928"/>
+            <a:ext cx="1280160" cy="530352"/>
+          </a:xfrm>
+          <a:prstGeom prst="rect">
+            <a:avLst/>
+          </a:prstGeom>
+          <a:noFill/>
+          <a:ln>
+            <a:noFill/>
+          </a:ln>
+        </p:spPr>
+        <p:txBody>
+          <a:bodyPr wrap="square" lIns="45720" rIns="45720" tIns="0" bIns="0" anchor="ctr">
+            <a:noAutofit/>
+          </a:bodyPr>
+          <a:lstStyle/>
+          <a:p>
+            <a:pPr algn="l">
+              <a:buNone/>
+            </a:pPr>
+            <a:r>
+              <a:rPr lang="zh-TW" sz="1000" b="0">
+                <a:solidFill>
+                  <a:srgbClr val="333333"/>
+                </a:solidFill>
+                <a:latin typeface="+mn-lt"/>
+                <a:ea typeface="+mn-ea"/>
+              </a:rPr>
+              <a:t>淺灰底 / Light Gray</a:t>
+            </a:r>
+            <a:endParaRPr lang="zh-TW"/>
+          </a:p>
+        </p:txBody>
+      </p:sp>
+      <p:sp>
+        <p:nvSpPr>
+          <p:cNvPr id="12" name="Native style row 6 tx1"/>
+          <p:cNvSpPr/>
+          <p:nvPr/>
+        </p:nvSpPr>
+        <p:spPr>
+          <a:xfrm>
+            <a:off x="1691640" y="1691640"/>
+            <a:ext cx="1298448" cy="530352"/>
+          </a:xfrm>
+          <a:prstGeom prst="roundRect">
+            <a:avLst>
+              <a:gd name="adj" fmla="val 17241"/>
+            </a:avLst>
+          </a:prstGeom>
+          <a:ln>
+            <a:noFill/>
+          </a:ln>
+        </p:spPr>
+        <p:style>
+          <a:lnRef idx="0">
+            <a:schemeClr val="tx1"/>
+          </a:lnRef>
+          <a:fillRef idx="3">
+            <a:schemeClr val="tx1"/>
+          </a:fillRef>
+          <a:effectRef idx="0">
+            <a:schemeClr val="tx1"/>
+          </a:effectRef>
+          <a:fontRef idx="minor">
+            <a:schemeClr val="dk2"/>
+          </a:fontRef>
+        </p:style>
+        <p:txBody>
+          <a:bodyPr wrap="square" lIns="45720" rIns="45720" tIns="0" bIns="0" anchor="ctr">
+            <a:noAutofit/>
+          </a:bodyPr>
+          <a:lstStyle/>
+          <a:p>
+            <a:pPr algn="ctr">
+              <a:buNone/>
+            </a:pPr>
+            <a:r>
+              <a:rPr lang="zh-TW" sz="2000" b="0">
+                <a:solidFill>
+                  <a:schemeClr val="dk2"/>
+                </a:solidFill>
+                <a:latin typeface="+mn-lt"/>
+                <a:ea typeface="+mn-ea"/>
+              </a:rPr>
+              <a:t>處理步驟</a:t>
+            </a:r>
+            <a:endParaRPr lang="zh-TW"/>
+          </a:p>
+        </p:txBody>
+      </p:sp>
+      <p:sp>
+        <p:nvSpPr>
+          <p:cNvPr id="13" name="Native style row 6 accent1"/>
+          <p:cNvSpPr/>
+          <p:nvPr/>
+        </p:nvSpPr>
+        <p:spPr>
+          <a:xfrm>
+            <a:off x="3118104" y="1691640"/>
+            <a:ext cx="1298448" cy="530352"/>
+          </a:xfrm>
+          <a:prstGeom prst="roundRect">
+            <a:avLst>
+              <a:gd name="adj" fmla="val 17241"/>
+            </a:avLst>
+          </a:prstGeom>
+          <a:ln>
+            <a:noFill/>
+          </a:ln>
+        </p:spPr>
+        <p:style>
+          <a:lnRef idx="0">
+            <a:schemeClr val="accent1"/>
+          </a:lnRef>
+          <a:fillRef idx="3">
+            <a:schemeClr val="accent1"/>
+          </a:fillRef>
+          <a:effectRef idx="0">
+            <a:schemeClr val="accent1"/>
+          </a:effectRef>
+          <a:fontRef idx="minor">
+            <a:schemeClr val="dk2"/>
+          </a:fontRef>
+        </p:style>
+        <p:txBody>
+          <a:bodyPr wrap="square" lIns="45720" rIns="45720" tIns="0" bIns="0" anchor="ctr">
+            <a:noAutofit/>
+          </a:bodyPr>
+          <a:lstStyle/>
+          <a:p>
+            <a:pPr algn="ctr">
+              <a:buNone/>
+            </a:pPr>
+            <a:r>
+              <a:rPr lang="zh-TW" sz="2000" b="0">
+                <a:solidFill>
+                  <a:schemeClr val="dk2"/>
+                </a:solidFill>
+                <a:latin typeface="+mn-lt"/>
+                <a:ea typeface="+mn-ea"/>
+              </a:rPr>
+              <a:t>處理步驟</a:t>
+            </a:r>
+            <a:endParaRPr lang="zh-TW"/>
+          </a:p>
+        </p:txBody>
+      </p:sp>
+      <p:sp>
+        <p:nvSpPr>
+          <p:cNvPr id="14" name="Native style row 6 accent2"/>
           <p:cNvSpPr/>
           <p:nvPr/>
         </p:nvSpPr>
@@ -4054,17 +6562,474 @@
             <a:off x="4544568" y="1691640"/>
             <a:ext cx="1298448" cy="530352"/>
           </a:xfrm>
+          <a:prstGeom prst="roundRect">
+            <a:avLst>
+              <a:gd name="adj" fmla="val 17241"/>
+            </a:avLst>
+          </a:prstGeom>
+          <a:ln>
+            <a:noFill/>
+          </a:ln>
+        </p:spPr>
+        <p:style>
+          <a:lnRef idx="0">
+            <a:schemeClr val="accent2"/>
+          </a:lnRef>
+          <a:fillRef idx="3">
+            <a:schemeClr val="accent2"/>
+          </a:fillRef>
+          <a:effectRef idx="0">
+            <a:schemeClr val="accent2"/>
+          </a:effectRef>
+          <a:fontRef idx="minor">
+            <a:schemeClr val="dk2"/>
+          </a:fontRef>
+        </p:style>
+        <p:txBody>
+          <a:bodyPr wrap="square" lIns="45720" rIns="45720" tIns="0" bIns="0" anchor="ctr">
+            <a:noAutofit/>
+          </a:bodyPr>
+          <a:lstStyle/>
+          <a:p>
+            <a:pPr algn="ctr">
+              <a:buNone/>
+            </a:pPr>
+            <a:r>
+              <a:rPr lang="zh-TW" sz="2000" b="0">
+                <a:solidFill>
+                  <a:schemeClr val="dk2"/>
+                </a:solidFill>
+                <a:latin typeface="+mn-lt"/>
+                <a:ea typeface="+mn-ea"/>
+              </a:rPr>
+              <a:t>處理步驟</a:t>
+            </a:r>
+            <a:endParaRPr lang="zh-TW"/>
+          </a:p>
+        </p:txBody>
+      </p:sp>
+      <p:sp>
+        <p:nvSpPr>
+          <p:cNvPr id="15" name="Native style row 6 accent3"/>
+          <p:cNvSpPr/>
+          <p:nvPr/>
+        </p:nvSpPr>
+        <p:spPr>
+          <a:xfrm>
+            <a:off x="5971032" y="1691640"/>
+            <a:ext cx="1298448" cy="530352"/>
+          </a:xfrm>
+          <a:prstGeom prst="roundRect">
+            <a:avLst>
+              <a:gd name="adj" fmla="val 17241"/>
+            </a:avLst>
+          </a:prstGeom>
+          <a:ln>
+            <a:noFill/>
+          </a:ln>
+        </p:spPr>
+        <p:style>
+          <a:lnRef idx="0">
+            <a:schemeClr val="accent3"/>
+          </a:lnRef>
+          <a:fillRef idx="3">
+            <a:schemeClr val="accent3"/>
+          </a:fillRef>
+          <a:effectRef idx="0">
+            <a:schemeClr val="accent3"/>
+          </a:effectRef>
+          <a:fontRef idx="minor">
+            <a:schemeClr val="dk2"/>
+          </a:fontRef>
+        </p:style>
+        <p:txBody>
+          <a:bodyPr wrap="square" lIns="45720" rIns="45720" tIns="0" bIns="0" anchor="ctr">
+            <a:noAutofit/>
+          </a:bodyPr>
+          <a:lstStyle/>
+          <a:p>
+            <a:pPr algn="ctr">
+              <a:buNone/>
+            </a:pPr>
+            <a:r>
+              <a:rPr lang="zh-TW" sz="2000" b="0">
+                <a:solidFill>
+                  <a:schemeClr val="dk2"/>
+                </a:solidFill>
+                <a:latin typeface="+mn-lt"/>
+                <a:ea typeface="+mn-ea"/>
+              </a:rPr>
+              <a:t>處理步驟</a:t>
+            </a:r>
+            <a:endParaRPr lang="zh-TW"/>
+          </a:p>
+        </p:txBody>
+      </p:sp>
+      <p:sp>
+        <p:nvSpPr>
+          <p:cNvPr id="16" name="Native style row 6 accent4"/>
+          <p:cNvSpPr/>
+          <p:nvPr/>
+        </p:nvSpPr>
+        <p:spPr>
+          <a:xfrm>
+            <a:off x="7397496" y="1691640"/>
+            <a:ext cx="1298448" cy="530352"/>
+          </a:xfrm>
+          <a:prstGeom prst="roundRect">
+            <a:avLst>
+              <a:gd name="adj" fmla="val 17241"/>
+            </a:avLst>
+          </a:prstGeom>
+          <a:ln>
+            <a:noFill/>
+          </a:ln>
+        </p:spPr>
+        <p:style>
+          <a:lnRef idx="0">
+            <a:schemeClr val="accent4"/>
+          </a:lnRef>
+          <a:fillRef idx="3">
+            <a:schemeClr val="accent4"/>
+          </a:fillRef>
+          <a:effectRef idx="0">
+            <a:schemeClr val="accent4"/>
+          </a:effectRef>
+          <a:fontRef idx="minor">
+            <a:schemeClr val="dk2"/>
+          </a:fontRef>
+        </p:style>
+        <p:txBody>
+          <a:bodyPr wrap="square" lIns="45720" rIns="45720" tIns="0" bIns="0" anchor="ctr">
+            <a:noAutofit/>
+          </a:bodyPr>
+          <a:lstStyle/>
+          <a:p>
+            <a:pPr algn="ctr">
+              <a:buNone/>
+            </a:pPr>
+            <a:r>
+              <a:rPr lang="zh-TW" sz="2000" b="0">
+                <a:solidFill>
+                  <a:schemeClr val="dk2"/>
+                </a:solidFill>
+                <a:latin typeface="+mn-lt"/>
+                <a:ea typeface="+mn-ea"/>
+              </a:rPr>
+              <a:t>處理步驟</a:t>
+            </a:r>
+            <a:endParaRPr lang="zh-TW"/>
+          </a:p>
+        </p:txBody>
+      </p:sp>
+      <p:sp>
+        <p:nvSpPr>
+          <p:cNvPr id="17" name="Native style row 6 accent5"/>
+          <p:cNvSpPr/>
+          <p:nvPr/>
+        </p:nvSpPr>
+        <p:spPr>
+          <a:xfrm>
+            <a:off x="8823960" y="1691640"/>
+            <a:ext cx="1298448" cy="530352"/>
+          </a:xfrm>
+          <a:prstGeom prst="roundRect">
+            <a:avLst>
+              <a:gd name="adj" fmla="val 17241"/>
+            </a:avLst>
+          </a:prstGeom>
+          <a:ln>
+            <a:noFill/>
+          </a:ln>
+        </p:spPr>
+        <p:style>
+          <a:lnRef idx="0">
+            <a:schemeClr val="accent5"/>
+          </a:lnRef>
+          <a:fillRef idx="3">
+            <a:schemeClr val="accent5"/>
+          </a:fillRef>
+          <a:effectRef idx="0">
+            <a:schemeClr val="accent5"/>
+          </a:effectRef>
+          <a:fontRef idx="minor">
+            <a:schemeClr val="dk2"/>
+          </a:fontRef>
+        </p:style>
+        <p:txBody>
+          <a:bodyPr wrap="square" lIns="45720" rIns="45720" tIns="0" bIns="0" anchor="ctr">
+            <a:noAutofit/>
+          </a:bodyPr>
+          <a:lstStyle/>
+          <a:p>
+            <a:pPr algn="ctr">
+              <a:buNone/>
+            </a:pPr>
+            <a:r>
+              <a:rPr lang="zh-TW" sz="2000" b="0">
+                <a:solidFill>
+                  <a:schemeClr val="dk2"/>
+                </a:solidFill>
+                <a:latin typeface="+mn-lt"/>
+                <a:ea typeface="+mn-ea"/>
+              </a:rPr>
+              <a:t>處理步驟</a:t>
+            </a:r>
+            <a:endParaRPr lang="zh-TW"/>
+          </a:p>
+        </p:txBody>
+      </p:sp>
+      <p:sp>
+        <p:nvSpPr>
+          <p:cNvPr id="18" name="Native style row 6 accent6"/>
+          <p:cNvSpPr/>
+          <p:nvPr/>
+        </p:nvSpPr>
+        <p:spPr>
+          <a:xfrm>
+            <a:off x="10250424" y="1691640"/>
+            <a:ext cx="1298448" cy="530352"/>
+          </a:xfrm>
+          <a:prstGeom prst="roundRect">
+            <a:avLst>
+              <a:gd name="adj" fmla="val 17241"/>
+            </a:avLst>
+          </a:prstGeom>
+          <a:ln>
+            <a:noFill/>
+          </a:ln>
+        </p:spPr>
+        <p:style>
+          <a:lnRef idx="0">
+            <a:schemeClr val="accent6"/>
+          </a:lnRef>
+          <a:fillRef idx="3">
+            <a:schemeClr val="accent6"/>
+          </a:fillRef>
+          <a:effectRef idx="0">
+            <a:schemeClr val="accent6"/>
+          </a:effectRef>
+          <a:fontRef idx="minor">
+            <a:schemeClr val="dk2"/>
+          </a:fontRef>
+        </p:style>
+        <p:txBody>
+          <a:bodyPr wrap="square" lIns="45720" rIns="45720" tIns="0" bIns="0" anchor="ctr">
+            <a:noAutofit/>
+          </a:bodyPr>
+          <a:lstStyle/>
+          <a:p>
+            <a:pPr algn="ctr">
+              <a:buNone/>
+            </a:pPr>
+            <a:r>
+              <a:rPr lang="zh-TW" sz="2000" b="0">
+                <a:solidFill>
+                  <a:schemeClr val="dk2"/>
+                </a:solidFill>
+                <a:latin typeface="+mn-lt"/>
+                <a:ea typeface="+mn-ea"/>
+              </a:rPr>
+              <a:t>處理步驟</a:t>
+            </a:r>
+            <a:endParaRPr lang="zh-TW"/>
+          </a:p>
+        </p:txBody>
+      </p:sp>
+      <p:sp>
+        <p:nvSpPr>
+          <p:cNvPr id="19" name="Effect label 6"/>
+          <p:cNvSpPr/>
+          <p:nvPr/>
+        </p:nvSpPr>
+        <p:spPr>
+          <a:xfrm>
+            <a:off x="365760" y="2569464"/>
+            <a:ext cx="1280160" cy="530352"/>
+          </a:xfrm>
           <a:prstGeom prst="rect">
             <a:avLst/>
           </a:prstGeom>
           <a:noFill/>
+          <a:ln>
+            <a:noFill/>
+          </a:ln>
+        </p:spPr>
+        <p:txBody>
+          <a:bodyPr wrap="square" lIns="45720" rIns="45720" tIns="0" bIns="0" anchor="ctr">
+            <a:noAutofit/>
+          </a:bodyPr>
+          <a:lstStyle/>
+          <a:p>
+            <a:pPr algn="l">
+              <a:buNone/>
+            </a:pPr>
+            <a:r>
+              <a:rPr lang="zh-TW" sz="1000" b="0">
+                <a:solidFill>
+                  <a:srgbClr val="333333"/>
+                </a:solidFill>
+                <a:latin typeface="+mn-lt"/>
+                <a:ea typeface="+mn-ea"/>
+              </a:rPr>
+              <a:t>主色粗外框 / Bold Color Outline</a:t>
+            </a:r>
+            <a:endParaRPr lang="zh-TW"/>
+          </a:p>
+        </p:txBody>
+      </p:sp>
+      <p:sp>
+        <p:nvSpPr>
+          <p:cNvPr id="20" name="Native style row 7 tx1"/>
+          <p:cNvSpPr/>
+          <p:nvPr/>
+        </p:nvSpPr>
+        <p:spPr>
+          <a:xfrm>
+            <a:off x="1691640" y="2551176"/>
+            <a:ext cx="1298448" cy="530352"/>
+          </a:xfrm>
+          <a:prstGeom prst="roundRect">
+            <a:avLst>
+              <a:gd name="adj" fmla="val 17241"/>
+            </a:avLst>
+          </a:prstGeom>
+          <a:ln w="28575" cap="flat" cmpd="sng" algn="ctr">
+            <a:solidFill>
+              <a:schemeClr val="tx1"/>
+            </a:solidFill>
+            <a:prstDash val="solid"/>
+            <a:round/>
+          </a:ln>
         </p:spPr>
         <p:style>
-          <a:lnRef idx="1">
+          <a:lnRef idx="3">
+            <a:schemeClr val="tx1"/>
+          </a:lnRef>
+          <a:fillRef idx="1">
+            <a:schemeClr val="lt1"/>
+          </a:fillRef>
+          <a:effectRef idx="0">
+            <a:schemeClr val="tx1"/>
+          </a:effectRef>
+          <a:fontRef idx="minor">
+            <a:schemeClr val="tx1"/>
+          </a:fontRef>
+        </p:style>
+        <p:txBody>
+          <a:bodyPr wrap="square" lIns="45720" rIns="45720" tIns="0" bIns="0" anchor="ctr">
+            <a:noAutofit/>
+          </a:bodyPr>
+          <a:lstStyle/>
+          <a:p>
+            <a:pPr algn="ctr">
+              <a:buNone/>
+            </a:pPr>
+            <a:r>
+              <a:rPr lang="zh-TW" sz="2000" b="1">
+                <a:solidFill>
+                  <a:schemeClr val="tx1"/>
+                </a:solidFill>
+                <a:latin typeface="+mn-lt"/>
+                <a:ea typeface="+mn-ea"/>
+              </a:rPr>
+              <a:t>處理步驟</a:t>
+            </a:r>
+            <a:endParaRPr lang="zh-TW"/>
+          </a:p>
+        </p:txBody>
+      </p:sp>
+      <p:sp>
+        <p:nvSpPr>
+          <p:cNvPr id="21" name="Native style row 7 accent1"/>
+          <p:cNvSpPr/>
+          <p:nvPr/>
+        </p:nvSpPr>
+        <p:spPr>
+          <a:xfrm>
+            <a:off x="3118104" y="2551176"/>
+            <a:ext cx="1298448" cy="530352"/>
+          </a:xfrm>
+          <a:prstGeom prst="roundRect">
+            <a:avLst>
+              <a:gd name="adj" fmla="val 17241"/>
+            </a:avLst>
+          </a:prstGeom>
+          <a:ln w="28575" cap="flat" cmpd="sng" algn="ctr">
+            <a:solidFill>
+              <a:schemeClr val="accent1"/>
+            </a:solidFill>
+            <a:prstDash val="solid"/>
+            <a:round/>
+          </a:ln>
+        </p:spPr>
+        <p:style>
+          <a:lnRef idx="3">
+            <a:schemeClr val="accent1"/>
+          </a:lnRef>
+          <a:fillRef idx="1">
+            <a:schemeClr val="lt1"/>
+          </a:fillRef>
+          <a:effectRef idx="0">
+            <a:schemeClr val="accent1"/>
+          </a:effectRef>
+          <a:fontRef idx="minor">
+            <a:schemeClr val="accent1"/>
+          </a:fontRef>
+        </p:style>
+        <p:txBody>
+          <a:bodyPr wrap="square" lIns="45720" rIns="45720" tIns="0" bIns="0" anchor="ctr">
+            <a:noAutofit/>
+          </a:bodyPr>
+          <a:lstStyle/>
+          <a:p>
+            <a:pPr algn="ctr">
+              <a:buNone/>
+            </a:pPr>
+            <a:r>
+              <a:rPr lang="zh-TW" sz="2000" b="1">
+                <a:solidFill>
+                  <a:schemeClr val="accent1"/>
+                </a:solidFill>
+                <a:latin typeface="+mn-lt"/>
+                <a:ea typeface="+mn-ea"/>
+              </a:rPr>
+              <a:t>處理步驟</a:t>
+            </a:r>
+            <a:endParaRPr lang="zh-TW"/>
+          </a:p>
+        </p:txBody>
+      </p:sp>
+      <p:sp>
+        <p:nvSpPr>
+          <p:cNvPr id="22" name="Native style row 7 accent2"/>
+          <p:cNvSpPr/>
+          <p:nvPr/>
+        </p:nvSpPr>
+        <p:spPr>
+          <a:xfrm>
+            <a:off x="4544568" y="2551176"/>
+            <a:ext cx="1298448" cy="530352"/>
+          </a:xfrm>
+          <a:prstGeom prst="roundRect">
+            <a:avLst>
+              <a:gd name="adj" fmla="val 17241"/>
+            </a:avLst>
+          </a:prstGeom>
+          <a:ln w="28575" cap="flat" cmpd="sng" algn="ctr">
+            <a:solidFill>
+              <a:schemeClr val="accent2"/>
+            </a:solidFill>
+            <a:prstDash val="solid"/>
+            <a:round/>
+          </a:ln>
+        </p:spPr>
+        <p:style>
+          <a:lnRef idx="3">
             <a:schemeClr val="accent2"/>
           </a:lnRef>
-          <a:fillRef idx="0">
-            <a:schemeClr val="accent2"/>
+          <a:fillRef idx="1">
+            <a:schemeClr val="lt1"/>
           </a:fillRef>
           <a:effectRef idx="0">
             <a:schemeClr val="accent2"/>
@@ -4094,34 +7059,42 @@
                 <a:latin typeface="+mn-lt"/>
                 <a:ea typeface="+mn-ea"/>
               </a:rPr>
-              <a:t>Abc</a:t>
-            </a:r>
-            <a:endParaRPr lang="zh-TW"/>
-          </a:p>
-        </p:txBody>
-      </p:sp>
-      <p:sp>
-        <p:nvSpPr>
-          <p:cNvPr id="15" name="Native style row 1 accent3"/>
-          <p:cNvSpPr/>
-          <p:nvPr/>
-        </p:nvSpPr>
-        <p:spPr>
-          <a:xfrm>
-            <a:off x="5971032" y="1691640"/>
+              <a:t>處理步驟</a:t>
+            </a:r>
+            <a:endParaRPr lang="zh-TW"/>
+          </a:p>
+        </p:txBody>
+      </p:sp>
+      <p:sp>
+        <p:nvSpPr>
+          <p:cNvPr id="23" name="Native style row 7 accent3"/>
+          <p:cNvSpPr/>
+          <p:nvPr/>
+        </p:nvSpPr>
+        <p:spPr>
+          <a:xfrm>
+            <a:off x="5971032" y="2551176"/>
             <a:ext cx="1298448" cy="530352"/>
           </a:xfrm>
-          <a:prstGeom prst="rect">
-            <a:avLst/>
-          </a:prstGeom>
-          <a:noFill/>
+          <a:prstGeom prst="roundRect">
+            <a:avLst>
+              <a:gd name="adj" fmla="val 17241"/>
+            </a:avLst>
+          </a:prstGeom>
+          <a:ln w="28575" cap="flat" cmpd="sng" algn="ctr">
+            <a:solidFill>
+              <a:schemeClr val="accent3"/>
+            </a:solidFill>
+            <a:prstDash val="solid"/>
+            <a:round/>
+          </a:ln>
         </p:spPr>
         <p:style>
-          <a:lnRef idx="1">
+          <a:lnRef idx="3">
             <a:schemeClr val="accent3"/>
           </a:lnRef>
-          <a:fillRef idx="0">
-            <a:schemeClr val="accent3"/>
+          <a:fillRef idx="1">
+            <a:schemeClr val="lt1"/>
           </a:fillRef>
           <a:effectRef idx="0">
             <a:schemeClr val="accent3"/>
@@ -4147,34 +7120,42 @@
                 <a:latin typeface="+mn-lt"/>
                 <a:ea typeface="+mn-ea"/>
               </a:rPr>
-              <a:t>Abc</a:t>
-            </a:r>
-            <a:endParaRPr lang="zh-TW"/>
-          </a:p>
-        </p:txBody>
-      </p:sp>
-      <p:sp>
-        <p:nvSpPr>
-          <p:cNvPr id="16" name="Native style row 1 accent4"/>
-          <p:cNvSpPr/>
-          <p:nvPr/>
-        </p:nvSpPr>
-        <p:spPr>
-          <a:xfrm>
-            <a:off x="7397496" y="1691640"/>
+              <a:t>處理步驟</a:t>
+            </a:r>
+            <a:endParaRPr lang="zh-TW"/>
+          </a:p>
+        </p:txBody>
+      </p:sp>
+      <p:sp>
+        <p:nvSpPr>
+          <p:cNvPr id="24" name="Native style row 7 accent4"/>
+          <p:cNvSpPr/>
+          <p:nvPr/>
+        </p:nvSpPr>
+        <p:spPr>
+          <a:xfrm>
+            <a:off x="7397496" y="2551176"/>
             <a:ext cx="1298448" cy="530352"/>
           </a:xfrm>
-          <a:prstGeom prst="rect">
-            <a:avLst/>
-          </a:prstGeom>
-          <a:noFill/>
+          <a:prstGeom prst="roundRect">
+            <a:avLst>
+              <a:gd name="adj" fmla="val 17241"/>
+            </a:avLst>
+          </a:prstGeom>
+          <a:ln w="28575" cap="flat" cmpd="sng" algn="ctr">
+            <a:solidFill>
+              <a:schemeClr val="accent4"/>
+            </a:solidFill>
+            <a:prstDash val="solid"/>
+            <a:round/>
+          </a:ln>
         </p:spPr>
         <p:style>
-          <a:lnRef idx="1">
+          <a:lnRef idx="3">
             <a:schemeClr val="accent4"/>
           </a:lnRef>
-          <a:fillRef idx="0">
-            <a:schemeClr val="accent4"/>
+          <a:fillRef idx="1">
+            <a:schemeClr val="lt1"/>
           </a:fillRef>
           <a:effectRef idx="0">
             <a:schemeClr val="accent4"/>
@@ -4204,34 +7185,42 @@
                 <a:latin typeface="+mn-lt"/>
                 <a:ea typeface="+mn-ea"/>
               </a:rPr>
-              <a:t>Abc</a:t>
-            </a:r>
-            <a:endParaRPr lang="zh-TW"/>
-          </a:p>
-        </p:txBody>
-      </p:sp>
-      <p:sp>
-        <p:nvSpPr>
-          <p:cNvPr id="17" name="Native style row 1 accent5"/>
-          <p:cNvSpPr/>
-          <p:nvPr/>
-        </p:nvSpPr>
-        <p:spPr>
-          <a:xfrm>
-            <a:off x="8823960" y="1691640"/>
+              <a:t>處理步驟</a:t>
+            </a:r>
+            <a:endParaRPr lang="zh-TW"/>
+          </a:p>
+        </p:txBody>
+      </p:sp>
+      <p:sp>
+        <p:nvSpPr>
+          <p:cNvPr id="25" name="Native style row 7 accent5"/>
+          <p:cNvSpPr/>
+          <p:nvPr/>
+        </p:nvSpPr>
+        <p:spPr>
+          <a:xfrm>
+            <a:off x="8823960" y="2551176"/>
             <a:ext cx="1298448" cy="530352"/>
           </a:xfrm>
-          <a:prstGeom prst="rect">
-            <a:avLst/>
-          </a:prstGeom>
-          <a:noFill/>
+          <a:prstGeom prst="roundRect">
+            <a:avLst>
+              <a:gd name="adj" fmla="val 17241"/>
+            </a:avLst>
+          </a:prstGeom>
+          <a:ln w="28575" cap="flat" cmpd="sng" algn="ctr">
+            <a:solidFill>
+              <a:schemeClr val="accent5"/>
+            </a:solidFill>
+            <a:prstDash val="solid"/>
+            <a:round/>
+          </a:ln>
         </p:spPr>
         <p:style>
-          <a:lnRef idx="1">
+          <a:lnRef idx="3">
             <a:schemeClr val="accent5"/>
           </a:lnRef>
-          <a:fillRef idx="0">
-            <a:schemeClr val="accent5"/>
+          <a:fillRef idx="1">
+            <a:schemeClr val="lt1"/>
           </a:fillRef>
           <a:effectRef idx="0">
             <a:schemeClr val="accent5"/>
@@ -4257,34 +7246,42 @@
                 <a:latin typeface="+mn-lt"/>
                 <a:ea typeface="+mn-ea"/>
               </a:rPr>
-              <a:t>Abc</a:t>
-            </a:r>
-            <a:endParaRPr lang="zh-TW"/>
-          </a:p>
-        </p:txBody>
-      </p:sp>
-      <p:sp>
-        <p:nvSpPr>
-          <p:cNvPr id="18" name="Native style row 1 accent6"/>
-          <p:cNvSpPr/>
-          <p:nvPr/>
-        </p:nvSpPr>
-        <p:spPr>
-          <a:xfrm>
-            <a:off x="10250424" y="1691640"/>
+              <a:t>處理步驟</a:t>
+            </a:r>
+            <a:endParaRPr lang="zh-TW"/>
+          </a:p>
+        </p:txBody>
+      </p:sp>
+      <p:sp>
+        <p:nvSpPr>
+          <p:cNvPr id="26" name="Native style row 7 accent6"/>
+          <p:cNvSpPr/>
+          <p:nvPr/>
+        </p:nvSpPr>
+        <p:spPr>
+          <a:xfrm>
+            <a:off x="10250424" y="2551176"/>
             <a:ext cx="1298448" cy="530352"/>
           </a:xfrm>
-          <a:prstGeom prst="rect">
-            <a:avLst/>
-          </a:prstGeom>
-          <a:noFill/>
+          <a:prstGeom prst="roundRect">
+            <a:avLst>
+              <a:gd name="adj" fmla="val 17241"/>
+            </a:avLst>
+          </a:prstGeom>
+          <a:ln w="28575" cap="flat" cmpd="sng" algn="ctr">
+            <a:solidFill>
+              <a:schemeClr val="accent6"/>
+            </a:solidFill>
+            <a:prstDash val="solid"/>
+            <a:round/>
+          </a:ln>
         </p:spPr>
         <p:style>
-          <a:lnRef idx="1">
+          <a:lnRef idx="3">
             <a:schemeClr val="accent6"/>
           </a:lnRef>
-          <a:fillRef idx="0">
-            <a:schemeClr val="accent6"/>
+          <a:fillRef idx="1">
+            <a:schemeClr val="lt1"/>
           </a:fillRef>
           <a:effectRef idx="0">
             <a:schemeClr val="accent6"/>
@@ -4314,21 +7311,21 @@
                 <a:latin typeface="+mn-lt"/>
                 <a:ea typeface="+mn-ea"/>
               </a:rPr>
-              <a:t>Abc</a:t>
-            </a:r>
-            <a:endParaRPr lang="zh-TW"/>
-          </a:p>
-        </p:txBody>
-      </p:sp>
-      <p:sp>
-        <p:nvSpPr>
-          <p:cNvPr id="19" name="Effect label 1"/>
-          <p:cNvSpPr/>
-          <p:nvPr/>
-        </p:nvSpPr>
-        <p:spPr>
-          <a:xfrm>
-            <a:off x="365760" y="2404872"/>
+              <a:t>處理步驟</a:t>
+            </a:r>
+            <a:endParaRPr lang="zh-TW"/>
+          </a:p>
+        </p:txBody>
+      </p:sp>
+      <p:sp>
+        <p:nvSpPr>
+          <p:cNvPr id="27" name="Effect label 7"/>
+          <p:cNvSpPr/>
+          <p:nvPr/>
+        </p:nvSpPr>
+        <p:spPr>
+          <a:xfrm>
+            <a:off x="365760" y="3429000"/>
             <a:ext cx="1280160" cy="530352"/>
           </a:xfrm>
           <a:prstGeom prst="rect">
@@ -4356,32 +7353,973 @@
                 <a:latin typeface="+mn-lt"/>
                 <a:ea typeface="+mn-ea"/>
               </a:rPr>
-              <a:t>主色實心 / Solid Color</a:t>
-            </a:r>
-            <a:endParaRPr lang="zh-TW"/>
-          </a:p>
-        </p:txBody>
-      </p:sp>
-      <p:sp>
-        <p:nvSpPr>
-          <p:cNvPr id="20" name="Native style row 2 tx1"/>
-          <p:cNvSpPr/>
-          <p:nvPr/>
-        </p:nvSpPr>
-        <p:spPr>
-          <a:xfrm>
-            <a:off x="1691640" y="2386584"/>
+              <a:t>深底白字柔影 / Deep Fill Shadow</a:t>
+            </a:r>
+            <a:endParaRPr lang="zh-TW"/>
+          </a:p>
+        </p:txBody>
+      </p:sp>
+      <p:sp>
+        <p:nvSpPr>
+          <p:cNvPr id="28" name="Native style row 8 tx1"/>
+          <p:cNvSpPr/>
+          <p:nvPr/>
+        </p:nvSpPr>
+        <p:spPr>
+          <a:xfrm>
+            <a:off x="1691640" y="3410712"/>
             <a:ext cx="1298448" cy="530352"/>
+          </a:xfrm>
+          <a:prstGeom prst="roundRect">
+            <a:avLst>
+              <a:gd name="adj" fmla="val 17241"/>
+            </a:avLst>
+          </a:prstGeom>
+          <a:ln>
+            <a:noFill/>
+          </a:ln>
+        </p:spPr>
+        <p:style>
+          <a:lnRef idx="0">
+            <a:schemeClr val="tx1"/>
+          </a:lnRef>
+          <a:fillRef idx="1">
+            <a:schemeClr val="tx1">
+              <a:shade val="65000"/>
+            </a:schemeClr>
+          </a:fillRef>
+          <a:effectRef idx="2">
+            <a:schemeClr val="tx1"/>
+          </a:effectRef>
+          <a:fontRef idx="minor">
+            <a:schemeClr val="lt1"/>
+          </a:fontRef>
+        </p:style>
+        <p:txBody>
+          <a:bodyPr wrap="square" lIns="45720" rIns="45720" tIns="0" bIns="0" anchor="ctr">
+            <a:noAutofit/>
+          </a:bodyPr>
+          <a:lstStyle/>
+          <a:p>
+            <a:pPr algn="ctr">
+              <a:buNone/>
+            </a:pPr>
+            <a:r>
+              <a:rPr lang="zh-TW" sz="2000" b="1">
+                <a:solidFill>
+                  <a:schemeClr val="lt1"/>
+                </a:solidFill>
+                <a:latin typeface="+mn-lt"/>
+                <a:ea typeface="+mn-ea"/>
+              </a:rPr>
+              <a:t>關鍵步驟</a:t>
+            </a:r>
+            <a:endParaRPr lang="zh-TW"/>
+          </a:p>
+        </p:txBody>
+      </p:sp>
+      <p:sp>
+        <p:nvSpPr>
+          <p:cNvPr id="29" name="Native style row 8 accent1"/>
+          <p:cNvSpPr/>
+          <p:nvPr/>
+        </p:nvSpPr>
+        <p:spPr>
+          <a:xfrm>
+            <a:off x="3118104" y="3410712"/>
+            <a:ext cx="1298448" cy="530352"/>
+          </a:xfrm>
+          <a:prstGeom prst="roundRect">
+            <a:avLst>
+              <a:gd name="adj" fmla="val 17241"/>
+            </a:avLst>
+          </a:prstGeom>
+          <a:ln>
+            <a:noFill/>
+          </a:ln>
+        </p:spPr>
+        <p:style>
+          <a:lnRef idx="0">
+            <a:schemeClr val="accent1"/>
+          </a:lnRef>
+          <a:fillRef idx="1">
+            <a:schemeClr val="accent1">
+              <a:shade val="65000"/>
+            </a:schemeClr>
+          </a:fillRef>
+          <a:effectRef idx="2">
+            <a:schemeClr val="accent1"/>
+          </a:effectRef>
+          <a:fontRef idx="minor">
+            <a:schemeClr val="lt1"/>
+          </a:fontRef>
+        </p:style>
+        <p:txBody>
+          <a:bodyPr wrap="square" lIns="45720" rIns="45720" tIns="0" bIns="0" anchor="ctr">
+            <a:noAutofit/>
+          </a:bodyPr>
+          <a:lstStyle/>
+          <a:p>
+            <a:pPr algn="ctr">
+              <a:buNone/>
+            </a:pPr>
+            <a:r>
+              <a:rPr lang="zh-TW" sz="2000" b="1">
+                <a:solidFill>
+                  <a:schemeClr val="lt1"/>
+                </a:solidFill>
+                <a:latin typeface="+mn-lt"/>
+                <a:ea typeface="+mn-ea"/>
+              </a:rPr>
+              <a:t>關鍵步驟</a:t>
+            </a:r>
+            <a:endParaRPr lang="zh-TW"/>
+          </a:p>
+        </p:txBody>
+      </p:sp>
+      <p:sp>
+        <p:nvSpPr>
+          <p:cNvPr id="30" name="Native style row 8 accent2"/>
+          <p:cNvSpPr/>
+          <p:nvPr/>
+        </p:nvSpPr>
+        <p:spPr>
+          <a:xfrm>
+            <a:off x="4544568" y="3410712"/>
+            <a:ext cx="1298448" cy="530352"/>
+          </a:xfrm>
+          <a:prstGeom prst="roundRect">
+            <a:avLst>
+              <a:gd name="adj" fmla="val 17241"/>
+            </a:avLst>
+          </a:prstGeom>
+          <a:ln>
+            <a:noFill/>
+          </a:ln>
+        </p:spPr>
+        <p:style>
+          <a:lnRef idx="0">
+            <a:schemeClr val="accent2"/>
+          </a:lnRef>
+          <a:fillRef idx="1">
+            <a:schemeClr val="accent2">
+              <a:shade val="62500"/>
+            </a:schemeClr>
+          </a:fillRef>
+          <a:effectRef idx="2">
+            <a:schemeClr val="accent2"/>
+          </a:effectRef>
+          <a:fontRef idx="minor">
+            <a:schemeClr val="lt1"/>
+          </a:fontRef>
+        </p:style>
+        <p:txBody>
+          <a:bodyPr wrap="square" lIns="45720" rIns="45720" tIns="0" bIns="0" anchor="ctr">
+            <a:noAutofit/>
+          </a:bodyPr>
+          <a:lstStyle/>
+          <a:p>
+            <a:pPr algn="ctr">
+              <a:buNone/>
+            </a:pPr>
+            <a:r>
+              <a:rPr lang="zh-TW" sz="2000" b="1">
+                <a:solidFill>
+                  <a:schemeClr val="lt1"/>
+                </a:solidFill>
+                <a:latin typeface="+mn-lt"/>
+                <a:ea typeface="+mn-ea"/>
+              </a:rPr>
+              <a:t>關鍵步驟</a:t>
+            </a:r>
+            <a:endParaRPr lang="zh-TW"/>
+          </a:p>
+        </p:txBody>
+      </p:sp>
+      <p:sp>
+        <p:nvSpPr>
+          <p:cNvPr id="31" name="Native style row 8 accent3"/>
+          <p:cNvSpPr/>
+          <p:nvPr/>
+        </p:nvSpPr>
+        <p:spPr>
+          <a:xfrm>
+            <a:off x="5971032" y="3410712"/>
+            <a:ext cx="1298448" cy="530352"/>
+          </a:xfrm>
+          <a:prstGeom prst="roundRect">
+            <a:avLst>
+              <a:gd name="adj" fmla="val 17241"/>
+            </a:avLst>
+          </a:prstGeom>
+          <a:ln>
+            <a:noFill/>
+          </a:ln>
+        </p:spPr>
+        <p:style>
+          <a:lnRef idx="0">
+            <a:schemeClr val="accent3"/>
+          </a:lnRef>
+          <a:fillRef idx="1">
+            <a:schemeClr val="accent3">
+              <a:shade val="65000"/>
+            </a:schemeClr>
+          </a:fillRef>
+          <a:effectRef idx="2">
+            <a:schemeClr val="accent3"/>
+          </a:effectRef>
+          <a:fontRef idx="minor">
+            <a:schemeClr val="lt1"/>
+          </a:fontRef>
+        </p:style>
+        <p:txBody>
+          <a:bodyPr wrap="square" lIns="45720" rIns="45720" tIns="0" bIns="0" anchor="ctr">
+            <a:noAutofit/>
+          </a:bodyPr>
+          <a:lstStyle/>
+          <a:p>
+            <a:pPr algn="ctr">
+              <a:buNone/>
+            </a:pPr>
+            <a:r>
+              <a:rPr lang="zh-TW" sz="2000" b="1">
+                <a:solidFill>
+                  <a:schemeClr val="lt1"/>
+                </a:solidFill>
+                <a:latin typeface="+mn-lt"/>
+                <a:ea typeface="+mn-ea"/>
+              </a:rPr>
+              <a:t>關鍵步驟</a:t>
+            </a:r>
+            <a:endParaRPr lang="zh-TW"/>
+          </a:p>
+        </p:txBody>
+      </p:sp>
+      <p:sp>
+        <p:nvSpPr>
+          <p:cNvPr id="32" name="Native style row 8 accent4"/>
+          <p:cNvSpPr/>
+          <p:nvPr/>
+        </p:nvSpPr>
+        <p:spPr>
+          <a:xfrm>
+            <a:off x="7397496" y="3410712"/>
+            <a:ext cx="1298448" cy="530352"/>
+          </a:xfrm>
+          <a:prstGeom prst="roundRect">
+            <a:avLst>
+              <a:gd name="adj" fmla="val 17241"/>
+            </a:avLst>
+          </a:prstGeom>
+          <a:ln>
+            <a:noFill/>
+          </a:ln>
+        </p:spPr>
+        <p:style>
+          <a:lnRef idx="0">
+            <a:schemeClr val="accent4"/>
+          </a:lnRef>
+          <a:fillRef idx="1">
+            <a:schemeClr val="accent4">
+              <a:shade val="65000"/>
+            </a:schemeClr>
+          </a:fillRef>
+          <a:effectRef idx="2">
+            <a:schemeClr val="accent4"/>
+          </a:effectRef>
+          <a:fontRef idx="minor">
+            <a:schemeClr val="lt1"/>
+          </a:fontRef>
+        </p:style>
+        <p:txBody>
+          <a:bodyPr wrap="square" lIns="45720" rIns="45720" tIns="0" bIns="0" anchor="ctr">
+            <a:noAutofit/>
+          </a:bodyPr>
+          <a:lstStyle/>
+          <a:p>
+            <a:pPr algn="ctr">
+              <a:buNone/>
+            </a:pPr>
+            <a:r>
+              <a:rPr lang="zh-TW" sz="2000" b="1">
+                <a:solidFill>
+                  <a:schemeClr val="lt1"/>
+                </a:solidFill>
+                <a:latin typeface="+mn-lt"/>
+                <a:ea typeface="+mn-ea"/>
+              </a:rPr>
+              <a:t>關鍵步驟</a:t>
+            </a:r>
+            <a:endParaRPr lang="zh-TW"/>
+          </a:p>
+        </p:txBody>
+      </p:sp>
+      <p:sp>
+        <p:nvSpPr>
+          <p:cNvPr id="33" name="Native style row 8 accent5"/>
+          <p:cNvSpPr/>
+          <p:nvPr/>
+        </p:nvSpPr>
+        <p:spPr>
+          <a:xfrm>
+            <a:off x="8823960" y="3410712"/>
+            <a:ext cx="1298448" cy="530352"/>
+          </a:xfrm>
+          <a:prstGeom prst="roundRect">
+            <a:avLst>
+              <a:gd name="adj" fmla="val 17241"/>
+            </a:avLst>
+          </a:prstGeom>
+          <a:ln>
+            <a:noFill/>
+          </a:ln>
+        </p:spPr>
+        <p:style>
+          <a:lnRef idx="0">
+            <a:schemeClr val="accent5"/>
+          </a:lnRef>
+          <a:fillRef idx="1">
+            <a:schemeClr val="accent5">
+              <a:shade val="65000"/>
+            </a:schemeClr>
+          </a:fillRef>
+          <a:effectRef idx="2">
+            <a:schemeClr val="accent5"/>
+          </a:effectRef>
+          <a:fontRef idx="minor">
+            <a:schemeClr val="lt1"/>
+          </a:fontRef>
+        </p:style>
+        <p:txBody>
+          <a:bodyPr wrap="square" lIns="45720" rIns="45720" tIns="0" bIns="0" anchor="ctr">
+            <a:noAutofit/>
+          </a:bodyPr>
+          <a:lstStyle/>
+          <a:p>
+            <a:pPr algn="ctr">
+              <a:buNone/>
+            </a:pPr>
+            <a:r>
+              <a:rPr lang="zh-TW" sz="2000" b="1">
+                <a:solidFill>
+                  <a:schemeClr val="lt1"/>
+                </a:solidFill>
+                <a:latin typeface="+mn-lt"/>
+                <a:ea typeface="+mn-ea"/>
+              </a:rPr>
+              <a:t>關鍵步驟</a:t>
+            </a:r>
+            <a:endParaRPr lang="zh-TW"/>
+          </a:p>
+        </p:txBody>
+      </p:sp>
+      <p:sp>
+        <p:nvSpPr>
+          <p:cNvPr id="34" name="Native style row 8 accent6"/>
+          <p:cNvSpPr/>
+          <p:nvPr/>
+        </p:nvSpPr>
+        <p:spPr>
+          <a:xfrm>
+            <a:off x="10250424" y="3410712"/>
+            <a:ext cx="1298448" cy="530352"/>
+          </a:xfrm>
+          <a:prstGeom prst="roundRect">
+            <a:avLst>
+              <a:gd name="adj" fmla="val 17241"/>
+            </a:avLst>
+          </a:prstGeom>
+          <a:ln>
+            <a:noFill/>
+          </a:ln>
+        </p:spPr>
+        <p:style>
+          <a:lnRef idx="0">
+            <a:schemeClr val="accent6"/>
+          </a:lnRef>
+          <a:fillRef idx="1">
+            <a:schemeClr val="accent6">
+              <a:shade val="37500"/>
+            </a:schemeClr>
+          </a:fillRef>
+          <a:effectRef idx="2">
+            <a:schemeClr val="accent6"/>
+          </a:effectRef>
+          <a:fontRef idx="minor">
+            <a:schemeClr val="lt1"/>
+          </a:fontRef>
+        </p:style>
+        <p:txBody>
+          <a:bodyPr wrap="square" lIns="45720" rIns="45720" tIns="0" bIns="0" anchor="ctr">
+            <a:noAutofit/>
+          </a:bodyPr>
+          <a:lstStyle/>
+          <a:p>
+            <a:pPr algn="ctr">
+              <a:buNone/>
+            </a:pPr>
+            <a:r>
+              <a:rPr lang="zh-TW" sz="2000" b="1">
+                <a:solidFill>
+                  <a:schemeClr val="lt1"/>
+                </a:solidFill>
+                <a:latin typeface="+mn-lt"/>
+                <a:ea typeface="+mn-ea"/>
+              </a:rPr>
+              <a:t>關鍵步驟</a:t>
+            </a:r>
+            <a:endParaRPr lang="zh-TW"/>
+          </a:p>
+        </p:txBody>
+      </p:sp>
+      <p:sp>
+        <p:nvSpPr>
+          <p:cNvPr id="35" name="Effect label 8"/>
+          <p:cNvSpPr/>
+          <p:nvPr/>
+        </p:nvSpPr>
+        <p:spPr>
+          <a:xfrm>
+            <a:off x="365760" y="4288536"/>
+            <a:ext cx="1280160" cy="530352"/>
           </a:xfrm>
           <a:prstGeom prst="rect">
             <a:avLst/>
           </a:prstGeom>
+          <a:noFill/>
+          <a:ln>
+            <a:noFill/>
+          </a:ln>
+        </p:spPr>
+        <p:txBody>
+          <a:bodyPr wrap="square" lIns="45720" rIns="45720" tIns="0" bIns="0" anchor="ctr">
+            <a:noAutofit/>
+          </a:bodyPr>
+          <a:lstStyle/>
+          <a:p>
+            <a:pPr algn="l">
+              <a:buNone/>
+            </a:pPr>
+            <a:r>
+              <a:rPr lang="zh-TW" sz="1000" b="0">
+                <a:solidFill>
+                  <a:srgbClr val="333333"/>
+                </a:solidFill>
+                <a:latin typeface="+mn-lt"/>
+                <a:ea typeface="+mn-ea"/>
+              </a:rPr>
+              <a:t>深底白框柔影 / White Frame Shadow</a:t>
+            </a:r>
+            <a:endParaRPr lang="zh-TW"/>
+          </a:p>
+        </p:txBody>
+      </p:sp>
+      <p:sp>
+        <p:nvSpPr>
+          <p:cNvPr id="36" name="Native style row 9 tx1"/>
+          <p:cNvSpPr/>
+          <p:nvPr/>
+        </p:nvSpPr>
+        <p:spPr>
+          <a:xfrm>
+            <a:off x="1691640" y="4270248"/>
+            <a:ext cx="1298448" cy="530352"/>
+          </a:xfrm>
+          <a:prstGeom prst="roundRect">
+            <a:avLst>
+              <a:gd name="adj" fmla="val 17241"/>
+            </a:avLst>
+          </a:prstGeom>
+          <a:ln w="28575" cap="flat" cmpd="sng" algn="ctr">
+            <a:solidFill>
+              <a:schemeClr val="lt1"/>
+            </a:solidFill>
+            <a:prstDash val="solid"/>
+            <a:round/>
+          </a:ln>
         </p:spPr>
         <p:style>
-          <a:lnRef idx="1">
+          <a:lnRef idx="3">
+            <a:schemeClr val="tx1"/>
+          </a:lnRef>
+          <a:fillRef idx="1">
             <a:schemeClr val="tx1">
-              <a:shade val="80000"/>
+              <a:shade val="65000"/>
             </a:schemeClr>
+          </a:fillRef>
+          <a:effectRef idx="2">
+            <a:schemeClr val="tx1"/>
+          </a:effectRef>
+          <a:fontRef idx="minor">
+            <a:schemeClr val="lt1"/>
+          </a:fontRef>
+        </p:style>
+        <p:txBody>
+          <a:bodyPr wrap="square" lIns="45720" rIns="45720" tIns="0" bIns="0" anchor="ctr">
+            <a:noAutofit/>
+          </a:bodyPr>
+          <a:lstStyle/>
+          <a:p>
+            <a:pPr algn="ctr">
+              <a:buNone/>
+            </a:pPr>
+            <a:r>
+              <a:rPr lang="zh-TW" sz="2000" b="1">
+                <a:solidFill>
+                  <a:schemeClr val="lt1"/>
+                </a:solidFill>
+                <a:latin typeface="+mn-lt"/>
+                <a:ea typeface="+mn-ea"/>
+              </a:rPr>
+              <a:t>關鍵步驟</a:t>
+            </a:r>
+            <a:endParaRPr lang="zh-TW"/>
+          </a:p>
+        </p:txBody>
+      </p:sp>
+      <p:sp>
+        <p:nvSpPr>
+          <p:cNvPr id="37" name="Native style row 9 accent1"/>
+          <p:cNvSpPr/>
+          <p:nvPr/>
+        </p:nvSpPr>
+        <p:spPr>
+          <a:xfrm>
+            <a:off x="3118104" y="4270248"/>
+            <a:ext cx="1298448" cy="530352"/>
+          </a:xfrm>
+          <a:prstGeom prst="roundRect">
+            <a:avLst>
+              <a:gd name="adj" fmla="val 17241"/>
+            </a:avLst>
+          </a:prstGeom>
+          <a:ln w="28575" cap="flat" cmpd="sng" algn="ctr">
+            <a:solidFill>
+              <a:schemeClr val="lt1"/>
+            </a:solidFill>
+            <a:prstDash val="solid"/>
+            <a:round/>
+          </a:ln>
+        </p:spPr>
+        <p:style>
+          <a:lnRef idx="3">
+            <a:schemeClr val="accent1"/>
+          </a:lnRef>
+          <a:fillRef idx="1">
+            <a:schemeClr val="accent1">
+              <a:shade val="65000"/>
+            </a:schemeClr>
+          </a:fillRef>
+          <a:effectRef idx="2">
+            <a:schemeClr val="accent1"/>
+          </a:effectRef>
+          <a:fontRef idx="minor">
+            <a:schemeClr val="lt1"/>
+          </a:fontRef>
+        </p:style>
+        <p:txBody>
+          <a:bodyPr wrap="square" lIns="45720" rIns="45720" tIns="0" bIns="0" anchor="ctr">
+            <a:noAutofit/>
+          </a:bodyPr>
+          <a:lstStyle/>
+          <a:p>
+            <a:pPr algn="ctr">
+              <a:buNone/>
+            </a:pPr>
+            <a:r>
+              <a:rPr lang="zh-TW" sz="2000" b="1">
+                <a:solidFill>
+                  <a:schemeClr val="lt1"/>
+                </a:solidFill>
+                <a:latin typeface="+mn-lt"/>
+                <a:ea typeface="+mn-ea"/>
+              </a:rPr>
+              <a:t>關鍵步驟</a:t>
+            </a:r>
+            <a:endParaRPr lang="zh-TW"/>
+          </a:p>
+        </p:txBody>
+      </p:sp>
+      <p:sp>
+        <p:nvSpPr>
+          <p:cNvPr id="38" name="Native style row 9 accent2"/>
+          <p:cNvSpPr/>
+          <p:nvPr/>
+        </p:nvSpPr>
+        <p:spPr>
+          <a:xfrm>
+            <a:off x="4544568" y="4270248"/>
+            <a:ext cx="1298448" cy="530352"/>
+          </a:xfrm>
+          <a:prstGeom prst="roundRect">
+            <a:avLst>
+              <a:gd name="adj" fmla="val 17241"/>
+            </a:avLst>
+          </a:prstGeom>
+          <a:ln w="28575" cap="flat" cmpd="sng" algn="ctr">
+            <a:solidFill>
+              <a:schemeClr val="lt1"/>
+            </a:solidFill>
+            <a:prstDash val="solid"/>
+            <a:round/>
+          </a:ln>
+        </p:spPr>
+        <p:style>
+          <a:lnRef idx="3">
+            <a:schemeClr val="accent2"/>
+          </a:lnRef>
+          <a:fillRef idx="1">
+            <a:schemeClr val="accent2">
+              <a:shade val="62500"/>
+            </a:schemeClr>
+          </a:fillRef>
+          <a:effectRef idx="2">
+            <a:schemeClr val="accent2"/>
+          </a:effectRef>
+          <a:fontRef idx="minor">
+            <a:schemeClr val="lt1"/>
+          </a:fontRef>
+        </p:style>
+        <p:txBody>
+          <a:bodyPr wrap="square" lIns="45720" rIns="45720" tIns="0" bIns="0" anchor="ctr">
+            <a:noAutofit/>
+          </a:bodyPr>
+          <a:lstStyle/>
+          <a:p>
+            <a:pPr algn="ctr">
+              <a:buNone/>
+            </a:pPr>
+            <a:r>
+              <a:rPr lang="zh-TW" sz="2000" b="1">
+                <a:solidFill>
+                  <a:schemeClr val="lt1"/>
+                </a:solidFill>
+                <a:latin typeface="+mn-lt"/>
+                <a:ea typeface="+mn-ea"/>
+              </a:rPr>
+              <a:t>關鍵步驟</a:t>
+            </a:r>
+            <a:endParaRPr lang="zh-TW"/>
+          </a:p>
+        </p:txBody>
+      </p:sp>
+      <p:sp>
+        <p:nvSpPr>
+          <p:cNvPr id="39" name="Native style row 9 accent3"/>
+          <p:cNvSpPr/>
+          <p:nvPr/>
+        </p:nvSpPr>
+        <p:spPr>
+          <a:xfrm>
+            <a:off x="5971032" y="4270248"/>
+            <a:ext cx="1298448" cy="530352"/>
+          </a:xfrm>
+          <a:prstGeom prst="roundRect">
+            <a:avLst>
+              <a:gd name="adj" fmla="val 17241"/>
+            </a:avLst>
+          </a:prstGeom>
+          <a:ln w="28575" cap="flat" cmpd="sng" algn="ctr">
+            <a:solidFill>
+              <a:schemeClr val="lt1"/>
+            </a:solidFill>
+            <a:prstDash val="solid"/>
+            <a:round/>
+          </a:ln>
+        </p:spPr>
+        <p:style>
+          <a:lnRef idx="3">
+            <a:schemeClr val="accent3"/>
+          </a:lnRef>
+          <a:fillRef idx="1">
+            <a:schemeClr val="accent3">
+              <a:shade val="65000"/>
+            </a:schemeClr>
+          </a:fillRef>
+          <a:effectRef idx="2">
+            <a:schemeClr val="accent3"/>
+          </a:effectRef>
+          <a:fontRef idx="minor">
+            <a:schemeClr val="lt1"/>
+          </a:fontRef>
+        </p:style>
+        <p:txBody>
+          <a:bodyPr wrap="square" lIns="45720" rIns="45720" tIns="0" bIns="0" anchor="ctr">
+            <a:noAutofit/>
+          </a:bodyPr>
+          <a:lstStyle/>
+          <a:p>
+            <a:pPr algn="ctr">
+              <a:buNone/>
+            </a:pPr>
+            <a:r>
+              <a:rPr lang="zh-TW" sz="2000" b="1">
+                <a:solidFill>
+                  <a:schemeClr val="lt1"/>
+                </a:solidFill>
+                <a:latin typeface="+mn-lt"/>
+                <a:ea typeface="+mn-ea"/>
+              </a:rPr>
+              <a:t>關鍵步驟</a:t>
+            </a:r>
+            <a:endParaRPr lang="zh-TW"/>
+          </a:p>
+        </p:txBody>
+      </p:sp>
+      <p:sp>
+        <p:nvSpPr>
+          <p:cNvPr id="40" name="Native style row 9 accent4"/>
+          <p:cNvSpPr/>
+          <p:nvPr/>
+        </p:nvSpPr>
+        <p:spPr>
+          <a:xfrm>
+            <a:off x="7397496" y="4270248"/>
+            <a:ext cx="1298448" cy="530352"/>
+          </a:xfrm>
+          <a:prstGeom prst="roundRect">
+            <a:avLst>
+              <a:gd name="adj" fmla="val 17241"/>
+            </a:avLst>
+          </a:prstGeom>
+          <a:ln w="28575" cap="flat" cmpd="sng" algn="ctr">
+            <a:solidFill>
+              <a:schemeClr val="lt1"/>
+            </a:solidFill>
+            <a:prstDash val="solid"/>
+            <a:round/>
+          </a:ln>
+        </p:spPr>
+        <p:style>
+          <a:lnRef idx="3">
+            <a:schemeClr val="accent4"/>
+          </a:lnRef>
+          <a:fillRef idx="1">
+            <a:schemeClr val="accent4">
+              <a:shade val="65000"/>
+            </a:schemeClr>
+          </a:fillRef>
+          <a:effectRef idx="2">
+            <a:schemeClr val="accent4"/>
+          </a:effectRef>
+          <a:fontRef idx="minor">
+            <a:schemeClr val="lt1"/>
+          </a:fontRef>
+        </p:style>
+        <p:txBody>
+          <a:bodyPr wrap="square" lIns="45720" rIns="45720" tIns="0" bIns="0" anchor="ctr">
+            <a:noAutofit/>
+          </a:bodyPr>
+          <a:lstStyle/>
+          <a:p>
+            <a:pPr algn="ctr">
+              <a:buNone/>
+            </a:pPr>
+            <a:r>
+              <a:rPr lang="zh-TW" sz="2000" b="1">
+                <a:solidFill>
+                  <a:schemeClr val="lt1"/>
+                </a:solidFill>
+                <a:latin typeface="+mn-lt"/>
+                <a:ea typeface="+mn-ea"/>
+              </a:rPr>
+              <a:t>關鍵步驟</a:t>
+            </a:r>
+            <a:endParaRPr lang="zh-TW"/>
+          </a:p>
+        </p:txBody>
+      </p:sp>
+      <p:sp>
+        <p:nvSpPr>
+          <p:cNvPr id="41" name="Native style row 9 accent5"/>
+          <p:cNvSpPr/>
+          <p:nvPr/>
+        </p:nvSpPr>
+        <p:spPr>
+          <a:xfrm>
+            <a:off x="8823960" y="4270248"/>
+            <a:ext cx="1298448" cy="530352"/>
+          </a:xfrm>
+          <a:prstGeom prst="roundRect">
+            <a:avLst>
+              <a:gd name="adj" fmla="val 17241"/>
+            </a:avLst>
+          </a:prstGeom>
+          <a:ln w="28575" cap="flat" cmpd="sng" algn="ctr">
+            <a:solidFill>
+              <a:schemeClr val="lt1"/>
+            </a:solidFill>
+            <a:prstDash val="solid"/>
+            <a:round/>
+          </a:ln>
+        </p:spPr>
+        <p:style>
+          <a:lnRef idx="3">
+            <a:schemeClr val="accent5"/>
+          </a:lnRef>
+          <a:fillRef idx="1">
+            <a:schemeClr val="accent5">
+              <a:shade val="65000"/>
+            </a:schemeClr>
+          </a:fillRef>
+          <a:effectRef idx="2">
+            <a:schemeClr val="accent5"/>
+          </a:effectRef>
+          <a:fontRef idx="minor">
+            <a:schemeClr val="lt1"/>
+          </a:fontRef>
+        </p:style>
+        <p:txBody>
+          <a:bodyPr wrap="square" lIns="45720" rIns="45720" tIns="0" bIns="0" anchor="ctr">
+            <a:noAutofit/>
+          </a:bodyPr>
+          <a:lstStyle/>
+          <a:p>
+            <a:pPr algn="ctr">
+              <a:buNone/>
+            </a:pPr>
+            <a:r>
+              <a:rPr lang="zh-TW" sz="2000" b="1">
+                <a:solidFill>
+                  <a:schemeClr val="lt1"/>
+                </a:solidFill>
+                <a:latin typeface="+mn-lt"/>
+                <a:ea typeface="+mn-ea"/>
+              </a:rPr>
+              <a:t>關鍵步驟</a:t>
+            </a:r>
+            <a:endParaRPr lang="zh-TW"/>
+          </a:p>
+        </p:txBody>
+      </p:sp>
+      <p:sp>
+        <p:nvSpPr>
+          <p:cNvPr id="42" name="Native style row 9 accent6"/>
+          <p:cNvSpPr/>
+          <p:nvPr/>
+        </p:nvSpPr>
+        <p:spPr>
+          <a:xfrm>
+            <a:off x="10250424" y="4270248"/>
+            <a:ext cx="1298448" cy="530352"/>
+          </a:xfrm>
+          <a:prstGeom prst="roundRect">
+            <a:avLst>
+              <a:gd name="adj" fmla="val 17241"/>
+            </a:avLst>
+          </a:prstGeom>
+          <a:ln w="28575" cap="flat" cmpd="sng" algn="ctr">
+            <a:solidFill>
+              <a:schemeClr val="lt1"/>
+            </a:solidFill>
+            <a:prstDash val="solid"/>
+            <a:round/>
+          </a:ln>
+        </p:spPr>
+        <p:style>
+          <a:lnRef idx="3">
+            <a:schemeClr val="accent6"/>
+          </a:lnRef>
+          <a:fillRef idx="1">
+            <a:schemeClr val="accent6">
+              <a:shade val="37500"/>
+            </a:schemeClr>
+          </a:fillRef>
+          <a:effectRef idx="2">
+            <a:schemeClr val="accent6"/>
+          </a:effectRef>
+          <a:fontRef idx="minor">
+            <a:schemeClr val="lt1"/>
+          </a:fontRef>
+        </p:style>
+        <p:txBody>
+          <a:bodyPr wrap="square" lIns="45720" rIns="45720" tIns="0" bIns="0" anchor="ctr">
+            <a:noAutofit/>
+          </a:bodyPr>
+          <a:lstStyle/>
+          <a:p>
+            <a:pPr algn="ctr">
+              <a:buNone/>
+            </a:pPr>
+            <a:r>
+              <a:rPr lang="zh-TW" sz="2000" b="1">
+                <a:solidFill>
+                  <a:schemeClr val="lt1"/>
+                </a:solidFill>
+                <a:latin typeface="+mn-lt"/>
+                <a:ea typeface="+mn-ea"/>
+              </a:rPr>
+              <a:t>關鍵步驟</a:t>
+            </a:r>
+            <a:endParaRPr lang="zh-TW"/>
+          </a:p>
+        </p:txBody>
+      </p:sp>
+      <p:sp>
+        <p:nvSpPr>
+          <p:cNvPr id="43" name="Effect label 9"/>
+          <p:cNvSpPr/>
+          <p:nvPr/>
+        </p:nvSpPr>
+        <p:spPr>
+          <a:xfrm>
+            <a:off x="365760" y="5148072"/>
+            <a:ext cx="1280160" cy="530352"/>
+          </a:xfrm>
+          <a:prstGeom prst="rect">
+            <a:avLst/>
+          </a:prstGeom>
+          <a:noFill/>
+          <a:ln>
+            <a:noFill/>
+          </a:ln>
+        </p:spPr>
+        <p:txBody>
+          <a:bodyPr wrap="square" lIns="45720" rIns="45720" tIns="0" bIns="0" anchor="ctr">
+            <a:noAutofit/>
+          </a:bodyPr>
+          <a:lstStyle/>
+          <a:p>
+            <a:pPr algn="l">
+              <a:buNone/>
+            </a:pPr>
+            <a:r>
+              <a:rPr lang="zh-TW" sz="1000" b="0">
+                <a:solidFill>
+                  <a:srgbClr val="333333"/>
+                </a:solidFill>
+                <a:latin typeface="+mn-lt"/>
+                <a:ea typeface="+mn-ea"/>
+              </a:rPr>
+              <a:t>主色白字・無影 / Bright Solid</a:t>
+            </a:r>
+            <a:endParaRPr lang="zh-TW"/>
+          </a:p>
+        </p:txBody>
+      </p:sp>
+      <p:sp>
+        <p:nvSpPr>
+          <p:cNvPr id="44" name="Native style row 10 tx1"/>
+          <p:cNvSpPr/>
+          <p:nvPr/>
+        </p:nvSpPr>
+        <p:spPr>
+          <a:xfrm>
+            <a:off x="1691640" y="5129784"/>
+            <a:ext cx="1298448" cy="530352"/>
+          </a:xfrm>
+          <a:prstGeom prst="roundRect">
+            <a:avLst>
+              <a:gd name="adj" fmla="val 17241"/>
+            </a:avLst>
+          </a:prstGeom>
+          <a:ln>
+            <a:noFill/>
+          </a:ln>
+        </p:spPr>
+        <p:style>
+          <a:lnRef idx="0">
+            <a:schemeClr val="tx1"/>
           </a:lnRef>
           <a:fillRef idx="1">
             <a:schemeClr val="tx1"/>
@@ -4410,32 +8348,35 @@
                 <a:latin typeface="+mn-lt"/>
                 <a:ea typeface="+mn-ea"/>
               </a:rPr>
-              <a:t>Abc</a:t>
-            </a:r>
-            <a:endParaRPr lang="zh-TW"/>
-          </a:p>
-        </p:txBody>
-      </p:sp>
-      <p:sp>
-        <p:nvSpPr>
-          <p:cNvPr id="21" name="Native style row 2 accent1"/>
-          <p:cNvSpPr/>
-          <p:nvPr/>
-        </p:nvSpPr>
-        <p:spPr>
-          <a:xfrm>
-            <a:off x="3118104" y="2386584"/>
+              <a:t>關鍵步驟</a:t>
+            </a:r>
+            <a:endParaRPr lang="zh-TW"/>
+          </a:p>
+        </p:txBody>
+      </p:sp>
+      <p:sp>
+        <p:nvSpPr>
+          <p:cNvPr id="45" name="Native style row 10 accent1"/>
+          <p:cNvSpPr/>
+          <p:nvPr/>
+        </p:nvSpPr>
+        <p:spPr>
+          <a:xfrm>
+            <a:off x="3118104" y="5129784"/>
             <a:ext cx="1298448" cy="530352"/>
           </a:xfrm>
-          <a:prstGeom prst="rect">
-            <a:avLst/>
-          </a:prstGeom>
+          <a:prstGeom prst="roundRect">
+            <a:avLst>
+              <a:gd name="adj" fmla="val 17241"/>
+            </a:avLst>
+          </a:prstGeom>
+          <a:ln>
+            <a:noFill/>
+          </a:ln>
         </p:spPr>
         <p:style>
-          <a:lnRef idx="1">
-            <a:schemeClr val="accent1">
-              <a:shade val="80000"/>
-            </a:schemeClr>
+          <a:lnRef idx="0">
+            <a:schemeClr val="accent1"/>
           </a:lnRef>
           <a:fillRef idx="1">
             <a:schemeClr val="accent1"/>
@@ -4464,41 +8405,46 @@
                 <a:latin typeface="+mn-lt"/>
                 <a:ea typeface="+mn-ea"/>
               </a:rPr>
-              <a:t>Abc</a:t>
-            </a:r>
-            <a:endParaRPr lang="zh-TW"/>
-          </a:p>
-        </p:txBody>
-      </p:sp>
-      <p:sp>
-        <p:nvSpPr>
-          <p:cNvPr id="22" name="Native style row 2 accent2"/>
-          <p:cNvSpPr/>
-          <p:nvPr/>
-        </p:nvSpPr>
-        <p:spPr>
-          <a:xfrm>
-            <a:off x="4544568" y="2386584"/>
+              <a:t>關鍵步驟</a:t>
+            </a:r>
+            <a:endParaRPr lang="zh-TW"/>
+          </a:p>
+        </p:txBody>
+      </p:sp>
+      <p:sp>
+        <p:nvSpPr>
+          <p:cNvPr id="46" name="Native style row 10 accent2"/>
+          <p:cNvSpPr/>
+          <p:nvPr/>
+        </p:nvSpPr>
+        <p:spPr>
+          <a:xfrm>
+            <a:off x="4544568" y="5129784"/>
             <a:ext cx="1298448" cy="530352"/>
           </a:xfrm>
-          <a:prstGeom prst="rect">
-            <a:avLst/>
-          </a:prstGeom>
+          <a:prstGeom prst="roundRect">
+            <a:avLst>
+              <a:gd name="adj" fmla="val 17241"/>
+            </a:avLst>
+          </a:prstGeom>
+          <a:ln>
+            <a:noFill/>
+          </a:ln>
         </p:spPr>
         <p:style>
-          <a:lnRef idx="1">
-            <a:schemeClr val="accent2">
-              <a:shade val="80000"/>
-            </a:schemeClr>
+          <a:lnRef idx="0">
+            <a:schemeClr val="accent2"/>
           </a:lnRef>
           <a:fillRef idx="1">
-            <a:schemeClr val="accent2"/>
+            <a:schemeClr val="accent2">
+              <a:shade val="62500"/>
+            </a:schemeClr>
           </a:fillRef>
           <a:effectRef idx="0">
             <a:schemeClr val="accent2"/>
           </a:effectRef>
           <a:fontRef idx="minor">
-            <a:schemeClr val="tx1"/>
+            <a:schemeClr val="lt1"/>
           </a:fontRef>
         </p:style>
         <p:txBody>
@@ -4513,37 +8459,40 @@
             <a:r>
               <a:rPr lang="zh-TW" sz="2000" b="1">
                 <a:solidFill>
-                  <a:schemeClr val="tx1"/>
-                </a:solidFill>
-                <a:latin typeface="+mn-lt"/>
-                <a:ea typeface="+mn-ea"/>
-              </a:rPr>
-              <a:t>Abc</a:t>
-            </a:r>
-            <a:endParaRPr lang="zh-TW"/>
-          </a:p>
-        </p:txBody>
-      </p:sp>
-      <p:sp>
-        <p:nvSpPr>
-          <p:cNvPr id="23" name="Native style row 2 accent3"/>
-          <p:cNvSpPr/>
-          <p:nvPr/>
-        </p:nvSpPr>
-        <p:spPr>
-          <a:xfrm>
-            <a:off x="5971032" y="2386584"/>
+                  <a:schemeClr val="lt1"/>
+                </a:solidFill>
+                <a:latin typeface="+mn-lt"/>
+                <a:ea typeface="+mn-ea"/>
+              </a:rPr>
+              <a:t>關鍵步驟</a:t>
+            </a:r>
+            <a:endParaRPr lang="zh-TW"/>
+          </a:p>
+        </p:txBody>
+      </p:sp>
+      <p:sp>
+        <p:nvSpPr>
+          <p:cNvPr id="47" name="Native style row 10 accent3"/>
+          <p:cNvSpPr/>
+          <p:nvPr/>
+        </p:nvSpPr>
+        <p:spPr>
+          <a:xfrm>
+            <a:off x="5971032" y="5129784"/>
             <a:ext cx="1298448" cy="530352"/>
           </a:xfrm>
-          <a:prstGeom prst="rect">
-            <a:avLst/>
-          </a:prstGeom>
+          <a:prstGeom prst="roundRect">
+            <a:avLst>
+              <a:gd name="adj" fmla="val 17241"/>
+            </a:avLst>
+          </a:prstGeom>
+          <a:ln>
+            <a:noFill/>
+          </a:ln>
         </p:spPr>
         <p:style>
-          <a:lnRef idx="1">
-            <a:schemeClr val="accent3">
-              <a:shade val="80000"/>
-            </a:schemeClr>
+          <a:lnRef idx="0">
+            <a:schemeClr val="accent3"/>
           </a:lnRef>
           <a:fillRef idx="1">
             <a:schemeClr val="accent3"/>
@@ -4572,41 +8521,46 @@
                 <a:latin typeface="+mn-lt"/>
                 <a:ea typeface="+mn-ea"/>
               </a:rPr>
-              <a:t>Abc</a:t>
-            </a:r>
-            <a:endParaRPr lang="zh-TW"/>
-          </a:p>
-        </p:txBody>
-      </p:sp>
-      <p:sp>
-        <p:nvSpPr>
-          <p:cNvPr id="24" name="Native style row 2 accent4"/>
-          <p:cNvSpPr/>
-          <p:nvPr/>
-        </p:nvSpPr>
-        <p:spPr>
-          <a:xfrm>
-            <a:off x="7397496" y="2386584"/>
+              <a:t>關鍵步驟</a:t>
+            </a:r>
+            <a:endParaRPr lang="zh-TW"/>
+          </a:p>
+        </p:txBody>
+      </p:sp>
+      <p:sp>
+        <p:nvSpPr>
+          <p:cNvPr id="48" name="Native style row 10 accent4"/>
+          <p:cNvSpPr/>
+          <p:nvPr/>
+        </p:nvSpPr>
+        <p:spPr>
+          <a:xfrm>
+            <a:off x="7397496" y="5129784"/>
             <a:ext cx="1298448" cy="530352"/>
           </a:xfrm>
-          <a:prstGeom prst="rect">
-            <a:avLst/>
-          </a:prstGeom>
+          <a:prstGeom prst="roundRect">
+            <a:avLst>
+              <a:gd name="adj" fmla="val 17241"/>
+            </a:avLst>
+          </a:prstGeom>
+          <a:ln>
+            <a:noFill/>
+          </a:ln>
         </p:spPr>
         <p:style>
-          <a:lnRef idx="1">
-            <a:schemeClr val="accent4">
-              <a:shade val="80000"/>
-            </a:schemeClr>
+          <a:lnRef idx="0">
+            <a:schemeClr val="accent4"/>
           </a:lnRef>
           <a:fillRef idx="1">
-            <a:schemeClr val="accent4"/>
+            <a:schemeClr val="accent4">
+              <a:shade val="75000"/>
+            </a:schemeClr>
           </a:fillRef>
           <a:effectRef idx="0">
             <a:schemeClr val="accent4"/>
           </a:effectRef>
           <a:fontRef idx="minor">
-            <a:schemeClr val="tx1"/>
+            <a:schemeClr val="lt1"/>
           </a:fontRef>
         </p:style>
         <p:txBody>
@@ -4621,37 +8575,40 @@
             <a:r>
               <a:rPr lang="zh-TW" sz="2000" b="1">
                 <a:solidFill>
-                  <a:schemeClr val="tx1"/>
-                </a:solidFill>
-                <a:latin typeface="+mn-lt"/>
-                <a:ea typeface="+mn-ea"/>
-              </a:rPr>
-              <a:t>Abc</a:t>
-            </a:r>
-            <a:endParaRPr lang="zh-TW"/>
-          </a:p>
-        </p:txBody>
-      </p:sp>
-      <p:sp>
-        <p:nvSpPr>
-          <p:cNvPr id="25" name="Native style row 2 accent5"/>
-          <p:cNvSpPr/>
-          <p:nvPr/>
-        </p:nvSpPr>
-        <p:spPr>
-          <a:xfrm>
-            <a:off x="8823960" y="2386584"/>
+                  <a:schemeClr val="lt1"/>
+                </a:solidFill>
+                <a:latin typeface="+mn-lt"/>
+                <a:ea typeface="+mn-ea"/>
+              </a:rPr>
+              <a:t>關鍵步驟</a:t>
+            </a:r>
+            <a:endParaRPr lang="zh-TW"/>
+          </a:p>
+        </p:txBody>
+      </p:sp>
+      <p:sp>
+        <p:nvSpPr>
+          <p:cNvPr id="49" name="Native style row 10 accent5"/>
+          <p:cNvSpPr/>
+          <p:nvPr/>
+        </p:nvSpPr>
+        <p:spPr>
+          <a:xfrm>
+            <a:off x="8823960" y="5129784"/>
             <a:ext cx="1298448" cy="530352"/>
           </a:xfrm>
-          <a:prstGeom prst="rect">
-            <a:avLst/>
-          </a:prstGeom>
+          <a:prstGeom prst="roundRect">
+            <a:avLst>
+              <a:gd name="adj" fmla="val 17241"/>
+            </a:avLst>
+          </a:prstGeom>
+          <a:ln>
+            <a:noFill/>
+          </a:ln>
         </p:spPr>
         <p:style>
-          <a:lnRef idx="1">
-            <a:schemeClr val="accent5">
-              <a:shade val="80000"/>
-            </a:schemeClr>
+          <a:lnRef idx="0">
+            <a:schemeClr val="accent5"/>
           </a:lnRef>
           <a:fillRef idx="1">
             <a:schemeClr val="accent5"/>
@@ -4680,1714 +8637,27 @@
                 <a:latin typeface="+mn-lt"/>
                 <a:ea typeface="+mn-ea"/>
               </a:rPr>
-              <a:t>Abc</a:t>
-            </a:r>
-            <a:endParaRPr lang="zh-TW"/>
-          </a:p>
-        </p:txBody>
-      </p:sp>
-      <p:sp>
-        <p:nvSpPr>
-          <p:cNvPr id="26" name="Native style row 2 accent6"/>
-          <p:cNvSpPr/>
-          <p:nvPr/>
-        </p:nvSpPr>
-        <p:spPr>
-          <a:xfrm>
-            <a:off x="10250424" y="2386584"/>
+              <a:t>關鍵步驟</a:t>
+            </a:r>
+            <a:endParaRPr lang="zh-TW"/>
+          </a:p>
+        </p:txBody>
+      </p:sp>
+      <p:sp>
+        <p:nvSpPr>
+          <p:cNvPr id="50" name="Native style row 10 accent6"/>
+          <p:cNvSpPr/>
+          <p:nvPr/>
+        </p:nvSpPr>
+        <p:spPr>
+          <a:xfrm>
+            <a:off x="10250424" y="5129784"/>
             <a:ext cx="1298448" cy="530352"/>
           </a:xfrm>
-          <a:prstGeom prst="rect">
-            <a:avLst/>
-          </a:prstGeom>
-        </p:spPr>
-        <p:style>
-          <a:lnRef idx="1">
-            <a:schemeClr val="accent6">
-              <a:shade val="80000"/>
-            </a:schemeClr>
-          </a:lnRef>
-          <a:fillRef idx="1">
-            <a:schemeClr val="accent6"/>
-          </a:fillRef>
-          <a:effectRef idx="0">
-            <a:schemeClr val="accent6"/>
-          </a:effectRef>
-          <a:fontRef idx="minor">
-            <a:schemeClr val="tx1"/>
-          </a:fontRef>
-        </p:style>
-        <p:txBody>
-          <a:bodyPr wrap="square" lIns="45720" rIns="45720" tIns="0" bIns="0" anchor="ctr">
-            <a:noAutofit/>
-          </a:bodyPr>
-          <a:lstStyle/>
-          <a:p>
-            <a:pPr algn="ctr">
-              <a:buNone/>
-            </a:pPr>
-            <a:r>
-              <a:rPr lang="zh-TW" sz="2000" b="1">
-                <a:solidFill>
-                  <a:schemeClr val="tx1"/>
-                </a:solidFill>
-                <a:latin typeface="+mn-lt"/>
-                <a:ea typeface="+mn-ea"/>
-              </a:rPr>
-              <a:t>Abc</a:t>
-            </a:r>
-            <a:endParaRPr lang="zh-TW"/>
-          </a:p>
-        </p:txBody>
-      </p:sp>
-      <p:sp>
-        <p:nvSpPr>
-          <p:cNvPr id="27" name="Effect label 2"/>
-          <p:cNvSpPr/>
-          <p:nvPr/>
-        </p:nvSpPr>
-        <p:spPr>
-          <a:xfrm>
-            <a:off x="365760" y="3099816"/>
-            <a:ext cx="1280160" cy="530352"/>
-          </a:xfrm>
-          <a:prstGeom prst="rect">
-            <a:avLst/>
-          </a:prstGeom>
-          <a:noFill/>
-          <a:ln>
-            <a:noFill/>
-          </a:ln>
-        </p:spPr>
-        <p:txBody>
-          <a:bodyPr wrap="square" lIns="45720" rIns="45720" tIns="0" bIns="0" anchor="ctr">
-            <a:noAutofit/>
-          </a:bodyPr>
-          <a:lstStyle/>
-          <a:p>
-            <a:pPr algn="l">
-              <a:buNone/>
-            </a:pPr>
-            <a:r>
-              <a:rPr lang="zh-TW" sz="1000" b="0">
-                <a:solidFill>
-                  <a:srgbClr val="333333"/>
-                </a:solidFill>
-                <a:latin typeface="+mn-lt"/>
-                <a:ea typeface="+mn-ea"/>
-              </a:rPr>
-              <a:t>白框浮起 / White Rim Lift</a:t>
-            </a:r>
-            <a:endParaRPr lang="zh-TW"/>
-          </a:p>
-        </p:txBody>
-      </p:sp>
-      <p:sp>
-        <p:nvSpPr>
-          <p:cNvPr id="28" name="Native style row 3 tx1"/>
-          <p:cNvSpPr/>
-          <p:nvPr/>
-        </p:nvSpPr>
-        <p:spPr>
-          <a:xfrm>
-            <a:off x="1691640" y="3081528"/>
-            <a:ext cx="1298448" cy="530352"/>
-          </a:xfrm>
-          <a:prstGeom prst="rect">
-            <a:avLst/>
-          </a:prstGeom>
-        </p:spPr>
-        <p:style>
-          <a:lnRef idx="2">
-            <a:schemeClr val="lt1"/>
-          </a:lnRef>
-          <a:fillRef idx="1">
-            <a:schemeClr val="tx1"/>
-          </a:fillRef>
-          <a:effectRef idx="1">
-            <a:schemeClr val="tx1"/>
-          </a:effectRef>
-          <a:fontRef idx="minor">
-            <a:schemeClr val="lt1"/>
-          </a:fontRef>
-        </p:style>
-        <p:txBody>
-          <a:bodyPr wrap="square" lIns="45720" rIns="45720" tIns="0" bIns="0" anchor="ctr">
-            <a:noAutofit/>
-          </a:bodyPr>
-          <a:lstStyle/>
-          <a:p>
-            <a:pPr algn="ctr">
-              <a:buNone/>
-            </a:pPr>
-            <a:r>
-              <a:rPr lang="zh-TW" sz="2000" b="1">
-                <a:solidFill>
-                  <a:schemeClr val="lt1"/>
-                </a:solidFill>
-                <a:latin typeface="+mn-lt"/>
-                <a:ea typeface="+mn-ea"/>
-              </a:rPr>
-              <a:t>Abc</a:t>
-            </a:r>
-            <a:endParaRPr lang="zh-TW"/>
-          </a:p>
-        </p:txBody>
-      </p:sp>
-      <p:sp>
-        <p:nvSpPr>
-          <p:cNvPr id="29" name="Native style row 3 accent1"/>
-          <p:cNvSpPr/>
-          <p:nvPr/>
-        </p:nvSpPr>
-        <p:spPr>
-          <a:xfrm>
-            <a:off x="3118104" y="3081528"/>
-            <a:ext cx="1298448" cy="530352"/>
-          </a:xfrm>
-          <a:prstGeom prst="rect">
-            <a:avLst/>
-          </a:prstGeom>
-        </p:spPr>
-        <p:style>
-          <a:lnRef idx="2">
-            <a:schemeClr val="lt1"/>
-          </a:lnRef>
-          <a:fillRef idx="1">
-            <a:schemeClr val="accent1"/>
-          </a:fillRef>
-          <a:effectRef idx="1">
-            <a:schemeClr val="accent1"/>
-          </a:effectRef>
-          <a:fontRef idx="minor">
-            <a:schemeClr val="lt1"/>
-          </a:fontRef>
-        </p:style>
-        <p:txBody>
-          <a:bodyPr wrap="square" lIns="45720" rIns="45720" tIns="0" bIns="0" anchor="ctr">
-            <a:noAutofit/>
-          </a:bodyPr>
-          <a:lstStyle/>
-          <a:p>
-            <a:pPr algn="ctr">
-              <a:buNone/>
-            </a:pPr>
-            <a:r>
-              <a:rPr lang="zh-TW" sz="2000" b="1">
-                <a:solidFill>
-                  <a:schemeClr val="lt1"/>
-                </a:solidFill>
-                <a:latin typeface="+mn-lt"/>
-                <a:ea typeface="+mn-ea"/>
-              </a:rPr>
-              <a:t>Abc</a:t>
-            </a:r>
-            <a:endParaRPr lang="zh-TW"/>
-          </a:p>
-        </p:txBody>
-      </p:sp>
-      <p:sp>
-        <p:nvSpPr>
-          <p:cNvPr id="30" name="Native style row 3 accent2"/>
-          <p:cNvSpPr/>
-          <p:nvPr/>
-        </p:nvSpPr>
-        <p:spPr>
-          <a:xfrm>
-            <a:off x="4544568" y="3081528"/>
-            <a:ext cx="1298448" cy="530352"/>
-          </a:xfrm>
-          <a:prstGeom prst="rect">
-            <a:avLst/>
-          </a:prstGeom>
-        </p:spPr>
-        <p:style>
-          <a:lnRef idx="2">
-            <a:schemeClr val="lt1"/>
-          </a:lnRef>
-          <a:fillRef idx="1">
-            <a:schemeClr val="accent2"/>
-          </a:fillRef>
-          <a:effectRef idx="1">
-            <a:schemeClr val="accent2"/>
-          </a:effectRef>
-          <a:fontRef idx="minor">
-            <a:schemeClr val="tx1"/>
-          </a:fontRef>
-        </p:style>
-        <p:txBody>
-          <a:bodyPr wrap="square" lIns="45720" rIns="45720" tIns="0" bIns="0" anchor="ctr">
-            <a:noAutofit/>
-          </a:bodyPr>
-          <a:lstStyle/>
-          <a:p>
-            <a:pPr algn="ctr">
-              <a:buNone/>
-            </a:pPr>
-            <a:r>
-              <a:rPr lang="zh-TW" sz="2000" b="1">
-                <a:solidFill>
-                  <a:schemeClr val="tx1"/>
-                </a:solidFill>
-                <a:latin typeface="+mn-lt"/>
-                <a:ea typeface="+mn-ea"/>
-              </a:rPr>
-              <a:t>Abc</a:t>
-            </a:r>
-            <a:endParaRPr lang="zh-TW"/>
-          </a:p>
-        </p:txBody>
-      </p:sp>
-      <p:sp>
-        <p:nvSpPr>
-          <p:cNvPr id="31" name="Native style row 3 accent3"/>
-          <p:cNvSpPr/>
-          <p:nvPr/>
-        </p:nvSpPr>
-        <p:spPr>
-          <a:xfrm>
-            <a:off x="5971032" y="3081528"/>
-            <a:ext cx="1298448" cy="530352"/>
-          </a:xfrm>
-          <a:prstGeom prst="rect">
-            <a:avLst/>
-          </a:prstGeom>
-        </p:spPr>
-        <p:style>
-          <a:lnRef idx="2">
-            <a:schemeClr val="lt1"/>
-          </a:lnRef>
-          <a:fillRef idx="1">
-            <a:schemeClr val="accent3"/>
-          </a:fillRef>
-          <a:effectRef idx="1">
-            <a:schemeClr val="accent3"/>
-          </a:effectRef>
-          <a:fontRef idx="minor">
-            <a:schemeClr val="lt1"/>
-          </a:fontRef>
-        </p:style>
-        <p:txBody>
-          <a:bodyPr wrap="square" lIns="45720" rIns="45720" tIns="0" bIns="0" anchor="ctr">
-            <a:noAutofit/>
-          </a:bodyPr>
-          <a:lstStyle/>
-          <a:p>
-            <a:pPr algn="ctr">
-              <a:buNone/>
-            </a:pPr>
-            <a:r>
-              <a:rPr lang="zh-TW" sz="2000" b="1">
-                <a:solidFill>
-                  <a:schemeClr val="lt1"/>
-                </a:solidFill>
-                <a:latin typeface="+mn-lt"/>
-                <a:ea typeface="+mn-ea"/>
-              </a:rPr>
-              <a:t>Abc</a:t>
-            </a:r>
-            <a:endParaRPr lang="zh-TW"/>
-          </a:p>
-        </p:txBody>
-      </p:sp>
-      <p:sp>
-        <p:nvSpPr>
-          <p:cNvPr id="32" name="Native style row 3 accent4"/>
-          <p:cNvSpPr/>
-          <p:nvPr/>
-        </p:nvSpPr>
-        <p:spPr>
-          <a:xfrm>
-            <a:off x="7397496" y="3081528"/>
-            <a:ext cx="1298448" cy="530352"/>
-          </a:xfrm>
-          <a:prstGeom prst="rect">
-            <a:avLst/>
-          </a:prstGeom>
-        </p:spPr>
-        <p:style>
-          <a:lnRef idx="2">
-            <a:schemeClr val="lt1"/>
-          </a:lnRef>
-          <a:fillRef idx="1">
-            <a:schemeClr val="accent4"/>
-          </a:fillRef>
-          <a:effectRef idx="1">
-            <a:schemeClr val="accent4"/>
-          </a:effectRef>
-          <a:fontRef idx="minor">
-            <a:schemeClr val="tx1"/>
-          </a:fontRef>
-        </p:style>
-        <p:txBody>
-          <a:bodyPr wrap="square" lIns="45720" rIns="45720" tIns="0" bIns="0" anchor="ctr">
-            <a:noAutofit/>
-          </a:bodyPr>
-          <a:lstStyle/>
-          <a:p>
-            <a:pPr algn="ctr">
-              <a:buNone/>
-            </a:pPr>
-            <a:r>
-              <a:rPr lang="zh-TW" sz="2000" b="1">
-                <a:solidFill>
-                  <a:schemeClr val="tx1"/>
-                </a:solidFill>
-                <a:latin typeface="+mn-lt"/>
-                <a:ea typeface="+mn-ea"/>
-              </a:rPr>
-              <a:t>Abc</a:t>
-            </a:r>
-            <a:endParaRPr lang="zh-TW"/>
-          </a:p>
-        </p:txBody>
-      </p:sp>
-      <p:sp>
-        <p:nvSpPr>
-          <p:cNvPr id="33" name="Native style row 3 accent5"/>
-          <p:cNvSpPr/>
-          <p:nvPr/>
-        </p:nvSpPr>
-        <p:spPr>
-          <a:xfrm>
-            <a:off x="8823960" y="3081528"/>
-            <a:ext cx="1298448" cy="530352"/>
-          </a:xfrm>
-          <a:prstGeom prst="rect">
-            <a:avLst/>
-          </a:prstGeom>
-        </p:spPr>
-        <p:style>
-          <a:lnRef idx="2">
-            <a:schemeClr val="lt1"/>
-          </a:lnRef>
-          <a:fillRef idx="1">
-            <a:schemeClr val="accent5"/>
-          </a:fillRef>
-          <a:effectRef idx="1">
-            <a:schemeClr val="accent5"/>
-          </a:effectRef>
-          <a:fontRef idx="minor">
-            <a:schemeClr val="lt1"/>
-          </a:fontRef>
-        </p:style>
-        <p:txBody>
-          <a:bodyPr wrap="square" lIns="45720" rIns="45720" tIns="0" bIns="0" anchor="ctr">
-            <a:noAutofit/>
-          </a:bodyPr>
-          <a:lstStyle/>
-          <a:p>
-            <a:pPr algn="ctr">
-              <a:buNone/>
-            </a:pPr>
-            <a:r>
-              <a:rPr lang="zh-TW" sz="2000" b="1">
-                <a:solidFill>
-                  <a:schemeClr val="lt1"/>
-                </a:solidFill>
-                <a:latin typeface="+mn-lt"/>
-                <a:ea typeface="+mn-ea"/>
-              </a:rPr>
-              <a:t>Abc</a:t>
-            </a:r>
-            <a:endParaRPr lang="zh-TW"/>
-          </a:p>
-        </p:txBody>
-      </p:sp>
-      <p:sp>
-        <p:nvSpPr>
-          <p:cNvPr id="34" name="Native style row 3 accent6"/>
-          <p:cNvSpPr/>
-          <p:nvPr/>
-        </p:nvSpPr>
-        <p:spPr>
-          <a:xfrm>
-            <a:off x="10250424" y="3081528"/>
-            <a:ext cx="1298448" cy="530352"/>
-          </a:xfrm>
-          <a:prstGeom prst="rect">
-            <a:avLst/>
-          </a:prstGeom>
-        </p:spPr>
-        <p:style>
-          <a:lnRef idx="2">
-            <a:schemeClr val="lt1"/>
-          </a:lnRef>
-          <a:fillRef idx="1">
-            <a:schemeClr val="accent6"/>
-          </a:fillRef>
-          <a:effectRef idx="1">
-            <a:schemeClr val="accent6"/>
-          </a:effectRef>
-          <a:fontRef idx="minor">
-            <a:schemeClr val="tx1"/>
-          </a:fontRef>
-        </p:style>
-        <p:txBody>
-          <a:bodyPr wrap="square" lIns="45720" rIns="45720" tIns="0" bIns="0" anchor="ctr">
-            <a:noAutofit/>
-          </a:bodyPr>
-          <a:lstStyle/>
-          <a:p>
-            <a:pPr algn="ctr">
-              <a:buNone/>
-            </a:pPr>
-            <a:r>
-              <a:rPr lang="zh-TW" sz="2000" b="1">
-                <a:solidFill>
-                  <a:schemeClr val="tx1"/>
-                </a:solidFill>
-                <a:latin typeface="+mn-lt"/>
-                <a:ea typeface="+mn-ea"/>
-              </a:rPr>
-              <a:t>Abc</a:t>
-            </a:r>
-            <a:endParaRPr lang="zh-TW"/>
-          </a:p>
-        </p:txBody>
-      </p:sp>
-      <p:sp>
-        <p:nvSpPr>
-          <p:cNvPr id="35" name="Effect label 3"/>
-          <p:cNvSpPr/>
-          <p:nvPr/>
-        </p:nvSpPr>
-        <p:spPr>
-          <a:xfrm>
-            <a:off x="365760" y="3794760"/>
-            <a:ext cx="1280160" cy="530352"/>
-          </a:xfrm>
-          <a:prstGeom prst="rect">
-            <a:avLst/>
-          </a:prstGeom>
-          <a:noFill/>
-          <a:ln>
-            <a:noFill/>
-          </a:ln>
-        </p:spPr>
-        <p:txBody>
-          <a:bodyPr wrap="square" lIns="45720" rIns="45720" tIns="0" bIns="0" anchor="ctr">
-            <a:noAutofit/>
-          </a:bodyPr>
-          <a:lstStyle/>
-          <a:p>
-            <a:pPr algn="l">
-              <a:buNone/>
-            </a:pPr>
-            <a:r>
-              <a:rPr lang="zh-TW" sz="1000" b="0">
-                <a:solidFill>
-                  <a:srgbClr val="333333"/>
-                </a:solidFill>
-                <a:latin typeface="+mn-lt"/>
-                <a:ea typeface="+mn-ea"/>
-              </a:rPr>
-              <a:t>柔底微浮 / Soft Tint Lift</a:t>
-            </a:r>
-            <a:endParaRPr lang="zh-TW"/>
-          </a:p>
-        </p:txBody>
-      </p:sp>
-      <p:sp>
-        <p:nvSpPr>
-          <p:cNvPr id="36" name="Native style row 4 tx1"/>
-          <p:cNvSpPr/>
-          <p:nvPr/>
-        </p:nvSpPr>
-        <p:spPr>
-          <a:xfrm>
-            <a:off x="1691640" y="3776472"/>
-            <a:ext cx="1298448" cy="530352"/>
-          </a:xfrm>
-          <a:prstGeom prst="rect">
-            <a:avLst/>
-          </a:prstGeom>
-        </p:spPr>
-        <p:style>
-          <a:lnRef idx="3">
-            <a:schemeClr val="tx1"/>
-          </a:lnRef>
-          <a:fillRef idx="3">
-            <a:schemeClr val="tx1"/>
-          </a:fillRef>
-          <a:effectRef idx="1">
-            <a:schemeClr val="tx1"/>
-          </a:effectRef>
-          <a:fontRef idx="minor">
-            <a:schemeClr val="tx1"/>
-          </a:fontRef>
-        </p:style>
-        <p:txBody>
-          <a:bodyPr wrap="square" lIns="45720" rIns="45720" tIns="0" bIns="0" anchor="ctr">
-            <a:noAutofit/>
-          </a:bodyPr>
-          <a:lstStyle/>
-          <a:p>
-            <a:pPr algn="ctr">
-              <a:buNone/>
-            </a:pPr>
-            <a:r>
-              <a:rPr lang="zh-TW" sz="2000" b="1">
-                <a:solidFill>
-                  <a:schemeClr val="tx1"/>
-                </a:solidFill>
-                <a:latin typeface="+mn-lt"/>
-                <a:ea typeface="+mn-ea"/>
-              </a:rPr>
-              <a:t>Abc</a:t>
-            </a:r>
-            <a:endParaRPr lang="zh-TW"/>
-          </a:p>
-        </p:txBody>
-      </p:sp>
-      <p:sp>
-        <p:nvSpPr>
-          <p:cNvPr id="37" name="Native style row 4 accent1"/>
-          <p:cNvSpPr/>
-          <p:nvPr/>
-        </p:nvSpPr>
-        <p:spPr>
-          <a:xfrm>
-            <a:off x="3118104" y="3776472"/>
-            <a:ext cx="1298448" cy="530352"/>
-          </a:xfrm>
-          <a:prstGeom prst="rect">
-            <a:avLst/>
-          </a:prstGeom>
-        </p:spPr>
-        <p:style>
-          <a:lnRef idx="3">
-            <a:schemeClr val="accent1"/>
-          </a:lnRef>
-          <a:fillRef idx="3">
-            <a:schemeClr val="accent1"/>
-          </a:fillRef>
-          <a:effectRef idx="1">
-            <a:schemeClr val="accent1"/>
-          </a:effectRef>
-          <a:fontRef idx="minor">
-            <a:schemeClr val="accent1"/>
-          </a:fontRef>
-        </p:style>
-        <p:txBody>
-          <a:bodyPr wrap="square" lIns="45720" rIns="45720" tIns="0" bIns="0" anchor="ctr">
-            <a:noAutofit/>
-          </a:bodyPr>
-          <a:lstStyle/>
-          <a:p>
-            <a:pPr algn="ctr">
-              <a:buNone/>
-            </a:pPr>
-            <a:r>
-              <a:rPr lang="zh-TW" sz="2000" b="1">
-                <a:solidFill>
-                  <a:schemeClr val="accent1"/>
-                </a:solidFill>
-                <a:latin typeface="+mn-lt"/>
-                <a:ea typeface="+mn-ea"/>
-              </a:rPr>
-              <a:t>Abc</a:t>
-            </a:r>
-            <a:endParaRPr lang="zh-TW"/>
-          </a:p>
-        </p:txBody>
-      </p:sp>
-      <p:sp>
-        <p:nvSpPr>
-          <p:cNvPr id="38" name="Native style row 4 accent2"/>
-          <p:cNvSpPr/>
-          <p:nvPr/>
-        </p:nvSpPr>
-        <p:spPr>
-          <a:xfrm>
-            <a:off x="4544568" y="3776472"/>
-            <a:ext cx="1298448" cy="530352"/>
-          </a:xfrm>
-          <a:prstGeom prst="rect">
-            <a:avLst/>
-          </a:prstGeom>
-        </p:spPr>
-        <p:style>
-          <a:lnRef idx="3">
-            <a:schemeClr val="accent2"/>
-          </a:lnRef>
-          <a:fillRef idx="3">
-            <a:schemeClr val="accent2"/>
-          </a:fillRef>
-          <a:effectRef idx="1">
-            <a:schemeClr val="accent2"/>
-          </a:effectRef>
-          <a:fontRef idx="minor">
-            <a:schemeClr val="accent2">
-              <a:shade val="50000"/>
-            </a:schemeClr>
-          </a:fontRef>
-        </p:style>
-        <p:txBody>
-          <a:bodyPr wrap="square" lIns="45720" rIns="45720" tIns="0" bIns="0" anchor="ctr">
-            <a:noAutofit/>
-          </a:bodyPr>
-          <a:lstStyle/>
-          <a:p>
-            <a:pPr algn="ctr">
-              <a:buNone/>
-            </a:pPr>
-            <a:r>
-              <a:rPr lang="zh-TW" sz="2000" b="1">
-                <a:solidFill>
-                  <a:schemeClr val="accent2">
-                    <a:shade val="50000"/>
-                  </a:schemeClr>
-                </a:solidFill>
-                <a:latin typeface="+mn-lt"/>
-                <a:ea typeface="+mn-ea"/>
-              </a:rPr>
-              <a:t>Abc</a:t>
-            </a:r>
-            <a:endParaRPr lang="zh-TW"/>
-          </a:p>
-        </p:txBody>
-      </p:sp>
-      <p:sp>
-        <p:nvSpPr>
-          <p:cNvPr id="39" name="Native style row 4 accent3"/>
-          <p:cNvSpPr/>
-          <p:nvPr/>
-        </p:nvSpPr>
-        <p:spPr>
-          <a:xfrm>
-            <a:off x="5971032" y="3776472"/>
-            <a:ext cx="1298448" cy="530352"/>
-          </a:xfrm>
-          <a:prstGeom prst="rect">
-            <a:avLst/>
-          </a:prstGeom>
-        </p:spPr>
-        <p:style>
-          <a:lnRef idx="3">
-            <a:schemeClr val="accent3"/>
-          </a:lnRef>
-          <a:fillRef idx="3">
-            <a:schemeClr val="accent3"/>
-          </a:fillRef>
-          <a:effectRef idx="1">
-            <a:schemeClr val="accent3"/>
-          </a:effectRef>
-          <a:fontRef idx="minor">
-            <a:schemeClr val="accent3"/>
-          </a:fontRef>
-        </p:style>
-        <p:txBody>
-          <a:bodyPr wrap="square" lIns="45720" rIns="45720" tIns="0" bIns="0" anchor="ctr">
-            <a:noAutofit/>
-          </a:bodyPr>
-          <a:lstStyle/>
-          <a:p>
-            <a:pPr algn="ctr">
-              <a:buNone/>
-            </a:pPr>
-            <a:r>
-              <a:rPr lang="zh-TW" sz="2000" b="1">
-                <a:solidFill>
-                  <a:schemeClr val="accent3"/>
-                </a:solidFill>
-                <a:latin typeface="+mn-lt"/>
-                <a:ea typeface="+mn-ea"/>
-              </a:rPr>
-              <a:t>Abc</a:t>
-            </a:r>
-            <a:endParaRPr lang="zh-TW"/>
-          </a:p>
-        </p:txBody>
-      </p:sp>
-      <p:sp>
-        <p:nvSpPr>
-          <p:cNvPr id="40" name="Native style row 4 accent4"/>
-          <p:cNvSpPr/>
-          <p:nvPr/>
-        </p:nvSpPr>
-        <p:spPr>
-          <a:xfrm>
-            <a:off x="7397496" y="3776472"/>
-            <a:ext cx="1298448" cy="530352"/>
-          </a:xfrm>
-          <a:prstGeom prst="rect">
-            <a:avLst/>
-          </a:prstGeom>
-        </p:spPr>
-        <p:style>
-          <a:lnRef idx="3">
-            <a:schemeClr val="accent4"/>
-          </a:lnRef>
-          <a:fillRef idx="3">
-            <a:schemeClr val="accent4"/>
-          </a:fillRef>
-          <a:effectRef idx="1">
-            <a:schemeClr val="accent4"/>
-          </a:effectRef>
-          <a:fontRef idx="minor">
-            <a:schemeClr val="accent4">
-              <a:shade val="60000"/>
-            </a:schemeClr>
-          </a:fontRef>
-        </p:style>
-        <p:txBody>
-          <a:bodyPr wrap="square" lIns="45720" rIns="45720" tIns="0" bIns="0" anchor="ctr">
-            <a:noAutofit/>
-          </a:bodyPr>
-          <a:lstStyle/>
-          <a:p>
-            <a:pPr algn="ctr">
-              <a:buNone/>
-            </a:pPr>
-            <a:r>
-              <a:rPr lang="zh-TW" sz="2000" b="1">
-                <a:solidFill>
-                  <a:schemeClr val="accent4">
-                    <a:shade val="60000"/>
-                  </a:schemeClr>
-                </a:solidFill>
-                <a:latin typeface="+mn-lt"/>
-                <a:ea typeface="+mn-ea"/>
-              </a:rPr>
-              <a:t>Abc</a:t>
-            </a:r>
-            <a:endParaRPr lang="zh-TW"/>
-          </a:p>
-        </p:txBody>
-      </p:sp>
-      <p:sp>
-        <p:nvSpPr>
-          <p:cNvPr id="41" name="Native style row 4 accent5"/>
-          <p:cNvSpPr/>
-          <p:nvPr/>
-        </p:nvSpPr>
-        <p:spPr>
-          <a:xfrm>
-            <a:off x="8823960" y="3776472"/>
-            <a:ext cx="1298448" cy="530352"/>
-          </a:xfrm>
-          <a:prstGeom prst="rect">
-            <a:avLst/>
-          </a:prstGeom>
-        </p:spPr>
-        <p:style>
-          <a:lnRef idx="3">
-            <a:schemeClr val="accent5"/>
-          </a:lnRef>
-          <a:fillRef idx="3">
-            <a:schemeClr val="accent5"/>
-          </a:fillRef>
-          <a:effectRef idx="1">
-            <a:schemeClr val="accent5"/>
-          </a:effectRef>
-          <a:fontRef idx="minor">
-            <a:schemeClr val="accent5"/>
-          </a:fontRef>
-        </p:style>
-        <p:txBody>
-          <a:bodyPr wrap="square" lIns="45720" rIns="45720" tIns="0" bIns="0" anchor="ctr">
-            <a:noAutofit/>
-          </a:bodyPr>
-          <a:lstStyle/>
-          <a:p>
-            <a:pPr algn="ctr">
-              <a:buNone/>
-            </a:pPr>
-            <a:r>
-              <a:rPr lang="zh-TW" sz="2000" b="1">
-                <a:solidFill>
-                  <a:schemeClr val="accent5"/>
-                </a:solidFill>
-                <a:latin typeface="+mn-lt"/>
-                <a:ea typeface="+mn-ea"/>
-              </a:rPr>
-              <a:t>Abc</a:t>
-            </a:r>
-            <a:endParaRPr lang="zh-TW"/>
-          </a:p>
-        </p:txBody>
-      </p:sp>
-      <p:sp>
-        <p:nvSpPr>
-          <p:cNvPr id="42" name="Native style row 4 accent6"/>
-          <p:cNvSpPr/>
-          <p:nvPr/>
-        </p:nvSpPr>
-        <p:spPr>
-          <a:xfrm>
-            <a:off x="10250424" y="3776472"/>
-            <a:ext cx="1298448" cy="530352"/>
-          </a:xfrm>
-          <a:prstGeom prst="rect">
-            <a:avLst/>
-          </a:prstGeom>
-        </p:spPr>
-        <p:style>
-          <a:lnRef idx="3">
-            <a:schemeClr val="accent6"/>
-          </a:lnRef>
-          <a:fillRef idx="3">
-            <a:schemeClr val="accent6"/>
-          </a:fillRef>
-          <a:effectRef idx="1">
-            <a:schemeClr val="accent6"/>
-          </a:effectRef>
-          <a:fontRef idx="minor">
-            <a:schemeClr val="accent6">
-              <a:shade val="30000"/>
-            </a:schemeClr>
-          </a:fontRef>
-        </p:style>
-        <p:txBody>
-          <a:bodyPr wrap="square" lIns="45720" rIns="45720" tIns="0" bIns="0" anchor="ctr">
-            <a:noAutofit/>
-          </a:bodyPr>
-          <a:lstStyle/>
-          <a:p>
-            <a:pPr algn="ctr">
-              <a:buNone/>
-            </a:pPr>
-            <a:r>
-              <a:rPr lang="zh-TW" sz="2000" b="1">
-                <a:solidFill>
-                  <a:schemeClr val="accent6">
-                    <a:shade val="30000"/>
-                  </a:schemeClr>
-                </a:solidFill>
-                <a:latin typeface="+mn-lt"/>
-                <a:ea typeface="+mn-ea"/>
-              </a:rPr>
-              <a:t>Abc</a:t>
-            </a:r>
-            <a:endParaRPr lang="zh-TW"/>
-          </a:p>
-        </p:txBody>
-      </p:sp>
-      <p:sp>
-        <p:nvSpPr>
-          <p:cNvPr id="43" name="Effect label 4"/>
-          <p:cNvSpPr/>
-          <p:nvPr/>
-        </p:nvSpPr>
-        <p:spPr>
-          <a:xfrm>
-            <a:off x="365760" y="4489704"/>
-            <a:ext cx="1280160" cy="530352"/>
-          </a:xfrm>
-          <a:prstGeom prst="rect">
-            <a:avLst/>
-          </a:prstGeom>
-          <a:noFill/>
-          <a:ln>
-            <a:noFill/>
-          </a:ln>
-        </p:spPr>
-        <p:txBody>
-          <a:bodyPr wrap="square" lIns="45720" rIns="45720" tIns="0" bIns="0" anchor="ctr">
-            <a:noAutofit/>
-          </a:bodyPr>
-          <a:lstStyle/>
-          <a:p>
-            <a:pPr algn="l">
-              <a:buNone/>
-            </a:pPr>
-            <a:r>
-              <a:rPr lang="zh-TW" sz="1000" b="0">
-                <a:solidFill>
-                  <a:srgbClr val="333333"/>
-                </a:solidFill>
-                <a:latin typeface="+mn-lt"/>
-                <a:ea typeface="+mn-ea"/>
-              </a:rPr>
-              <a:t>主色微立體 / Subtle Depth</a:t>
-            </a:r>
-            <a:endParaRPr lang="zh-TW"/>
-          </a:p>
-        </p:txBody>
-      </p:sp>
-      <p:sp>
-        <p:nvSpPr>
-          <p:cNvPr id="44" name="Native style row 5 tx1"/>
-          <p:cNvSpPr/>
-          <p:nvPr/>
-        </p:nvSpPr>
-        <p:spPr>
-          <a:xfrm>
-            <a:off x="1691640" y="4471416"/>
-            <a:ext cx="1298448" cy="530352"/>
-          </a:xfrm>
-          <a:prstGeom prst="rect">
-            <a:avLst/>
-          </a:prstGeom>
-          <a:ln>
-            <a:noFill/>
-          </a:ln>
-        </p:spPr>
-        <p:style>
-          <a:lnRef idx="0">
-            <a:schemeClr val="tx1"/>
-          </a:lnRef>
-          <a:fillRef idx="2">
-            <a:schemeClr val="tx1"/>
-          </a:fillRef>
-          <a:effectRef idx="2">
-            <a:schemeClr val="tx1"/>
-          </a:effectRef>
-          <a:fontRef idx="minor">
-            <a:schemeClr val="lt1"/>
-          </a:fontRef>
-        </p:style>
-        <p:txBody>
-          <a:bodyPr wrap="square" lIns="45720" rIns="45720" tIns="0" bIns="0" anchor="ctr">
-            <a:noAutofit/>
-          </a:bodyPr>
-          <a:lstStyle/>
-          <a:p>
-            <a:pPr algn="ctr">
-              <a:buNone/>
-            </a:pPr>
-            <a:r>
-              <a:rPr lang="zh-TW" sz="2000" b="1">
-                <a:solidFill>
-                  <a:schemeClr val="lt1"/>
-                </a:solidFill>
-                <a:latin typeface="+mn-lt"/>
-                <a:ea typeface="+mn-ea"/>
-              </a:rPr>
-              <a:t>Abc</a:t>
-            </a:r>
-            <a:endParaRPr lang="zh-TW"/>
-          </a:p>
-        </p:txBody>
-      </p:sp>
-      <p:sp>
-        <p:nvSpPr>
-          <p:cNvPr id="45" name="Native style row 5 accent1"/>
-          <p:cNvSpPr/>
-          <p:nvPr/>
-        </p:nvSpPr>
-        <p:spPr>
-          <a:xfrm>
-            <a:off x="3118104" y="4471416"/>
-            <a:ext cx="1298448" cy="530352"/>
-          </a:xfrm>
-          <a:prstGeom prst="rect">
-            <a:avLst/>
-          </a:prstGeom>
-          <a:ln>
-            <a:noFill/>
-          </a:ln>
-        </p:spPr>
-        <p:style>
-          <a:lnRef idx="0">
-            <a:schemeClr val="accent1"/>
-          </a:lnRef>
-          <a:fillRef idx="2">
-            <a:schemeClr val="accent1"/>
-          </a:fillRef>
-          <a:effectRef idx="2">
-            <a:schemeClr val="accent1"/>
-          </a:effectRef>
-          <a:fontRef idx="minor">
-            <a:schemeClr val="lt1"/>
-          </a:fontRef>
-        </p:style>
-        <p:txBody>
-          <a:bodyPr wrap="square" lIns="45720" rIns="45720" tIns="0" bIns="0" anchor="ctr">
-            <a:noAutofit/>
-          </a:bodyPr>
-          <a:lstStyle/>
-          <a:p>
-            <a:pPr algn="ctr">
-              <a:buNone/>
-            </a:pPr>
-            <a:r>
-              <a:rPr lang="zh-TW" sz="2000" b="1">
-                <a:solidFill>
-                  <a:schemeClr val="lt1"/>
-                </a:solidFill>
-                <a:latin typeface="+mn-lt"/>
-                <a:ea typeface="+mn-ea"/>
-              </a:rPr>
-              <a:t>Abc</a:t>
-            </a:r>
-            <a:endParaRPr lang="zh-TW"/>
-          </a:p>
-        </p:txBody>
-      </p:sp>
-      <p:sp>
-        <p:nvSpPr>
-          <p:cNvPr id="46" name="Native style row 5 accent2"/>
-          <p:cNvSpPr/>
-          <p:nvPr/>
-        </p:nvSpPr>
-        <p:spPr>
-          <a:xfrm>
-            <a:off x="4544568" y="4471416"/>
-            <a:ext cx="1298448" cy="530352"/>
-          </a:xfrm>
-          <a:prstGeom prst="rect">
-            <a:avLst/>
-          </a:prstGeom>
-          <a:ln>
-            <a:noFill/>
-          </a:ln>
-        </p:spPr>
-        <p:style>
-          <a:lnRef idx="0">
-            <a:schemeClr val="accent2"/>
-          </a:lnRef>
-          <a:fillRef idx="2">
-            <a:schemeClr val="accent2"/>
-          </a:fillRef>
-          <a:effectRef idx="2">
-            <a:schemeClr val="accent2"/>
-          </a:effectRef>
-          <a:fontRef idx="minor">
-            <a:schemeClr val="tx1"/>
-          </a:fontRef>
-        </p:style>
-        <p:txBody>
-          <a:bodyPr wrap="square" lIns="45720" rIns="45720" tIns="0" bIns="0" anchor="ctr">
-            <a:noAutofit/>
-          </a:bodyPr>
-          <a:lstStyle/>
-          <a:p>
-            <a:pPr algn="ctr">
-              <a:buNone/>
-            </a:pPr>
-            <a:r>
-              <a:rPr lang="zh-TW" sz="2000" b="1">
-                <a:solidFill>
-                  <a:schemeClr val="tx1"/>
-                </a:solidFill>
-                <a:latin typeface="+mn-lt"/>
-                <a:ea typeface="+mn-ea"/>
-              </a:rPr>
-              <a:t>Abc</a:t>
-            </a:r>
-            <a:endParaRPr lang="zh-TW"/>
-          </a:p>
-        </p:txBody>
-      </p:sp>
-      <p:sp>
-        <p:nvSpPr>
-          <p:cNvPr id="47" name="Native style row 5 accent3"/>
-          <p:cNvSpPr/>
-          <p:nvPr/>
-        </p:nvSpPr>
-        <p:spPr>
-          <a:xfrm>
-            <a:off x="5971032" y="4471416"/>
-            <a:ext cx="1298448" cy="530352"/>
-          </a:xfrm>
-          <a:prstGeom prst="rect">
-            <a:avLst/>
-          </a:prstGeom>
-          <a:ln>
-            <a:noFill/>
-          </a:ln>
-        </p:spPr>
-        <p:style>
-          <a:lnRef idx="0">
-            <a:schemeClr val="accent3"/>
-          </a:lnRef>
-          <a:fillRef idx="2">
-            <a:schemeClr val="accent3"/>
-          </a:fillRef>
-          <a:effectRef idx="2">
-            <a:schemeClr val="accent3"/>
-          </a:effectRef>
-          <a:fontRef idx="minor">
-            <a:schemeClr val="lt1"/>
-          </a:fontRef>
-        </p:style>
-        <p:txBody>
-          <a:bodyPr wrap="square" lIns="45720" rIns="45720" tIns="0" bIns="0" anchor="ctr">
-            <a:noAutofit/>
-          </a:bodyPr>
-          <a:lstStyle/>
-          <a:p>
-            <a:pPr algn="ctr">
-              <a:buNone/>
-            </a:pPr>
-            <a:r>
-              <a:rPr lang="zh-TW" sz="2000" b="1">
-                <a:solidFill>
-                  <a:schemeClr val="lt1"/>
-                </a:solidFill>
-                <a:latin typeface="+mn-lt"/>
-                <a:ea typeface="+mn-ea"/>
-              </a:rPr>
-              <a:t>Abc</a:t>
-            </a:r>
-            <a:endParaRPr lang="zh-TW"/>
-          </a:p>
-        </p:txBody>
-      </p:sp>
-      <p:sp>
-        <p:nvSpPr>
-          <p:cNvPr id="48" name="Native style row 5 accent4"/>
-          <p:cNvSpPr/>
-          <p:nvPr/>
-        </p:nvSpPr>
-        <p:spPr>
-          <a:xfrm>
-            <a:off x="7397496" y="4471416"/>
-            <a:ext cx="1298448" cy="530352"/>
-          </a:xfrm>
-          <a:prstGeom prst="rect">
-            <a:avLst/>
-          </a:prstGeom>
-          <a:ln>
-            <a:noFill/>
-          </a:ln>
-        </p:spPr>
-        <p:style>
-          <a:lnRef idx="0">
-            <a:schemeClr val="accent4"/>
-          </a:lnRef>
-          <a:fillRef idx="2">
-            <a:schemeClr val="accent4"/>
-          </a:fillRef>
-          <a:effectRef idx="2">
-            <a:schemeClr val="accent4"/>
-          </a:effectRef>
-          <a:fontRef idx="minor">
-            <a:schemeClr val="tx1"/>
-          </a:fontRef>
-        </p:style>
-        <p:txBody>
-          <a:bodyPr wrap="square" lIns="45720" rIns="45720" tIns="0" bIns="0" anchor="ctr">
-            <a:noAutofit/>
-          </a:bodyPr>
-          <a:lstStyle/>
-          <a:p>
-            <a:pPr algn="ctr">
-              <a:buNone/>
-            </a:pPr>
-            <a:r>
-              <a:rPr lang="zh-TW" sz="2000" b="1">
-                <a:solidFill>
-                  <a:schemeClr val="tx1"/>
-                </a:solidFill>
-                <a:latin typeface="+mn-lt"/>
-                <a:ea typeface="+mn-ea"/>
-              </a:rPr>
-              <a:t>Abc</a:t>
-            </a:r>
-            <a:endParaRPr lang="zh-TW"/>
-          </a:p>
-        </p:txBody>
-      </p:sp>
-      <p:sp>
-        <p:nvSpPr>
-          <p:cNvPr id="49" name="Native style row 5 accent5"/>
-          <p:cNvSpPr/>
-          <p:nvPr/>
-        </p:nvSpPr>
-        <p:spPr>
-          <a:xfrm>
-            <a:off x="8823960" y="4471416"/>
-            <a:ext cx="1298448" cy="530352"/>
-          </a:xfrm>
-          <a:prstGeom prst="rect">
-            <a:avLst/>
-          </a:prstGeom>
-          <a:ln>
-            <a:noFill/>
-          </a:ln>
-        </p:spPr>
-        <p:style>
-          <a:lnRef idx="0">
-            <a:schemeClr val="accent5"/>
-          </a:lnRef>
-          <a:fillRef idx="2">
-            <a:schemeClr val="accent5"/>
-          </a:fillRef>
-          <a:effectRef idx="2">
-            <a:schemeClr val="accent5"/>
-          </a:effectRef>
-          <a:fontRef idx="minor">
-            <a:schemeClr val="lt1"/>
-          </a:fontRef>
-        </p:style>
-        <p:txBody>
-          <a:bodyPr wrap="square" lIns="45720" rIns="45720" tIns="0" bIns="0" anchor="ctr">
-            <a:noAutofit/>
-          </a:bodyPr>
-          <a:lstStyle/>
-          <a:p>
-            <a:pPr algn="ctr">
-              <a:buNone/>
-            </a:pPr>
-            <a:r>
-              <a:rPr lang="zh-TW" sz="2000" b="1">
-                <a:solidFill>
-                  <a:schemeClr val="lt1"/>
-                </a:solidFill>
-                <a:latin typeface="+mn-lt"/>
-                <a:ea typeface="+mn-ea"/>
-              </a:rPr>
-              <a:t>Abc</a:t>
-            </a:r>
-            <a:endParaRPr lang="zh-TW"/>
-          </a:p>
-        </p:txBody>
-      </p:sp>
-      <p:sp>
-        <p:nvSpPr>
-          <p:cNvPr id="50" name="Native style row 5 accent6"/>
-          <p:cNvSpPr/>
-          <p:nvPr/>
-        </p:nvSpPr>
-        <p:spPr>
-          <a:xfrm>
-            <a:off x="10250424" y="4471416"/>
-            <a:ext cx="1298448" cy="530352"/>
-          </a:xfrm>
-          <a:prstGeom prst="rect">
-            <a:avLst/>
-          </a:prstGeom>
-          <a:ln>
-            <a:noFill/>
-          </a:ln>
-        </p:spPr>
-        <p:style>
-          <a:lnRef idx="0">
-            <a:schemeClr val="accent6"/>
-          </a:lnRef>
-          <a:fillRef idx="2">
-            <a:schemeClr val="accent6"/>
-          </a:fillRef>
-          <a:effectRef idx="2">
-            <a:schemeClr val="accent6"/>
-          </a:effectRef>
-          <a:fontRef idx="minor">
-            <a:schemeClr val="tx1"/>
-          </a:fontRef>
-        </p:style>
-        <p:txBody>
-          <a:bodyPr wrap="square" lIns="45720" rIns="45720" tIns="0" bIns="0" anchor="ctr">
-            <a:noAutofit/>
-          </a:bodyPr>
-          <a:lstStyle/>
-          <a:p>
-            <a:pPr algn="ctr">
-              <a:buNone/>
-            </a:pPr>
-            <a:r>
-              <a:rPr lang="zh-TW" sz="2000" b="1">
-                <a:solidFill>
-                  <a:schemeClr val="tx1"/>
-                </a:solidFill>
-                <a:latin typeface="+mn-lt"/>
-                <a:ea typeface="+mn-ea"/>
-              </a:rPr>
-              <a:t>Abc</a:t>
-            </a:r>
-            <a:endParaRPr lang="zh-TW"/>
-          </a:p>
-        </p:txBody>
-      </p:sp>
-      <p:sp>
-        <p:nvSpPr>
-          <p:cNvPr id="51" name="Effect label 5"/>
-          <p:cNvSpPr/>
-          <p:nvPr/>
-        </p:nvSpPr>
-        <p:spPr>
-          <a:xfrm>
-            <a:off x="365760" y="5184648"/>
-            <a:ext cx="1280160" cy="530352"/>
-          </a:xfrm>
-          <a:prstGeom prst="rect">
-            <a:avLst/>
-          </a:prstGeom>
-          <a:noFill/>
-          <a:ln>
-            <a:noFill/>
-          </a:ln>
-        </p:spPr>
-        <p:txBody>
-          <a:bodyPr wrap="square" lIns="45720" rIns="45720" tIns="0" bIns="0" anchor="ctr">
-            <a:noAutofit/>
-          </a:bodyPr>
-          <a:lstStyle/>
-          <a:p>
-            <a:pPr algn="l">
-              <a:buNone/>
-            </a:pPr>
-            <a:r>
-              <a:rPr lang="zh-TW" sz="1000" b="0">
-                <a:solidFill>
-                  <a:srgbClr val="333333"/>
-                </a:solidFill>
-                <a:latin typeface="+mn-lt"/>
-                <a:ea typeface="+mn-ea"/>
-              </a:rPr>
-              <a:t>深色浮起 / Deep Color Lift</a:t>
-            </a:r>
-            <a:endParaRPr lang="zh-TW"/>
-          </a:p>
-        </p:txBody>
-      </p:sp>
-      <p:sp>
-        <p:nvSpPr>
-          <p:cNvPr id="52" name="Native style row 6 tx1"/>
-          <p:cNvSpPr/>
-          <p:nvPr/>
-        </p:nvSpPr>
-        <p:spPr>
-          <a:xfrm>
-            <a:off x="1691640" y="5166360"/>
-            <a:ext cx="1298448" cy="530352"/>
-          </a:xfrm>
-          <a:prstGeom prst="rect">
-            <a:avLst/>
-          </a:prstGeom>
-          <a:ln>
-            <a:noFill/>
-          </a:ln>
-        </p:spPr>
-        <p:style>
-          <a:lnRef idx="0">
-            <a:schemeClr val="tx1"/>
-          </a:lnRef>
-          <a:fillRef idx="1">
-            <a:schemeClr val="tx1">
-              <a:shade val="45000"/>
-            </a:schemeClr>
-          </a:fillRef>
-          <a:effectRef idx="3">
-            <a:schemeClr val="tx1"/>
-          </a:effectRef>
-          <a:fontRef idx="minor">
-            <a:schemeClr val="lt1"/>
-          </a:fontRef>
-        </p:style>
-        <p:txBody>
-          <a:bodyPr wrap="square" lIns="45720" rIns="45720" tIns="0" bIns="0" anchor="ctr">
-            <a:noAutofit/>
-          </a:bodyPr>
-          <a:lstStyle/>
-          <a:p>
-            <a:pPr algn="ctr">
-              <a:buNone/>
-            </a:pPr>
-            <a:r>
-              <a:rPr lang="zh-TW" sz="2000" b="1">
-                <a:solidFill>
-                  <a:schemeClr val="lt1"/>
-                </a:solidFill>
-                <a:latin typeface="+mn-lt"/>
-                <a:ea typeface="+mn-ea"/>
-              </a:rPr>
-              <a:t>Abc</a:t>
-            </a:r>
-            <a:endParaRPr lang="zh-TW"/>
-          </a:p>
-        </p:txBody>
-      </p:sp>
-      <p:sp>
-        <p:nvSpPr>
-          <p:cNvPr id="53" name="Native style row 6 accent1"/>
-          <p:cNvSpPr/>
-          <p:nvPr/>
-        </p:nvSpPr>
-        <p:spPr>
-          <a:xfrm>
-            <a:off x="3118104" y="5166360"/>
-            <a:ext cx="1298448" cy="530352"/>
-          </a:xfrm>
-          <a:prstGeom prst="rect">
-            <a:avLst/>
-          </a:prstGeom>
-          <a:ln>
-            <a:noFill/>
-          </a:ln>
-        </p:spPr>
-        <p:style>
-          <a:lnRef idx="0">
-            <a:schemeClr val="accent1"/>
-          </a:lnRef>
-          <a:fillRef idx="1">
-            <a:schemeClr val="accent1">
-              <a:shade val="45000"/>
-            </a:schemeClr>
-          </a:fillRef>
-          <a:effectRef idx="3">
-            <a:schemeClr val="accent1"/>
-          </a:effectRef>
-          <a:fontRef idx="minor">
-            <a:schemeClr val="lt1"/>
-          </a:fontRef>
-        </p:style>
-        <p:txBody>
-          <a:bodyPr wrap="square" lIns="45720" rIns="45720" tIns="0" bIns="0" anchor="ctr">
-            <a:noAutofit/>
-          </a:bodyPr>
-          <a:lstStyle/>
-          <a:p>
-            <a:pPr algn="ctr">
-              <a:buNone/>
-            </a:pPr>
-            <a:r>
-              <a:rPr lang="zh-TW" sz="2000" b="1">
-                <a:solidFill>
-                  <a:schemeClr val="lt1"/>
-                </a:solidFill>
-                <a:latin typeface="+mn-lt"/>
-                <a:ea typeface="+mn-ea"/>
-              </a:rPr>
-              <a:t>Abc</a:t>
-            </a:r>
-            <a:endParaRPr lang="zh-TW"/>
-          </a:p>
-        </p:txBody>
-      </p:sp>
-      <p:sp>
-        <p:nvSpPr>
-          <p:cNvPr id="54" name="Native style row 6 accent2"/>
-          <p:cNvSpPr/>
-          <p:nvPr/>
-        </p:nvSpPr>
-        <p:spPr>
-          <a:xfrm>
-            <a:off x="4544568" y="5166360"/>
-            <a:ext cx="1298448" cy="530352"/>
-          </a:xfrm>
-          <a:prstGeom prst="rect">
-            <a:avLst/>
-          </a:prstGeom>
-          <a:ln>
-            <a:noFill/>
-          </a:ln>
-        </p:spPr>
-        <p:style>
-          <a:lnRef idx="0">
-            <a:schemeClr val="accent2"/>
-          </a:lnRef>
-          <a:fillRef idx="1">
-            <a:schemeClr val="accent2">
-              <a:shade val="45000"/>
-            </a:schemeClr>
-          </a:fillRef>
-          <a:effectRef idx="3">
-            <a:schemeClr val="accent2"/>
-          </a:effectRef>
-          <a:fontRef idx="minor">
-            <a:schemeClr val="lt1"/>
-          </a:fontRef>
-        </p:style>
-        <p:txBody>
-          <a:bodyPr wrap="square" lIns="45720" rIns="45720" tIns="0" bIns="0" anchor="ctr">
-            <a:noAutofit/>
-          </a:bodyPr>
-          <a:lstStyle/>
-          <a:p>
-            <a:pPr algn="ctr">
-              <a:buNone/>
-            </a:pPr>
-            <a:r>
-              <a:rPr lang="zh-TW" sz="2000" b="1">
-                <a:solidFill>
-                  <a:schemeClr val="lt1"/>
-                </a:solidFill>
-                <a:latin typeface="+mn-lt"/>
-                <a:ea typeface="+mn-ea"/>
-              </a:rPr>
-              <a:t>Abc</a:t>
-            </a:r>
-            <a:endParaRPr lang="zh-TW"/>
-          </a:p>
-        </p:txBody>
-      </p:sp>
-      <p:sp>
-        <p:nvSpPr>
-          <p:cNvPr id="55" name="Native style row 6 accent3"/>
-          <p:cNvSpPr/>
-          <p:nvPr/>
-        </p:nvSpPr>
-        <p:spPr>
-          <a:xfrm>
-            <a:off x="5971032" y="5166360"/>
-            <a:ext cx="1298448" cy="530352"/>
-          </a:xfrm>
-          <a:prstGeom prst="rect">
-            <a:avLst/>
-          </a:prstGeom>
-          <a:ln>
-            <a:noFill/>
-          </a:ln>
-        </p:spPr>
-        <p:style>
-          <a:lnRef idx="0">
-            <a:schemeClr val="accent3"/>
-          </a:lnRef>
-          <a:fillRef idx="1">
-            <a:schemeClr val="accent3">
-              <a:shade val="45000"/>
-            </a:schemeClr>
-          </a:fillRef>
-          <a:effectRef idx="3">
-            <a:schemeClr val="accent3"/>
-          </a:effectRef>
-          <a:fontRef idx="minor">
-            <a:schemeClr val="lt1"/>
-          </a:fontRef>
-        </p:style>
-        <p:txBody>
-          <a:bodyPr wrap="square" lIns="45720" rIns="45720" tIns="0" bIns="0" anchor="ctr">
-            <a:noAutofit/>
-          </a:bodyPr>
-          <a:lstStyle/>
-          <a:p>
-            <a:pPr algn="ctr">
-              <a:buNone/>
-            </a:pPr>
-            <a:r>
-              <a:rPr lang="zh-TW" sz="2000" b="1">
-                <a:solidFill>
-                  <a:schemeClr val="lt1"/>
-                </a:solidFill>
-                <a:latin typeface="+mn-lt"/>
-                <a:ea typeface="+mn-ea"/>
-              </a:rPr>
-              <a:t>Abc</a:t>
-            </a:r>
-            <a:endParaRPr lang="zh-TW"/>
-          </a:p>
-        </p:txBody>
-      </p:sp>
-      <p:sp>
-        <p:nvSpPr>
-          <p:cNvPr id="56" name="Native style row 6 accent4"/>
-          <p:cNvSpPr/>
-          <p:nvPr/>
-        </p:nvSpPr>
-        <p:spPr>
-          <a:xfrm>
-            <a:off x="7397496" y="5166360"/>
-            <a:ext cx="1298448" cy="530352"/>
-          </a:xfrm>
-          <a:prstGeom prst="rect">
-            <a:avLst/>
-          </a:prstGeom>
-          <a:ln>
-            <a:noFill/>
-          </a:ln>
-        </p:spPr>
-        <p:style>
-          <a:lnRef idx="0">
-            <a:schemeClr val="accent4"/>
-          </a:lnRef>
-          <a:fillRef idx="1">
-            <a:schemeClr val="accent4">
-              <a:shade val="45000"/>
-            </a:schemeClr>
-          </a:fillRef>
-          <a:effectRef idx="3">
-            <a:schemeClr val="accent4"/>
-          </a:effectRef>
-          <a:fontRef idx="minor">
-            <a:schemeClr val="lt1"/>
-          </a:fontRef>
-        </p:style>
-        <p:txBody>
-          <a:bodyPr wrap="square" lIns="45720" rIns="45720" tIns="0" bIns="0" anchor="ctr">
-            <a:noAutofit/>
-          </a:bodyPr>
-          <a:lstStyle/>
-          <a:p>
-            <a:pPr algn="ctr">
-              <a:buNone/>
-            </a:pPr>
-            <a:r>
-              <a:rPr lang="zh-TW" sz="2000" b="1">
-                <a:solidFill>
-                  <a:schemeClr val="lt1"/>
-                </a:solidFill>
-                <a:latin typeface="+mn-lt"/>
-                <a:ea typeface="+mn-ea"/>
-              </a:rPr>
-              <a:t>Abc</a:t>
-            </a:r>
-            <a:endParaRPr lang="zh-TW"/>
-          </a:p>
-        </p:txBody>
-      </p:sp>
-      <p:sp>
-        <p:nvSpPr>
-          <p:cNvPr id="57" name="Native style row 6 accent5"/>
-          <p:cNvSpPr/>
-          <p:nvPr/>
-        </p:nvSpPr>
-        <p:spPr>
-          <a:xfrm>
-            <a:off x="8823960" y="5166360"/>
-            <a:ext cx="1298448" cy="530352"/>
-          </a:xfrm>
-          <a:prstGeom prst="rect">
-            <a:avLst/>
-          </a:prstGeom>
-          <a:ln>
-            <a:noFill/>
-          </a:ln>
-        </p:spPr>
-        <p:style>
-          <a:lnRef idx="0">
-            <a:schemeClr val="accent5"/>
-          </a:lnRef>
-          <a:fillRef idx="1">
-            <a:schemeClr val="accent5">
-              <a:shade val="45000"/>
-            </a:schemeClr>
-          </a:fillRef>
-          <a:effectRef idx="3">
-            <a:schemeClr val="accent5"/>
-          </a:effectRef>
-          <a:fontRef idx="minor">
-            <a:schemeClr val="lt1"/>
-          </a:fontRef>
-        </p:style>
-        <p:txBody>
-          <a:bodyPr wrap="square" lIns="45720" rIns="45720" tIns="0" bIns="0" anchor="ctr">
-            <a:noAutofit/>
-          </a:bodyPr>
-          <a:lstStyle/>
-          <a:p>
-            <a:pPr algn="ctr">
-              <a:buNone/>
-            </a:pPr>
-            <a:r>
-              <a:rPr lang="zh-TW" sz="2000" b="1">
-                <a:solidFill>
-                  <a:schemeClr val="lt1"/>
-                </a:solidFill>
-                <a:latin typeface="+mn-lt"/>
-                <a:ea typeface="+mn-ea"/>
-              </a:rPr>
-              <a:t>Abc</a:t>
-            </a:r>
-            <a:endParaRPr lang="zh-TW"/>
-          </a:p>
-        </p:txBody>
-      </p:sp>
-      <p:sp>
-        <p:nvSpPr>
-          <p:cNvPr id="58" name="Native style row 6 accent6"/>
-          <p:cNvSpPr/>
-          <p:nvPr/>
-        </p:nvSpPr>
-        <p:spPr>
-          <a:xfrm>
-            <a:off x="10250424" y="5166360"/>
-            <a:ext cx="1298448" cy="530352"/>
-          </a:xfrm>
-          <a:prstGeom prst="rect">
-            <a:avLst/>
+          <a:prstGeom prst="roundRect">
+            <a:avLst>
+              <a:gd name="adj" fmla="val 17241"/>
+            </a:avLst>
           </a:prstGeom>
           <a:ln>
             <a:noFill/>
@@ -6402,7 +8672,7 @@
               <a:shade val="37500"/>
             </a:schemeClr>
           </a:fillRef>
-          <a:effectRef idx="3">
+          <a:effectRef idx="0">
             <a:schemeClr val="accent6"/>
           </a:effectRef>
           <a:fontRef idx="minor">
@@ -6426,22 +8696,46 @@
                 <a:latin typeface="+mn-lt"/>
                 <a:ea typeface="+mn-ea"/>
               </a:rPr>
-              <a:t>Abc</a:t>
-            </a:r>
-            <a:endParaRPr lang="zh-TW"/>
-          </a:p>
-        </p:txBody>
-      </p:sp>
-      <p:sp>
-        <p:nvSpPr>
-          <p:cNvPr id="59" name="Gallery scope"/>
-          <p:cNvSpPr/>
-          <p:nvPr/>
-        </p:nvSpPr>
-        <p:spPr>
-          <a:xfrm>
-            <a:off x="365760" y="6080760"/>
-            <a:ext cx="11430000" cy="502920"/>
+              <a:t>關鍵步驟</a:t>
+            </a:r>
+            <a:endParaRPr lang="zh-TW"/>
+          </a:p>
+        </p:txBody>
+      </p:sp>
+      <p:sp>
+        <p:nvSpPr>
+          <p:cNvPr id="51" name="White editable shape"/>
+          <p:cNvSpPr/>
+          <p:nvPr/>
+        </p:nvSpPr>
+        <p:spPr>
+          <a:xfrm>
+            <a:off x="411480" y="6126480"/>
+            <a:ext cx="731520" cy="292608"/>
+          </a:xfrm>
+          <a:prstGeom prst="rect">
+            <a:avLst/>
+          </a:prstGeom>
+          <a:solidFill>
+            <a:srgbClr val="FFFFFF"/>
+          </a:solidFill>
+          <a:ln w="6350">
+            <a:solidFill>
+              <a:srgbClr val="7D8795"/>
+            </a:solidFill>
+          </a:ln>
+        </p:spPr>
+      </p:sp>
+      <p:sp>
+        <p:nvSpPr>
+          <p:cNvPr id="52" name="Gallery scope"/>
+          <p:cNvSpPr/>
+          <p:nvPr/>
+        </p:nvSpPr>
+        <p:spPr>
+          <a:xfrm>
+            <a:off x="1325880" y="6016752"/>
+            <a:ext cx="10424160" cy="548640"/>
           </a:xfrm>
           <a:prstGeom prst="rect">
             <a:avLst/>
@@ -6468,7 +8762,7 @@
                 <a:latin typeface="+mn-lt"/>
                 <a:ea typeface="+mn-ea"/>
               </a:rPr>
-              <a:t>這42個範例使用原生主題樣式引用；Office 選單由色彩集與效果矩陣產生，外觀依版本而異。</a:t>
+              <a:t>白色另選 #FFFFFF，不改 Text1。兩頁共70個可編輯矩形；這10款外觀不代表 Office Ribbon 可新增10個按鈕。</a:t>
             </a:r>
             <a:endParaRPr lang="zh-TW"/>
           </a:p>
@@ -6595,62 +8889,38 @@
         <a:font script="Geor" typeface="Sylfaen"/>
       </a:minorFont>
     </a:fontScheme>
-    <a:fmtScheme name="PPT Style Studio component effects">
+    <a:fmtScheme name="PPT Style Studio rectangle presets">
       <a:fillStyleLst>
         <a:solidFill>
           <a:schemeClr val="phClr"/>
         </a:solidFill>
-        <a:gradFill rotWithShape="1">
-          <a:gsLst>
-            <a:gs pos="0">
-              <a:schemeClr val="phClr">
-                <a:tint val="95000"/>
-              </a:schemeClr>
-            </a:gs>
-            <a:gs pos="100000">
-              <a:schemeClr val="phClr">
-                <a:shade val="95000"/>
-              </a:schemeClr>
-            </a:gs>
-          </a:gsLst>
-          <a:lin ang="5400000" scaled="0"/>
-        </a:gradFill>
-        <a:gradFill rotWithShape="1">
-          <a:gsLst>
-            <a:gs pos="0">
-              <a:schemeClr val="phClr">
-                <a:tint val="12000"/>
-              </a:schemeClr>
-            </a:gs>
-            <a:gs pos="100000">
-              <a:schemeClr val="phClr">
-                <a:tint val="20000"/>
-              </a:schemeClr>
-            </a:gs>
-          </a:gsLst>
-          <a:lin ang="5400000" scaled="0"/>
-        </a:gradFill>
+        <a:solidFill>
+          <a:schemeClr val="phClr">
+            <a:tint val="20000"/>
+          </a:schemeClr>
+        </a:solidFill>
+        <a:solidFill>
+          <a:srgbClr val="F2F2F2"/>
+        </a:solidFill>
       </a:fillStyleLst>
       <a:lnStyleLst>
-        <a:ln w="9525" cap="flat" cmpd="sng" algn="ctr">
+        <a:ln w="12700" cap="flat" cmpd="sng" algn="ctr">
           <a:solidFill>
-            <a:schemeClr val="phClr"/>
+            <a:srgbClr val="BFBFBF"/>
           </a:solidFill>
           <a:prstDash val="solid"/>
           <a:miter lim="800000"/>
         </a:ln>
-        <a:ln w="12700" cap="flat" cmpd="sng" algn="ctr">
+        <a:ln w="6350" cap="flat" cmpd="sng" algn="ctr">
           <a:solidFill>
-            <a:schemeClr val="phClr"/>
+            <a:srgbClr val="D9D9D9"/>
           </a:solidFill>
           <a:prstDash val="solid"/>
           <a:miter lim="800000"/>
         </a:ln>
-        <a:ln w="9525" cap="flat" cmpd="sng" algn="ctr">
+        <a:ln w="22225" cap="flat" cmpd="sng" algn="ctr">
           <a:solidFill>
-            <a:schemeClr val="phClr">
-              <a:tint val="30000"/>
-            </a:schemeClr>
+            <a:schemeClr val="phClr"/>
           </a:solidFill>
           <a:prstDash val="solid"/>
           <a:miter lim="800000"/>
@@ -6659,30 +8929,24 @@
       <a:effectStyleLst>
         <a:effectStyle>
           <a:effectLst>
-            <a:outerShdw blurRad="53340" dist="19050" dir="5400000" algn="ctr" rotWithShape="0">
+            <a:outerShdw blurRad="88900" dist="25400" dir="5400000" algn="ctr" rotWithShape="0">
               <a:srgbClr val="000000">
-                <a:alpha val="20000"/>
+                <a:alpha val="24000"/>
               </a:srgbClr>
             </a:outerShdw>
           </a:effectLst>
         </a:effectStyle>
         <a:effectStyle>
           <a:effectLst>
-            <a:outerShdw blurRad="88900" dist="25400" dir="5400000" algn="ctr" rotWithShape="0">
+            <a:outerShdw blurRad="53340" dist="19050" dir="5400000" algn="ctr" rotWithShape="0">
               <a:srgbClr val="000000">
-                <a:alpha val="18000"/>
+                <a:alpha val="28000"/>
               </a:srgbClr>
             </a:outerShdw>
           </a:effectLst>
         </a:effectStyle>
         <a:effectStyle>
-          <a:effectLst>
-            <a:outerShdw blurRad="88900" dist="25400" dir="5400000" algn="ctr" rotWithShape="0">
-              <a:srgbClr val="000000">
-                <a:alpha val="24000"/>
-              </a:srgbClr>
-            </a:outerShdw>
-          </a:effectLst>
+          <a:effectLst/>
         </a:effectStyle>
       </a:effectStyleLst>
       <a:bgFillStyleLst>
